--- a/slides/CSC336-Lecture-09-Flexbox-and-Grid-Layout.pptx
+++ b/slides/CSC336-Lecture-09-Flexbox-and-Grid-Layout.pptx
@@ -4475,13 +4475,14 @@
         </p:nvPicPr>
         <p:blipFill>
           <a:blip r:embed="rId1"/>
-          <a:srcRect l="0" r="0" t="0" b="0"/>
-          <a:stretch/>
+          <a:stretch>
+            <a:fillRect/>
+          </a:stretch>
         </p:blipFill>
         <p:spPr>
           <a:xfrm>
-            <a:off x="640080" y="2057400"/>
-            <a:ext cx="10911535" cy="4114800"/>
+            <a:off x="4784241" y="2057400"/>
+            <a:ext cx="2623213" cy="4114800"/>
           </a:xfrm>
           <a:prstGeom prst="rect">
             <a:avLst/>
@@ -5091,13 +5092,14 @@
         </p:nvPicPr>
         <p:blipFill>
           <a:blip r:embed="rId1"/>
-          <a:srcRect l="0" r="0" t="0" b="0"/>
-          <a:stretch/>
+          <a:stretch>
+            <a:fillRect/>
+          </a:stretch>
         </p:blipFill>
         <p:spPr>
           <a:xfrm>
-            <a:off x="640080" y="2057400"/>
-            <a:ext cx="10911535" cy="4114800"/>
+            <a:off x="3208851" y="2057400"/>
+            <a:ext cx="5773994" cy="4114800"/>
           </a:xfrm>
           <a:prstGeom prst="rect">
             <a:avLst/>
@@ -5627,13 +5629,14 @@
         </p:nvPicPr>
         <p:blipFill>
           <a:blip r:embed="rId1"/>
-          <a:srcRect l="0" r="0" t="0" b="0"/>
-          <a:stretch/>
+          <a:stretch>
+            <a:fillRect/>
+          </a:stretch>
         </p:blipFill>
         <p:spPr>
           <a:xfrm>
-            <a:off x="640080" y="2057400"/>
-            <a:ext cx="10911535" cy="4114800"/>
+            <a:off x="1141002" y="2057400"/>
+            <a:ext cx="9909691" cy="4114800"/>
           </a:xfrm>
           <a:prstGeom prst="rect">
             <a:avLst/>
@@ -6164,13 +6167,14 @@
         </p:nvPicPr>
         <p:blipFill>
           <a:blip r:embed="rId1"/>
-          <a:srcRect l="0" r="0" t="0" b="0"/>
-          <a:stretch/>
+          <a:stretch>
+            <a:fillRect/>
+          </a:stretch>
         </p:blipFill>
         <p:spPr>
           <a:xfrm>
-            <a:off x="640080" y="2057400"/>
-            <a:ext cx="10911535" cy="4114800"/>
+            <a:off x="2013791" y="2057400"/>
+            <a:ext cx="8164112" cy="4114800"/>
           </a:xfrm>
           <a:prstGeom prst="rect">
             <a:avLst/>
@@ -6761,13 +6765,14 @@
         </p:nvPicPr>
         <p:blipFill>
           <a:blip r:embed="rId1"/>
-          <a:srcRect l="0" r="0" t="0" b="0"/>
-          <a:stretch/>
+          <a:stretch>
+            <a:fillRect/>
+          </a:stretch>
         </p:blipFill>
         <p:spPr>
           <a:xfrm>
-            <a:off x="640080" y="2057400"/>
-            <a:ext cx="10911535" cy="4114800"/>
+            <a:off x="1981048" y="2057400"/>
+            <a:ext cx="8229600" cy="4114800"/>
           </a:xfrm>
           <a:prstGeom prst="rect">
             <a:avLst/>
@@ -8015,13 +8020,14 @@
         </p:nvPicPr>
         <p:blipFill>
           <a:blip r:embed="rId1"/>
-          <a:srcRect l="0" r="0" t="0" b="0"/>
-          <a:stretch/>
+          <a:stretch>
+            <a:fillRect/>
+          </a:stretch>
         </p:blipFill>
         <p:spPr>
           <a:xfrm>
-            <a:off x="640080" y="2057400"/>
-            <a:ext cx="10911535" cy="4114800"/>
+            <a:off x="2310029" y="2057400"/>
+            <a:ext cx="7571637" cy="4114800"/>
           </a:xfrm>
           <a:prstGeom prst="rect">
             <a:avLst/>
@@ -8631,13 +8637,14 @@
         </p:nvPicPr>
         <p:blipFill>
           <a:blip r:embed="rId1"/>
-          <a:srcRect l="0" r="0" t="0" b="0"/>
-          <a:stretch/>
+          <a:stretch>
+            <a:fillRect/>
+          </a:stretch>
         </p:blipFill>
         <p:spPr>
           <a:xfrm>
-            <a:off x="640080" y="2057400"/>
-            <a:ext cx="10911535" cy="4114800"/>
+            <a:off x="1158088" y="2057400"/>
+            <a:ext cx="9875520" cy="4114800"/>
           </a:xfrm>
           <a:prstGeom prst="rect">
             <a:avLst/>
@@ -9187,13 +9194,14 @@
         </p:nvPicPr>
         <p:blipFill>
           <a:blip r:embed="rId1"/>
-          <a:srcRect l="0" r="0" t="0" b="0"/>
-          <a:stretch/>
+          <a:stretch>
+            <a:fillRect/>
+          </a:stretch>
         </p:blipFill>
         <p:spPr>
           <a:xfrm>
-            <a:off x="640080" y="2057400"/>
-            <a:ext cx="10911535" cy="4114800"/>
+            <a:off x="1033756" y="2057400"/>
+            <a:ext cx="10124184" cy="4114800"/>
           </a:xfrm>
           <a:prstGeom prst="rect">
             <a:avLst/>
@@ -9783,13 +9791,14 @@
         </p:nvPicPr>
         <p:blipFill>
           <a:blip r:embed="rId1"/>
-          <a:srcRect l="0" r="0" t="0" b="0"/>
-          <a:stretch/>
+          <a:stretch>
+            <a:fillRect/>
+          </a:stretch>
         </p:blipFill>
         <p:spPr>
           <a:xfrm>
-            <a:off x="640080" y="2057400"/>
-            <a:ext cx="10911535" cy="4114800"/>
+            <a:off x="1688872" y="2057400"/>
+            <a:ext cx="8813950" cy="4114800"/>
           </a:xfrm>
           <a:prstGeom prst="rect">
             <a:avLst/>
@@ -10439,13 +10448,14 @@
         </p:nvPicPr>
         <p:blipFill>
           <a:blip r:embed="rId1"/>
-          <a:srcRect l="0" r="0" t="0" b="0"/>
-          <a:stretch/>
+          <a:stretch>
+            <a:fillRect/>
+          </a:stretch>
         </p:blipFill>
         <p:spPr>
           <a:xfrm>
-            <a:off x="640080" y="2057400"/>
-            <a:ext cx="10911535" cy="4114800"/>
+            <a:off x="2582740" y="2057400"/>
+            <a:ext cx="7026215" cy="4114800"/>
           </a:xfrm>
           <a:prstGeom prst="rect">
             <a:avLst/>
@@ -12732,13 +12742,14 @@
         </p:nvPicPr>
         <p:blipFill>
           <a:blip r:embed="rId1"/>
-          <a:srcRect l="0" r="0" t="0" b="0"/>
-          <a:stretch/>
+          <a:stretch>
+            <a:fillRect/>
+          </a:stretch>
         </p:blipFill>
         <p:spPr>
           <a:xfrm>
-            <a:off x="640080" y="2057400"/>
-            <a:ext cx="10911535" cy="4114800"/>
+            <a:off x="1765738" y="2057400"/>
+            <a:ext cx="8660219" cy="4114800"/>
           </a:xfrm>
           <a:prstGeom prst="rect">
             <a:avLst/>
@@ -13753,13 +13764,14 @@
         </p:nvPicPr>
         <p:blipFill>
           <a:blip r:embed="rId1"/>
-          <a:srcRect l="0" r="0" t="0" b="0"/>
-          <a:stretch/>
+          <a:stretch>
+            <a:fillRect/>
+          </a:stretch>
         </p:blipFill>
         <p:spPr>
           <a:xfrm>
-            <a:off x="640080" y="2057400"/>
-            <a:ext cx="10911535" cy="4114800"/>
+            <a:off x="640080" y="3516262"/>
+            <a:ext cx="10911535" cy="1197077"/>
           </a:xfrm>
           <a:prstGeom prst="rect">
             <a:avLst/>
@@ -14037,13 +14049,14 @@
         </p:nvPicPr>
         <p:blipFill>
           <a:blip r:embed="rId1"/>
-          <a:srcRect l="0" r="0" t="0" b="0"/>
-          <a:stretch/>
+          <a:stretch>
+            <a:fillRect/>
+          </a:stretch>
         </p:blipFill>
         <p:spPr>
           <a:xfrm>
-            <a:off x="640080" y="2331720"/>
-            <a:ext cx="10911535" cy="3840480"/>
+            <a:off x="1406031" y="2331720"/>
+            <a:ext cx="9379634" cy="3840480"/>
           </a:xfrm>
           <a:prstGeom prst="rect">
             <a:avLst/>
@@ -14534,13 +14547,14 @@
         </p:nvPicPr>
         <p:blipFill>
           <a:blip r:embed="rId1"/>
-          <a:srcRect l="0" r="0" t="0" b="0"/>
-          <a:stretch/>
+          <a:stretch>
+            <a:fillRect/>
+          </a:stretch>
         </p:blipFill>
         <p:spPr>
           <a:xfrm>
-            <a:off x="640080" y="2057400"/>
-            <a:ext cx="10911535" cy="4114800"/>
+            <a:off x="4931239" y="2057400"/>
+            <a:ext cx="2329218" cy="4114800"/>
           </a:xfrm>
           <a:prstGeom prst="rect">
             <a:avLst/>
@@ -15051,13 +15065,14 @@
         </p:nvPicPr>
         <p:blipFill>
           <a:blip r:embed="rId1"/>
-          <a:srcRect l="0" r="0" t="0" b="0"/>
-          <a:stretch/>
+          <a:stretch>
+            <a:fillRect/>
+          </a:stretch>
         </p:blipFill>
         <p:spPr>
           <a:xfrm>
-            <a:off x="640080" y="2057400"/>
-            <a:ext cx="10911535" cy="4114800"/>
+            <a:off x="3678365" y="2057400"/>
+            <a:ext cx="4834965" cy="4114800"/>
           </a:xfrm>
           <a:prstGeom prst="rect">
             <a:avLst/>

--- a/slides/CSC336-Lecture-09-Flexbox-and-Grid-Layout.pptx
+++ b/slides/CSC336-Lecture-09-Flexbox-and-Grid-Layout.pptx
@@ -4188,11 +4188,11 @@
         <p:spPr>
           <a:xfrm>
             <a:off x="640080" y="1965960"/>
-            <a:ext cx="10911535" cy="1069848"/>
+            <a:ext cx="10911535" cy="815340"/>
           </a:xfrm>
           <a:prstGeom prst="roundRect">
             <a:avLst>
-              <a:gd name="adj" fmla="val 6838"/>
+              <a:gd name="adj" fmla="val 8972"/>
             </a:avLst>
           </a:prstGeom>
           <a:solidFill>
@@ -4210,7 +4210,7 @@
         <p:spPr>
           <a:xfrm>
             <a:off x="960120" y="2194560"/>
-            <a:ext cx="10271455" cy="612648"/>
+            <a:ext cx="10271455" cy="358140"/>
           </a:xfrm>
           <a:prstGeom prst="rect">
             <a:avLst/>
@@ -4686,11 +4686,11 @@
         <p:spPr>
           <a:xfrm>
             <a:off x="640080" y="1965960"/>
-            <a:ext cx="10911535" cy="2606040"/>
+            <a:ext cx="10911535" cy="1882140"/>
           </a:xfrm>
           <a:prstGeom prst="roundRect">
             <a:avLst>
-              <a:gd name="adj" fmla="val 2807"/>
+              <a:gd name="adj" fmla="val 3887"/>
             </a:avLst>
           </a:prstGeom>
           <a:solidFill>
@@ -4708,7 +4708,7 @@
         <p:spPr>
           <a:xfrm>
             <a:off x="960120" y="2194560"/>
-            <a:ext cx="10271455" cy="2148840"/>
+            <a:ext cx="10271455" cy="1424940"/>
           </a:xfrm>
           <a:prstGeom prst="rect">
             <a:avLst/>
@@ -4829,8 +4829,8 @@
         </p:nvSpPr>
         <p:spPr>
           <a:xfrm>
-            <a:off x="640080" y="4800600"/>
-            <a:ext cx="10911535" cy="1463040"/>
+            <a:off x="640080" y="4076700"/>
+            <a:ext cx="10911535" cy="2186940"/>
           </a:xfrm>
           <a:prstGeom prst="rect">
             <a:avLst/>
@@ -5303,11 +5303,11 @@
         <p:spPr>
           <a:xfrm>
             <a:off x="640080" y="1965960"/>
-            <a:ext cx="10911535" cy="1069848"/>
+            <a:ext cx="10911535" cy="815340"/>
           </a:xfrm>
           <a:prstGeom prst="roundRect">
             <a:avLst>
-              <a:gd name="adj" fmla="val 6838"/>
+              <a:gd name="adj" fmla="val 8972"/>
             </a:avLst>
           </a:prstGeom>
           <a:solidFill>
@@ -5325,7 +5325,7 @@
         <p:spPr>
           <a:xfrm>
             <a:off x="960120" y="2194560"/>
-            <a:ext cx="10271455" cy="612648"/>
+            <a:ext cx="10271455" cy="358140"/>
           </a:xfrm>
           <a:prstGeom prst="rect">
             <a:avLst/>
@@ -5366,8 +5366,8 @@
         </p:nvSpPr>
         <p:spPr>
           <a:xfrm>
-            <a:off x="640080" y="3264408"/>
-            <a:ext cx="10911535" cy="2999232"/>
+            <a:off x="640080" y="3009900"/>
+            <a:ext cx="10911535" cy="3253740"/>
           </a:xfrm>
           <a:prstGeom prst="rect">
             <a:avLst/>
@@ -5840,11 +5840,11 @@
         <p:spPr>
           <a:xfrm>
             <a:off x="640080" y="1965960"/>
-            <a:ext cx="10911535" cy="1837944"/>
+            <a:ext cx="10911535" cy="1348740"/>
           </a:xfrm>
           <a:prstGeom prst="roundRect">
             <a:avLst>
-              <a:gd name="adj" fmla="val 3980"/>
+              <a:gd name="adj" fmla="val 5424"/>
             </a:avLst>
           </a:prstGeom>
           <a:solidFill>
@@ -5862,7 +5862,7 @@
         <p:spPr>
           <a:xfrm>
             <a:off x="960120" y="2194560"/>
-            <a:ext cx="10271455" cy="1380744"/>
+            <a:ext cx="10271455" cy="891540"/>
           </a:xfrm>
           <a:prstGeom prst="rect">
             <a:avLst/>
@@ -6378,11 +6378,11 @@
         <p:spPr>
           <a:xfrm>
             <a:off x="640080" y="1965960"/>
-            <a:ext cx="10911535" cy="2990088"/>
+            <a:ext cx="10911535" cy="2148840"/>
           </a:xfrm>
           <a:prstGeom prst="roundRect">
             <a:avLst>
-              <a:gd name="adj" fmla="val 2446"/>
+              <a:gd name="adj" fmla="val 3404"/>
             </a:avLst>
           </a:prstGeom>
           <a:solidFill>
@@ -6400,7 +6400,7 @@
         <p:spPr>
           <a:xfrm>
             <a:off x="960120" y="2194560"/>
-            <a:ext cx="10271455" cy="2532888"/>
+            <a:ext cx="10271455" cy="1691640"/>
           </a:xfrm>
           <a:prstGeom prst="rect">
             <a:avLst/>
@@ -7654,11 +7654,11 @@
         <p:spPr>
           <a:xfrm>
             <a:off x="640080" y="1965960"/>
-            <a:ext cx="10911535" cy="1837944"/>
+            <a:ext cx="10911535" cy="1348740"/>
           </a:xfrm>
           <a:prstGeom prst="roundRect">
             <a:avLst>
-              <a:gd name="adj" fmla="val 3980"/>
+              <a:gd name="adj" fmla="val 5424"/>
             </a:avLst>
           </a:prstGeom>
           <a:solidFill>
@@ -7676,7 +7676,7 @@
         <p:spPr>
           <a:xfrm>
             <a:off x="960120" y="2194560"/>
-            <a:ext cx="10271455" cy="1380744"/>
+            <a:ext cx="10271455" cy="891540"/>
           </a:xfrm>
           <a:prstGeom prst="rect">
             <a:avLst/>
@@ -7757,8 +7757,8 @@
         </p:nvSpPr>
         <p:spPr>
           <a:xfrm>
-            <a:off x="640080" y="4032504"/>
-            <a:ext cx="10911535" cy="2231136"/>
+            <a:off x="640080" y="3543300"/>
+            <a:ext cx="10911535" cy="2720340"/>
           </a:xfrm>
           <a:prstGeom prst="rect">
             <a:avLst/>
@@ -8231,11 +8231,11 @@
         <p:spPr>
           <a:xfrm>
             <a:off x="640080" y="1965960"/>
-            <a:ext cx="10911535" cy="2606040"/>
+            <a:ext cx="10911535" cy="1882140"/>
           </a:xfrm>
           <a:prstGeom prst="roundRect">
             <a:avLst>
-              <a:gd name="adj" fmla="val 2807"/>
+              <a:gd name="adj" fmla="val 3887"/>
             </a:avLst>
           </a:prstGeom>
           <a:solidFill>
@@ -8253,7 +8253,7 @@
         <p:spPr>
           <a:xfrm>
             <a:off x="960120" y="2194560"/>
-            <a:ext cx="10271455" cy="2148840"/>
+            <a:ext cx="10271455" cy="1424940"/>
           </a:xfrm>
           <a:prstGeom prst="rect">
             <a:avLst/>
@@ -8374,8 +8374,8 @@
         </p:nvSpPr>
         <p:spPr>
           <a:xfrm>
-            <a:off x="640080" y="4800600"/>
-            <a:ext cx="10911535" cy="1463040"/>
+            <a:off x="640080" y="4076700"/>
+            <a:ext cx="10911535" cy="2186940"/>
           </a:xfrm>
           <a:prstGeom prst="rect">
             <a:avLst/>
@@ -8848,11 +8848,11 @@
         <p:spPr>
           <a:xfrm>
             <a:off x="640080" y="1965960"/>
-            <a:ext cx="10911535" cy="1453896"/>
+            <a:ext cx="10911535" cy="1082040"/>
           </a:xfrm>
           <a:prstGeom prst="roundRect">
             <a:avLst>
-              <a:gd name="adj" fmla="val 5031"/>
+              <a:gd name="adj" fmla="val 6761"/>
             </a:avLst>
           </a:prstGeom>
           <a:solidFill>
@@ -8870,7 +8870,7 @@
         <p:spPr>
           <a:xfrm>
             <a:off x="960120" y="2194560"/>
-            <a:ext cx="10271455" cy="996696"/>
+            <a:ext cx="10271455" cy="624840"/>
           </a:xfrm>
           <a:prstGeom prst="rect">
             <a:avLst/>
@@ -8931,8 +8931,8 @@
         </p:nvSpPr>
         <p:spPr>
           <a:xfrm>
-            <a:off x="640080" y="3648456"/>
-            <a:ext cx="10911535" cy="2615184"/>
+            <a:off x="640080" y="3276600"/>
+            <a:ext cx="10911535" cy="2987040"/>
           </a:xfrm>
           <a:prstGeom prst="rect">
             <a:avLst/>
@@ -9405,11 +9405,11 @@
         <p:spPr>
           <a:xfrm>
             <a:off x="640080" y="1965960"/>
-            <a:ext cx="10911535" cy="2221992"/>
+            <a:ext cx="10911535" cy="1615440"/>
           </a:xfrm>
           <a:prstGeom prst="roundRect">
             <a:avLst>
-              <a:gd name="adj" fmla="val 3292"/>
+              <a:gd name="adj" fmla="val 4528"/>
             </a:avLst>
           </a:prstGeom>
           <a:solidFill>
@@ -9427,7 +9427,7 @@
         <p:spPr>
           <a:xfrm>
             <a:off x="960120" y="2194560"/>
-            <a:ext cx="10271455" cy="1764792"/>
+            <a:ext cx="10271455" cy="1158240"/>
           </a:xfrm>
           <a:prstGeom prst="rect">
             <a:avLst/>
@@ -9528,8 +9528,8 @@
         </p:nvSpPr>
         <p:spPr>
           <a:xfrm>
-            <a:off x="640080" y="4416552"/>
-            <a:ext cx="10911535" cy="1847088"/>
+            <a:off x="640080" y="3810000"/>
+            <a:ext cx="10911535" cy="2453640"/>
           </a:xfrm>
           <a:prstGeom prst="rect">
             <a:avLst/>
@@ -10002,11 +10002,11 @@
         <p:spPr>
           <a:xfrm>
             <a:off x="640080" y="1965960"/>
-            <a:ext cx="10911535" cy="3291840"/>
+            <a:ext cx="10911535" cy="2415540"/>
           </a:xfrm>
           <a:prstGeom prst="roundRect">
             <a:avLst>
-              <a:gd name="adj" fmla="val 2222"/>
+              <a:gd name="adj" fmla="val 3028"/>
             </a:avLst>
           </a:prstGeom>
           <a:solidFill>
@@ -10024,7 +10024,7 @@
         <p:spPr>
           <a:xfrm>
             <a:off x="960120" y="2194560"/>
-            <a:ext cx="10271455" cy="2834640"/>
+            <a:ext cx="10271455" cy="1958340"/>
           </a:xfrm>
           <a:prstGeom prst="rect">
             <a:avLst/>
@@ -10185,8 +10185,8 @@
         </p:nvSpPr>
         <p:spPr>
           <a:xfrm>
-            <a:off x="640080" y="5486400"/>
-            <a:ext cx="10911535" cy="777240"/>
+            <a:off x="640080" y="4610100"/>
+            <a:ext cx="10911535" cy="1653540"/>
           </a:xfrm>
           <a:prstGeom prst="rect">
             <a:avLst/>
@@ -10659,11 +10659,11 @@
         <p:spPr>
           <a:xfrm>
             <a:off x="640080" y="1965960"/>
-            <a:ext cx="10911535" cy="1069848"/>
+            <a:ext cx="10911535" cy="815340"/>
           </a:xfrm>
           <a:prstGeom prst="roundRect">
             <a:avLst>
-              <a:gd name="adj" fmla="val 6838"/>
+              <a:gd name="adj" fmla="val 8972"/>
             </a:avLst>
           </a:prstGeom>
           <a:solidFill>
@@ -10681,7 +10681,7 @@
         <p:spPr>
           <a:xfrm>
             <a:off x="960120" y="2194560"/>
-            <a:ext cx="10271455" cy="612648"/>
+            <a:ext cx="10271455" cy="358140"/>
           </a:xfrm>
           <a:prstGeom prst="rect">
             <a:avLst/>
@@ -10722,8 +10722,8 @@
         </p:nvSpPr>
         <p:spPr>
           <a:xfrm>
-            <a:off x="640080" y="3264408"/>
-            <a:ext cx="10911535" cy="2999232"/>
+            <a:off x="640080" y="3009900"/>
+            <a:ext cx="10911535" cy="3253740"/>
           </a:xfrm>
           <a:prstGeom prst="rect">
             <a:avLst/>
@@ -12275,11 +12275,11 @@
         <p:spPr>
           <a:xfrm>
             <a:off x="640080" y="1965960"/>
-            <a:ext cx="10911535" cy="3931920"/>
+            <a:ext cx="10911535" cy="3215640"/>
           </a:xfrm>
           <a:prstGeom prst="roundRect">
             <a:avLst>
-              <a:gd name="adj" fmla="val 1860"/>
+              <a:gd name="adj" fmla="val 2275"/>
             </a:avLst>
           </a:prstGeom>
           <a:solidFill>
@@ -12297,7 +12297,7 @@
         <p:spPr>
           <a:xfrm>
             <a:off x="960120" y="2194560"/>
-            <a:ext cx="10271455" cy="3474720"/>
+            <a:ext cx="10271455" cy="2758440"/>
           </a:xfrm>
           <a:prstGeom prst="rect">
             <a:avLst/>
@@ -14013,12 +14013,116 @@
         </p:nvSpPr>
         <p:spPr>
           <a:xfrm>
-            <a:off x="530352" y="2221992"/>
-            <a:ext cx="11130991" cy="4059936"/>
+            <a:off x="640080" y="2240280"/>
+            <a:ext cx="10911535" cy="1263015"/>
           </a:xfrm>
           <a:prstGeom prst="roundRect">
             <a:avLst>
-              <a:gd name="adj" fmla="val 1351"/>
+              <a:gd name="adj" fmla="val 5792"/>
+            </a:avLst>
+          </a:prstGeom>
+          <a:solidFill>
+            <a:srgbClr val="1E1E4C"/>
+          </a:solidFill>
+          <a:ln/>
+        </p:spPr>
+      </p:sp>
+      <p:sp>
+        <p:nvSpPr>
+          <p:cNvPr id="6" name="Text 4"/>
+          <p:cNvSpPr txBox="1"/>
+          <p:nvPr/>
+        </p:nvSpPr>
+        <p:spPr>
+          <a:xfrm>
+            <a:off x="960120" y="2468880"/>
+            <a:ext cx="10271455" cy="805815"/>
+          </a:xfrm>
+          <a:prstGeom prst="rect">
+            <a:avLst/>
+          </a:prstGeom>
+          <a:noFill/>
+          <a:ln/>
+        </p:spPr>
+        <p:txBody>
+          <a:bodyPr wrap="square" lIns="0" tIns="0" rIns="0" bIns="0" rtlCol="0" anchor="t"/>
+          <a:lstStyle/>
+          <a:p>
+            <a:pPr indent="0" marL="0">
+              <a:lnSpc>
+                <a:spcPct val="125000"/>
+              </a:lnSpc>
+              <a:buNone/>
+            </a:pPr>
+            <a:r>
+              <a:rPr lang="en-US" sz="1250" dirty="0">
+                <a:solidFill>
+                  <a:srgbClr val="C9D3F5"/>
+                </a:solidFill>
+                <a:latin typeface="Courier New" pitchFamily="34" charset="0"/>
+                <a:ea typeface="Courier New" pitchFamily="34" charset="-122"/>
+                <a:cs typeface="Courier New" pitchFamily="34" charset="-120"/>
+              </a:rPr>
+              <a:t>.flex-row {</a:t>
+            </a:r>
+            <a:endParaRPr lang="en-US" sz="1250" dirty="0"/>
+          </a:p>
+          <a:p>
+            <a:pPr indent="0" marL="0">
+              <a:lnSpc>
+                <a:spcPct val="125000"/>
+              </a:lnSpc>
+              <a:buNone/>
+            </a:pPr>
+            <a:r>
+              <a:rPr lang="en-US" sz="1250" dirty="0">
+                <a:solidFill>
+                  <a:srgbClr val="C9D3F5"/>
+                </a:solidFill>
+                <a:latin typeface="Courier New" pitchFamily="34" charset="0"/>
+                <a:ea typeface="Courier New" pitchFamily="34" charset="-122"/>
+                <a:cs typeface="Courier New" pitchFamily="34" charset="-120"/>
+              </a:rPr>
+              <a:t>  display: flex; /* main axis: horizontal, left to right */</a:t>
+            </a:r>
+            <a:endParaRPr lang="en-US" sz="1250" dirty="0"/>
+          </a:p>
+          <a:p>
+            <a:pPr indent="0" marL="0">
+              <a:lnSpc>
+                <a:spcPct val="125000"/>
+              </a:lnSpc>
+              <a:buNone/>
+            </a:pPr>
+            <a:r>
+              <a:rPr lang="en-US" sz="1250" dirty="0">
+                <a:solidFill>
+                  <a:srgbClr val="C9D3F5"/>
+                </a:solidFill>
+                <a:latin typeface="Courier New" pitchFamily="34" charset="0"/>
+                <a:ea typeface="Courier New" pitchFamily="34" charset="-122"/>
+                <a:cs typeface="Courier New" pitchFamily="34" charset="-120"/>
+              </a:rPr>
+              <a:t>}</a:t>
+            </a:r>
+            <a:endParaRPr lang="en-US" sz="1250" dirty="0"/>
+          </a:p>
+        </p:txBody>
+      </p:sp>
+      <p:sp>
+        <p:nvSpPr>
+          <p:cNvPr id="7" name="Shape 5"/>
+          <p:cNvSpPr/>
+          <p:nvPr/>
+        </p:nvSpPr>
+        <p:spPr>
+          <a:xfrm>
+            <a:off x="530352" y="3667887"/>
+            <a:ext cx="11130991" cy="2659761"/>
+          </a:xfrm>
+          <a:prstGeom prst="roundRect">
+            <a:avLst>
+              <a:gd name="adj" fmla="val 2063"/>
             </a:avLst>
           </a:prstGeom>
           <a:solidFill>
@@ -14041,7 +14145,7 @@
       </p:sp>
       <p:pic>
         <p:nvPicPr>
-          <p:cNvPr id="6" name="Image 0" descr="D:/GitHub/mern-web-book/docs/assets/img/lecture-09/main-cross-axis.png">    </p:cNvPr>
+          <p:cNvPr id="8" name="Image 0" descr="D:/GitHub/mern-web-book/docs/assets/img/lecture-09/main-cross-axis.png">    </p:cNvPr>
           <p:cNvPicPr>
             <a:picLocks noChangeAspect="1"/>
           </p:cNvPicPr>
@@ -14055,8 +14159,8 @@
         </p:blipFill>
         <p:spPr>
           <a:xfrm>
-            <a:off x="1406031" y="2331720"/>
-            <a:ext cx="9379634" cy="3840480"/>
+            <a:off x="3115860" y="3777615"/>
+            <a:ext cx="5959976" cy="2440305"/>
           </a:xfrm>
           <a:prstGeom prst="rect">
             <a:avLst/>
@@ -14065,7 +14169,7 @@
       </p:pic>
       <p:sp>
         <p:nvSpPr>
-          <p:cNvPr id="7" name="Text 4"/>
+          <p:cNvPr id="9" name="Text 6"/>
           <p:cNvSpPr txBox="1"/>
           <p:nvPr/>
         </p:nvSpPr>
@@ -14104,7 +14208,7 @@
       </p:sp>
       <p:sp>
         <p:nvSpPr>
-          <p:cNvPr id="8" name="Text 5"/>
+          <p:cNvPr id="10" name="Text 7"/>
           <p:cNvSpPr txBox="1"/>
           <p:nvPr/>
         </p:nvSpPr>
@@ -14260,11 +14364,11 @@
         <p:spPr>
           <a:xfrm>
             <a:off x="640080" y="1965960"/>
-            <a:ext cx="10911535" cy="1069848"/>
+            <a:ext cx="10911535" cy="815340"/>
           </a:xfrm>
           <a:prstGeom prst="roundRect">
             <a:avLst>
-              <a:gd name="adj" fmla="val 6838"/>
+              <a:gd name="adj" fmla="val 8972"/>
             </a:avLst>
           </a:prstGeom>
           <a:solidFill>
@@ -14282,7 +14386,7 @@
         <p:spPr>
           <a:xfrm>
             <a:off x="960120" y="2194560"/>
-            <a:ext cx="10271455" cy="612648"/>
+            <a:ext cx="10271455" cy="358140"/>
           </a:xfrm>
           <a:prstGeom prst="rect">
             <a:avLst/>
@@ -14758,11 +14862,11 @@
         <p:spPr>
           <a:xfrm>
             <a:off x="640080" y="1965960"/>
-            <a:ext cx="10911535" cy="1453896"/>
+            <a:ext cx="10911535" cy="1082040"/>
           </a:xfrm>
           <a:prstGeom prst="roundRect">
             <a:avLst>
-              <a:gd name="adj" fmla="val 5031"/>
+              <a:gd name="adj" fmla="val 6761"/>
             </a:avLst>
           </a:prstGeom>
           <a:solidFill>
@@ -14780,7 +14884,7 @@
         <p:spPr>
           <a:xfrm>
             <a:off x="960120" y="2194560"/>
-            <a:ext cx="10271455" cy="996696"/>
+            <a:ext cx="10271455" cy="624840"/>
           </a:xfrm>
           <a:prstGeom prst="rect">
             <a:avLst/>

--- a/slides/CSC336-Lecture-09-Flexbox-and-Grid-Layout.pptx
+++ b/slides/CSC336-Lecture-09-Flexbox-and-Grid-Layout.pptx
@@ -3993,79 +3993,44 @@
       </p:sp>
       <p:sp>
         <p:nvSpPr>
-          <p:cNvPr id="6" name="Text 4"/>
+          <p:cNvPr id="8" name="cuinotes-footer-mark"/>
           <p:cNvSpPr txBox="1"/>
           <p:nvPr/>
         </p:nvSpPr>
         <p:spPr>
           <a:xfrm>
-            <a:off x="640080" y="6446520"/>
-            <a:ext cx="8686800" cy="292608"/>
+            <a:off x="9951720" y="6455664"/>
+            <a:ext cx="2011680" cy="292608"/>
           </a:xfrm>
           <a:prstGeom prst="rect">
             <a:avLst/>
           </a:prstGeom>
           <a:noFill/>
-          <a:ln/>
-        </p:spPr>
-        <p:txBody>
-          <a:bodyPr wrap="square" lIns="0" tIns="0" rIns="0" bIns="0" rtlCol="0" anchor="ctr"/>
-          <a:lstStyle/>
-          <a:p>
-            <a:pPr algn="l" indent="0" marL="0">
-              <a:buNone/>
-            </a:pPr>
-            <a:r>
-              <a:rPr lang="en-US" sz="900" dirty="0">
-                <a:solidFill>
-                  <a:srgbClr val="9AA3D8"/>
-                </a:solidFill>
-                <a:latin typeface="Calibri" pitchFamily="34" charset="0"/>
-                <a:ea typeface="Calibri" pitchFamily="34" charset="-122"/>
-                <a:cs typeface="Calibri" pitchFamily="34" charset="-120"/>
-              </a:rPr>
-              <a:t>Usman Akram  •  COMSATS University Islamabad</a:t>
-            </a:r>
-            <a:endParaRPr lang="en-US" sz="900" dirty="0"/>
-          </a:p>
-        </p:txBody>
-      </p:sp>
-      <p:sp>
-        <p:nvSpPr>
-          <p:cNvPr id="7" name="Text 5"/>
-          <p:cNvSpPr txBox="1"/>
-          <p:nvPr/>
-        </p:nvSpPr>
-        <p:spPr>
-          <a:xfrm>
-            <a:off x="11155680" y="6446520"/>
-            <a:ext cx="457200" cy="292608"/>
-          </a:xfrm>
-          <a:prstGeom prst="rect">
-            <a:avLst/>
-          </a:prstGeom>
-          <a:noFill/>
-          <a:ln/>
-        </p:spPr>
-        <p:txBody>
-          <a:bodyPr wrap="square" lIns="0" tIns="0" rIns="0" bIns="0" rtlCol="0" anchor="ctr"/>
-          <a:lstStyle/>
-          <a:p>
-            <a:pPr algn="r" indent="0" marL="0">
-              <a:buNone/>
-            </a:pPr>
-            <a:r>
-              <a:rPr lang="en-US" sz="900" dirty="0">
-                <a:solidFill>
-                  <a:srgbClr val="9AA3D8"/>
-                </a:solidFill>
-                <a:latin typeface="Calibri" pitchFamily="34" charset="0"/>
-                <a:ea typeface="Calibri" pitchFamily="34" charset="-122"/>
-                <a:cs typeface="Calibri" pitchFamily="34" charset="-120"/>
-              </a:rPr>
-              <a:t>1</a:t>
-            </a:r>
-            <a:endParaRPr lang="en-US" sz="900" dirty="0"/>
+        </p:spPr>
+        <p:txBody>
+          <a:bodyPr wrap="none" lIns="0" rIns="0" tIns="0" bIns="0">
+            <a:spAutoFit/>
+          </a:bodyPr>
+          <a:lstStyle/>
+          <a:p>
+            <a:pPr algn="r"/>
+            <a:r>
+              <a:rPr sz="1000">
+                <a:solidFill>
+                  <a:srgbClr val="8A939B"/>
+                </a:solidFill>
+                <a:hlinkClick r:id="rId3"/>
+              </a:rPr>
+              <a:t>cuinotes.com</a:t>
+            </a:r>
+            <a:r>
+              <a:rPr sz="1000">
+                <a:solidFill>
+                  <a:srgbClr val="8A939B"/>
+                </a:solidFill>
+              </a:rPr>
+              <a:t>  ·  1</a:t>
+            </a:r>
           </a:p>
         </p:txBody>
       </p:sp>
@@ -4200,6 +4165,10 @@
           </a:solidFill>
           <a:ln/>
         </p:spPr>
+        <p:txBody>
+          <a:bodyPr/>
+          <a:p/>
+        </p:txBody>
       </p:sp>
       <p:sp>
         <p:nvSpPr>
@@ -4245,79 +4214,44 @@
       </p:sp>
       <p:sp>
         <p:nvSpPr>
-          <p:cNvPr id="6" name="Text 4"/>
+          <p:cNvPr id="8" name="cuinotes-footer-mark"/>
           <p:cNvSpPr txBox="1"/>
           <p:nvPr/>
         </p:nvSpPr>
         <p:spPr>
           <a:xfrm>
-            <a:off x="640080" y="6446520"/>
-            <a:ext cx="8686800" cy="292608"/>
+            <a:off x="9951720" y="6455664"/>
+            <a:ext cx="2011680" cy="292608"/>
           </a:xfrm>
           <a:prstGeom prst="rect">
             <a:avLst/>
           </a:prstGeom>
           <a:noFill/>
-          <a:ln/>
-        </p:spPr>
-        <p:txBody>
-          <a:bodyPr wrap="square" lIns="0" tIns="0" rIns="0" bIns="0" rtlCol="0" anchor="ctr"/>
-          <a:lstStyle/>
-          <a:p>
-            <a:pPr algn="l" indent="0" marL="0">
-              <a:buNone/>
-            </a:pPr>
-            <a:r>
-              <a:rPr lang="en-US" sz="900" dirty="0">
-                <a:solidFill>
-                  <a:srgbClr val="5D5D72"/>
-                </a:solidFill>
-                <a:latin typeface="Calibri" pitchFamily="34" charset="0"/>
-                <a:ea typeface="Calibri" pitchFamily="34" charset="-122"/>
-                <a:cs typeface="Calibri" pitchFamily="34" charset="-120"/>
-              </a:rPr>
-              <a:t>Usman Akram  •  COMSATS University Islamabad</a:t>
-            </a:r>
-            <a:endParaRPr lang="en-US" sz="900" dirty="0"/>
-          </a:p>
-        </p:txBody>
-      </p:sp>
-      <p:sp>
-        <p:nvSpPr>
-          <p:cNvPr id="7" name="Text 5"/>
-          <p:cNvSpPr txBox="1"/>
-          <p:nvPr/>
-        </p:nvSpPr>
-        <p:spPr>
-          <a:xfrm>
-            <a:off x="11155680" y="6446520"/>
-            <a:ext cx="457200" cy="292608"/>
-          </a:xfrm>
-          <a:prstGeom prst="rect">
-            <a:avLst/>
-          </a:prstGeom>
-          <a:noFill/>
-          <a:ln/>
-        </p:spPr>
-        <p:txBody>
-          <a:bodyPr wrap="square" lIns="0" tIns="0" rIns="0" bIns="0" rtlCol="0" anchor="ctr"/>
-          <a:lstStyle/>
-          <a:p>
-            <a:pPr algn="r" indent="0" marL="0">
-              <a:buNone/>
-            </a:pPr>
-            <a:r>
-              <a:rPr lang="en-US" sz="900" dirty="0">
-                <a:solidFill>
-                  <a:srgbClr val="5D5D72"/>
-                </a:solidFill>
-                <a:latin typeface="Calibri" pitchFamily="34" charset="0"/>
-                <a:ea typeface="Calibri" pitchFamily="34" charset="-122"/>
-                <a:cs typeface="Calibri" pitchFamily="34" charset="-120"/>
-              </a:rPr>
-              <a:t>10</a:t>
-            </a:r>
-            <a:endParaRPr lang="en-US" sz="900" dirty="0"/>
+        </p:spPr>
+        <p:txBody>
+          <a:bodyPr wrap="none" lIns="0" rIns="0" tIns="0" bIns="0">
+            <a:spAutoFit/>
+          </a:bodyPr>
+          <a:lstStyle/>
+          <a:p>
+            <a:pPr algn="r"/>
+            <a:r>
+              <a:rPr sz="1000">
+                <a:solidFill>
+                  <a:srgbClr val="8A939B"/>
+                </a:solidFill>
+                <a:hlinkClick r:id="rId3"/>
+              </a:rPr>
+              <a:t>cuinotes.com</a:t>
+            </a:r>
+            <a:r>
+              <a:rPr sz="1000">
+                <a:solidFill>
+                  <a:srgbClr val="8A939B"/>
+                </a:solidFill>
+              </a:rPr>
+              <a:t>  ·  10</a:t>
+            </a:r>
           </a:p>
         </p:txBody>
       </p:sp>
@@ -4464,106 +4398,1035 @@
             </a:outerShdw>
           </a:effectLst>
         </p:spPr>
-      </p:sp>
-      <p:pic>
-        <p:nvPicPr>
-          <p:cNvPr id="5" name="Image 0" descr="D:/GitHub/mern-web-book/docs/assets/img/lecture-09/align-items-comparison.png">    </p:cNvPr>
-          <p:cNvPicPr>
-            <a:picLocks noChangeAspect="1"/>
-          </p:cNvPicPr>
-          <p:nvPr/>
-        </p:nvPicPr>
-        <p:blipFill>
-          <a:blip r:embed="rId1"/>
-          <a:stretch>
-            <a:fillRect/>
-          </a:stretch>
-        </p:blipFill>
-        <p:spPr>
-          <a:xfrm>
-            <a:off x="4784241" y="2057400"/>
-            <a:ext cx="2623213" cy="4114800"/>
-          </a:xfrm>
-          <a:prstGeom prst="rect">
-            <a:avLst/>
-          </a:prstGeom>
-        </p:spPr>
-      </p:pic>
-      <p:sp>
-        <p:nvSpPr>
-          <p:cNvPr id="6" name="Text 3"/>
+        <p:txBody>
+          <a:bodyPr/>
+          <a:p/>
+        </p:txBody>
+      </p:sp>
+      <p:sp>
+        <p:nvSpPr>
+          <p:cNvPr id="8" name="cuinotes-footer-mark"/>
           <p:cNvSpPr txBox="1"/>
           <p:nvPr/>
         </p:nvSpPr>
         <p:spPr>
           <a:xfrm>
-            <a:off x="640080" y="6446520"/>
-            <a:ext cx="8686800" cy="292608"/>
+            <a:off x="9951720" y="6455664"/>
+            <a:ext cx="2011680" cy="292608"/>
           </a:xfrm>
           <a:prstGeom prst="rect">
             <a:avLst/>
           </a:prstGeom>
           <a:noFill/>
-          <a:ln/>
-        </p:spPr>
-        <p:txBody>
-          <a:bodyPr wrap="square" lIns="0" tIns="0" rIns="0" bIns="0" rtlCol="0" anchor="ctr"/>
-          <a:lstStyle/>
-          <a:p>
-            <a:pPr algn="l" indent="0" marL="0">
-              <a:buNone/>
-            </a:pPr>
-            <a:r>
-              <a:rPr lang="en-US" sz="900" dirty="0">
-                <a:solidFill>
-                  <a:srgbClr val="5D5D72"/>
-                </a:solidFill>
-                <a:latin typeface="Calibri" pitchFamily="34" charset="0"/>
-                <a:ea typeface="Calibri" pitchFamily="34" charset="-122"/>
-                <a:cs typeface="Calibri" pitchFamily="34" charset="-120"/>
-              </a:rPr>
-              <a:t>Usman Akram  •  COMSATS University Islamabad</a:t>
-            </a:r>
-            <a:endParaRPr lang="en-US" sz="900" dirty="0"/>
-          </a:p>
-        </p:txBody>
-      </p:sp>
-      <p:sp>
-        <p:nvSpPr>
-          <p:cNvPr id="7" name="Text 4"/>
+        </p:spPr>
+        <p:txBody>
+          <a:bodyPr wrap="none" lIns="0" rIns="0" tIns="0" bIns="0">
+            <a:spAutoFit/>
+          </a:bodyPr>
+          <a:lstStyle/>
+          <a:p>
+            <a:pPr algn="r"/>
+            <a:r>
+              <a:rPr sz="1000">
+                <a:solidFill>
+                  <a:srgbClr val="8A939B"/>
+                </a:solidFill>
+                <a:hlinkClick r:id="rId4"/>
+              </a:rPr>
+              <a:t>cuinotes.com</a:t>
+            </a:r>
+            <a:r>
+              <a:rPr sz="1000">
+                <a:solidFill>
+                  <a:srgbClr val="8A939B"/>
+                </a:solidFill>
+              </a:rPr>
+              <a:t>  ·  11</a:t>
+            </a:r>
+          </a:p>
+        </p:txBody>
+      </p:sp>
+      <p:sp>
+        <p:nvSpPr>
+          <p:cNvPr id="9" name="TextBox 8"/>
           <p:cNvSpPr txBox="1"/>
           <p:nvPr/>
         </p:nvSpPr>
         <p:spPr>
           <a:xfrm>
-            <a:off x="11155680" y="6446520"/>
-            <a:ext cx="457200" cy="292608"/>
+            <a:off x="850392" y="2203704"/>
+            <a:ext cx="5084064" cy="256032"/>
           </a:xfrm>
           <a:prstGeom prst="rect">
             <a:avLst/>
           </a:prstGeom>
           <a:noFill/>
-          <a:ln/>
-        </p:spPr>
-        <p:txBody>
-          <a:bodyPr wrap="square" lIns="0" tIns="0" rIns="0" bIns="0" rtlCol="0" anchor="ctr"/>
-          <a:lstStyle/>
-          <a:p>
-            <a:pPr algn="r" indent="0" marL="0">
-              <a:buNone/>
-            </a:pPr>
-            <a:r>
-              <a:rPr lang="en-US" sz="900" dirty="0">
-                <a:solidFill>
-                  <a:srgbClr val="5D5D72"/>
-                </a:solidFill>
-                <a:latin typeface="Calibri" pitchFamily="34" charset="0"/>
-                <a:ea typeface="Calibri" pitchFamily="34" charset="-122"/>
-                <a:cs typeface="Calibri" pitchFamily="34" charset="-120"/>
-              </a:rPr>
-              <a:t>11</a:t>
-            </a:r>
-            <a:endParaRPr lang="en-US" sz="900" dirty="0"/>
+        </p:spPr>
+        <p:txBody>
+          <a:bodyPr wrap="none" lIns="0" tIns="0" bIns="0" rIns="0">
+            <a:spAutoFit/>
+          </a:bodyPr>
+          <a:lstStyle/>
+          <a:p>
+            <a:r>
+              <a:rPr sz="1100" b="1">
+                <a:solidFill>
+                  <a:srgbClr val="1F2429"/>
+                </a:solidFill>
+                <a:latin typeface="Calibri"/>
+              </a:rPr>
+              <a:t>align-items: stretch (default: fill the cross axis)</a:t>
+            </a:r>
+          </a:p>
+        </p:txBody>
+      </p:sp>
+      <p:sp>
+        <p:nvSpPr>
+          <p:cNvPr id="10" name="Rectangle 9"/>
+          <p:cNvSpPr/>
+          <p:nvPr/>
+        </p:nvSpPr>
+        <p:spPr>
+          <a:xfrm>
+            <a:off x="850392" y="2514600"/>
+            <a:ext cx="5084064" cy="1472184"/>
+          </a:xfrm>
+          <a:prstGeom prst="rect">
+            <a:avLst/>
+          </a:prstGeom>
+          <a:solidFill>
+            <a:srgbClr val="F7F8F9"/>
+          </a:solidFill>
+          <a:ln w="12700">
+            <a:solidFill>
+              <a:srgbClr val="B8C0C8"/>
+            </a:solidFill>
+            <a:prstDash val="dash"/>
+          </a:ln>
+          <a:effectLst/>
+        </p:spPr>
+        <p:style>
+          <a:lnRef idx="1">
+            <a:schemeClr val="accent1"/>
+          </a:lnRef>
+          <a:fillRef idx="3">
+            <a:schemeClr val="accent1"/>
+          </a:fillRef>
+          <a:effectRef idx="2">
+            <a:schemeClr val="accent1"/>
+          </a:effectRef>
+          <a:fontRef idx="minor">
+            <a:schemeClr val="lt1"/>
+          </a:fontRef>
+        </p:style>
+        <p:txBody>
+          <a:bodyPr rtlCol="0" anchor="ctr"/>
+          <a:lstStyle/>
+          <a:p>
+            <a:pPr algn="ctr"/>
+          </a:p>
+        </p:txBody>
+      </p:sp>
+      <p:sp>
+        <p:nvSpPr>
+          <p:cNvPr id="11" name="Rounded Rectangle 10"/>
+          <p:cNvSpPr/>
+          <p:nvPr/>
+        </p:nvSpPr>
+        <p:spPr>
+          <a:xfrm>
+            <a:off x="1152144" y="2587752"/>
+            <a:ext cx="1371600" cy="1325880"/>
+          </a:xfrm>
+          <a:prstGeom prst="roundRect">
+            <a:avLst>
+              <a:gd name="adj" fmla="val 18000"/>
+            </a:avLst>
+          </a:prstGeom>
+          <a:solidFill>
+            <a:srgbClr val="4A90E2"/>
+          </a:solidFill>
+          <a:ln>
+            <a:noFill/>
+          </a:ln>
+          <a:effectLst/>
+        </p:spPr>
+        <p:style>
+          <a:lnRef idx="1">
+            <a:schemeClr val="accent1"/>
+          </a:lnRef>
+          <a:fillRef idx="3">
+            <a:schemeClr val="accent1"/>
+          </a:fillRef>
+          <a:effectRef idx="2">
+            <a:schemeClr val="accent1"/>
+          </a:effectRef>
+          <a:fontRef idx="minor">
+            <a:schemeClr val="lt1"/>
+          </a:fontRef>
+        </p:style>
+        <p:txBody>
+          <a:bodyPr rtlCol="0" anchor="ctr" lIns="0" rIns="0" tIns="0" bIns="0" wrap="none"/>
+          <a:lstStyle/>
+          <a:p>
+            <a:pPr algn="ctr"/>
+            <a:r>
+              <a:rPr sz="1000" b="1">
+                <a:solidFill>
+                  <a:srgbClr val="FFFFFF"/>
+                </a:solidFill>
+                <a:latin typeface="Calibri"/>
+              </a:rPr>
+              <a:t>item 1</a:t>
+            </a:r>
+          </a:p>
+        </p:txBody>
+      </p:sp>
+      <p:sp>
+        <p:nvSpPr>
+          <p:cNvPr id="12" name="Rounded Rectangle 11"/>
+          <p:cNvSpPr/>
+          <p:nvPr/>
+        </p:nvSpPr>
+        <p:spPr>
+          <a:xfrm>
+            <a:off x="2706624" y="2587752"/>
+            <a:ext cx="1371600" cy="1325880"/>
+          </a:xfrm>
+          <a:prstGeom prst="roundRect">
+            <a:avLst>
+              <a:gd name="adj" fmla="val 18000"/>
+            </a:avLst>
+          </a:prstGeom>
+          <a:solidFill>
+            <a:srgbClr val="6FCF97"/>
+          </a:solidFill>
+          <a:ln>
+            <a:noFill/>
+          </a:ln>
+          <a:effectLst/>
+        </p:spPr>
+        <p:style>
+          <a:lnRef idx="1">
+            <a:schemeClr val="accent1"/>
+          </a:lnRef>
+          <a:fillRef idx="3">
+            <a:schemeClr val="accent1"/>
+          </a:fillRef>
+          <a:effectRef idx="2">
+            <a:schemeClr val="accent1"/>
+          </a:effectRef>
+          <a:fontRef idx="minor">
+            <a:schemeClr val="lt1"/>
+          </a:fontRef>
+        </p:style>
+        <p:txBody>
+          <a:bodyPr rtlCol="0" anchor="ctr" lIns="0" rIns="0" tIns="0" bIns="0" wrap="none"/>
+          <a:lstStyle/>
+          <a:p>
+            <a:pPr algn="ctr"/>
+            <a:r>
+              <a:rPr sz="1000" b="1">
+                <a:solidFill>
+                  <a:srgbClr val="FFFFFF"/>
+                </a:solidFill>
+                <a:latin typeface="Calibri"/>
+              </a:rPr>
+              <a:t>item 2</a:t>
+            </a:r>
+          </a:p>
+        </p:txBody>
+      </p:sp>
+      <p:sp>
+        <p:nvSpPr>
+          <p:cNvPr id="13" name="Rounded Rectangle 12"/>
+          <p:cNvSpPr/>
+          <p:nvPr/>
+        </p:nvSpPr>
+        <p:spPr>
+          <a:xfrm>
+            <a:off x="4261104" y="2587752"/>
+            <a:ext cx="1371600" cy="1325880"/>
+          </a:xfrm>
+          <a:prstGeom prst="roundRect">
+            <a:avLst>
+              <a:gd name="adj" fmla="val 18000"/>
+            </a:avLst>
+          </a:prstGeom>
+          <a:solidFill>
+            <a:srgbClr val="F2994A"/>
+          </a:solidFill>
+          <a:ln>
+            <a:noFill/>
+          </a:ln>
+          <a:effectLst/>
+        </p:spPr>
+        <p:style>
+          <a:lnRef idx="1">
+            <a:schemeClr val="accent1"/>
+          </a:lnRef>
+          <a:fillRef idx="3">
+            <a:schemeClr val="accent1"/>
+          </a:fillRef>
+          <a:effectRef idx="2">
+            <a:schemeClr val="accent1"/>
+          </a:effectRef>
+          <a:fontRef idx="minor">
+            <a:schemeClr val="lt1"/>
+          </a:fontRef>
+        </p:style>
+        <p:txBody>
+          <a:bodyPr rtlCol="0" anchor="ctr" lIns="0" rIns="0" tIns="0" bIns="0" wrap="none"/>
+          <a:lstStyle/>
+          <a:p>
+            <a:pPr algn="ctr"/>
+            <a:r>
+              <a:rPr sz="1000" b="1">
+                <a:solidFill>
+                  <a:srgbClr val="FFFFFF"/>
+                </a:solidFill>
+                <a:latin typeface="Calibri"/>
+              </a:rPr>
+              <a:t>item 3</a:t>
+            </a:r>
+          </a:p>
+        </p:txBody>
+      </p:sp>
+      <p:sp>
+        <p:nvSpPr>
+          <p:cNvPr id="14" name="TextBox 13"/>
+          <p:cNvSpPr txBox="1"/>
+          <p:nvPr/>
+        </p:nvSpPr>
+        <p:spPr>
+          <a:xfrm>
+            <a:off x="6254496" y="2203704"/>
+            <a:ext cx="5084064" cy="256032"/>
+          </a:xfrm>
+          <a:prstGeom prst="rect">
+            <a:avLst/>
+          </a:prstGeom>
+          <a:noFill/>
+        </p:spPr>
+        <p:txBody>
+          <a:bodyPr wrap="none" lIns="0" tIns="0" bIns="0" rIns="0">
+            <a:spAutoFit/>
+          </a:bodyPr>
+          <a:lstStyle/>
+          <a:p>
+            <a:r>
+              <a:rPr sz="1100" b="1">
+                <a:solidFill>
+                  <a:srgbClr val="1F2429"/>
+                </a:solidFill>
+                <a:latin typeface="Calibri"/>
+              </a:rPr>
+              <a:t>align-items: flex-start (items align to the top)</a:t>
+            </a:r>
+          </a:p>
+        </p:txBody>
+      </p:sp>
+      <p:sp>
+        <p:nvSpPr>
+          <p:cNvPr id="15" name="Rectangle 14"/>
+          <p:cNvSpPr/>
+          <p:nvPr/>
+        </p:nvSpPr>
+        <p:spPr>
+          <a:xfrm>
+            <a:off x="6254496" y="2514600"/>
+            <a:ext cx="5084064" cy="1472184"/>
+          </a:xfrm>
+          <a:prstGeom prst="rect">
+            <a:avLst/>
+          </a:prstGeom>
+          <a:solidFill>
+            <a:srgbClr val="F7F8F9"/>
+          </a:solidFill>
+          <a:ln w="12700">
+            <a:solidFill>
+              <a:srgbClr val="B8C0C8"/>
+            </a:solidFill>
+            <a:prstDash val="dash"/>
+          </a:ln>
+          <a:effectLst/>
+        </p:spPr>
+        <p:style>
+          <a:lnRef idx="1">
+            <a:schemeClr val="accent1"/>
+          </a:lnRef>
+          <a:fillRef idx="3">
+            <a:schemeClr val="accent1"/>
+          </a:fillRef>
+          <a:effectRef idx="2">
+            <a:schemeClr val="accent1"/>
+          </a:effectRef>
+          <a:fontRef idx="minor">
+            <a:schemeClr val="lt1"/>
+          </a:fontRef>
+        </p:style>
+        <p:txBody>
+          <a:bodyPr rtlCol="0" anchor="ctr"/>
+          <a:lstStyle/>
+          <a:p>
+            <a:pPr algn="ctr"/>
+          </a:p>
+        </p:txBody>
+      </p:sp>
+      <p:sp>
+        <p:nvSpPr>
+          <p:cNvPr id="16" name="Rounded Rectangle 15"/>
+          <p:cNvSpPr/>
+          <p:nvPr/>
+        </p:nvSpPr>
+        <p:spPr>
+          <a:xfrm>
+            <a:off x="6556248" y="2587752"/>
+            <a:ext cx="1371600" cy="457200"/>
+          </a:xfrm>
+          <a:prstGeom prst="roundRect">
+            <a:avLst>
+              <a:gd name="adj" fmla="val 18000"/>
+            </a:avLst>
+          </a:prstGeom>
+          <a:solidFill>
+            <a:srgbClr val="4A90E2"/>
+          </a:solidFill>
+          <a:ln>
+            <a:noFill/>
+          </a:ln>
+          <a:effectLst/>
+        </p:spPr>
+        <p:style>
+          <a:lnRef idx="1">
+            <a:schemeClr val="accent1"/>
+          </a:lnRef>
+          <a:fillRef idx="3">
+            <a:schemeClr val="accent1"/>
+          </a:fillRef>
+          <a:effectRef idx="2">
+            <a:schemeClr val="accent1"/>
+          </a:effectRef>
+          <a:fontRef idx="minor">
+            <a:schemeClr val="lt1"/>
+          </a:fontRef>
+        </p:style>
+        <p:txBody>
+          <a:bodyPr rtlCol="0" anchor="ctr" lIns="0" rIns="0" tIns="0" bIns="0" wrap="none"/>
+          <a:lstStyle/>
+          <a:p>
+            <a:pPr algn="ctr"/>
+            <a:r>
+              <a:rPr sz="1000" b="1">
+                <a:solidFill>
+                  <a:srgbClr val="FFFFFF"/>
+                </a:solidFill>
+                <a:latin typeface="Calibri"/>
+              </a:rPr>
+              <a:t>item 1</a:t>
+            </a:r>
+          </a:p>
+        </p:txBody>
+      </p:sp>
+      <p:sp>
+        <p:nvSpPr>
+          <p:cNvPr id="17" name="Rounded Rectangle 16"/>
+          <p:cNvSpPr/>
+          <p:nvPr/>
+        </p:nvSpPr>
+        <p:spPr>
+          <a:xfrm>
+            <a:off x="8110728" y="2587752"/>
+            <a:ext cx="1371600" cy="822960"/>
+          </a:xfrm>
+          <a:prstGeom prst="roundRect">
+            <a:avLst>
+              <a:gd name="adj" fmla="val 18000"/>
+            </a:avLst>
+          </a:prstGeom>
+          <a:solidFill>
+            <a:srgbClr val="6FCF97"/>
+          </a:solidFill>
+          <a:ln>
+            <a:noFill/>
+          </a:ln>
+          <a:effectLst/>
+        </p:spPr>
+        <p:style>
+          <a:lnRef idx="1">
+            <a:schemeClr val="accent1"/>
+          </a:lnRef>
+          <a:fillRef idx="3">
+            <a:schemeClr val="accent1"/>
+          </a:fillRef>
+          <a:effectRef idx="2">
+            <a:schemeClr val="accent1"/>
+          </a:effectRef>
+          <a:fontRef idx="minor">
+            <a:schemeClr val="lt1"/>
+          </a:fontRef>
+        </p:style>
+        <p:txBody>
+          <a:bodyPr rtlCol="0" anchor="ctr" lIns="0" rIns="0" tIns="0" bIns="0" wrap="none"/>
+          <a:lstStyle/>
+          <a:p>
+            <a:pPr algn="ctr"/>
+            <a:r>
+              <a:rPr sz="1000" b="1">
+                <a:solidFill>
+                  <a:srgbClr val="FFFFFF"/>
+                </a:solidFill>
+                <a:latin typeface="Calibri"/>
+              </a:rPr>
+              <a:t>item 2</a:t>
+            </a:r>
+          </a:p>
+        </p:txBody>
+      </p:sp>
+      <p:sp>
+        <p:nvSpPr>
+          <p:cNvPr id="18" name="Rounded Rectangle 17"/>
+          <p:cNvSpPr/>
+          <p:nvPr/>
+        </p:nvSpPr>
+        <p:spPr>
+          <a:xfrm>
+            <a:off x="9665208" y="2587752"/>
+            <a:ext cx="1371600" cy="1280160"/>
+          </a:xfrm>
+          <a:prstGeom prst="roundRect">
+            <a:avLst>
+              <a:gd name="adj" fmla="val 18000"/>
+            </a:avLst>
+          </a:prstGeom>
+          <a:solidFill>
+            <a:srgbClr val="F2994A"/>
+          </a:solidFill>
+          <a:ln>
+            <a:noFill/>
+          </a:ln>
+          <a:effectLst/>
+        </p:spPr>
+        <p:style>
+          <a:lnRef idx="1">
+            <a:schemeClr val="accent1"/>
+          </a:lnRef>
+          <a:fillRef idx="3">
+            <a:schemeClr val="accent1"/>
+          </a:fillRef>
+          <a:effectRef idx="2">
+            <a:schemeClr val="accent1"/>
+          </a:effectRef>
+          <a:fontRef idx="minor">
+            <a:schemeClr val="lt1"/>
+          </a:fontRef>
+        </p:style>
+        <p:txBody>
+          <a:bodyPr rtlCol="0" anchor="ctr" lIns="0" rIns="0" tIns="0" bIns="0" wrap="none"/>
+          <a:lstStyle/>
+          <a:p>
+            <a:pPr algn="ctr"/>
+            <a:r>
+              <a:rPr sz="1000" b="1">
+                <a:solidFill>
+                  <a:srgbClr val="FFFFFF"/>
+                </a:solidFill>
+                <a:latin typeface="Calibri"/>
+              </a:rPr>
+              <a:t>item 3</a:t>
+            </a:r>
+          </a:p>
+        </p:txBody>
+      </p:sp>
+      <p:sp>
+        <p:nvSpPr>
+          <p:cNvPr id="19" name="TextBox 18"/>
+          <p:cNvSpPr txBox="1"/>
+          <p:nvPr/>
+        </p:nvSpPr>
+        <p:spPr>
+          <a:xfrm>
+            <a:off x="850392" y="4242816"/>
+            <a:ext cx="5084064" cy="256032"/>
+          </a:xfrm>
+          <a:prstGeom prst="rect">
+            <a:avLst/>
+          </a:prstGeom>
+          <a:noFill/>
+        </p:spPr>
+        <p:txBody>
+          <a:bodyPr wrap="none" lIns="0" tIns="0" bIns="0" rIns="0">
+            <a:spAutoFit/>
+          </a:bodyPr>
+          <a:lstStyle/>
+          <a:p>
+            <a:r>
+              <a:rPr sz="1100" b="1">
+                <a:solidFill>
+                  <a:srgbClr val="1F2429"/>
+                </a:solidFill>
+                <a:latin typeface="Calibri"/>
+              </a:rPr>
+              <a:t>align-items: flex-end (items align to the bottom)</a:t>
+            </a:r>
+          </a:p>
+        </p:txBody>
+      </p:sp>
+      <p:sp>
+        <p:nvSpPr>
+          <p:cNvPr id="20" name="Rectangle 19"/>
+          <p:cNvSpPr/>
+          <p:nvPr/>
+        </p:nvSpPr>
+        <p:spPr>
+          <a:xfrm>
+            <a:off x="850392" y="4553712"/>
+            <a:ext cx="5084064" cy="1472184"/>
+          </a:xfrm>
+          <a:prstGeom prst="rect">
+            <a:avLst/>
+          </a:prstGeom>
+          <a:solidFill>
+            <a:srgbClr val="F7F8F9"/>
+          </a:solidFill>
+          <a:ln w="12700">
+            <a:solidFill>
+              <a:srgbClr val="B8C0C8"/>
+            </a:solidFill>
+            <a:prstDash val="dash"/>
+          </a:ln>
+          <a:effectLst/>
+        </p:spPr>
+        <p:style>
+          <a:lnRef idx="1">
+            <a:schemeClr val="accent1"/>
+          </a:lnRef>
+          <a:fillRef idx="3">
+            <a:schemeClr val="accent1"/>
+          </a:fillRef>
+          <a:effectRef idx="2">
+            <a:schemeClr val="accent1"/>
+          </a:effectRef>
+          <a:fontRef idx="minor">
+            <a:schemeClr val="lt1"/>
+          </a:fontRef>
+        </p:style>
+        <p:txBody>
+          <a:bodyPr rtlCol="0" anchor="ctr"/>
+          <a:lstStyle/>
+          <a:p>
+            <a:pPr algn="ctr"/>
+          </a:p>
+        </p:txBody>
+      </p:sp>
+      <p:sp>
+        <p:nvSpPr>
+          <p:cNvPr id="21" name="Rounded Rectangle 20"/>
+          <p:cNvSpPr/>
+          <p:nvPr/>
+        </p:nvSpPr>
+        <p:spPr>
+          <a:xfrm>
+            <a:off x="1152144" y="5495544"/>
+            <a:ext cx="1371600" cy="457200"/>
+          </a:xfrm>
+          <a:prstGeom prst="roundRect">
+            <a:avLst>
+              <a:gd name="adj" fmla="val 18000"/>
+            </a:avLst>
+          </a:prstGeom>
+          <a:solidFill>
+            <a:srgbClr val="4A90E2"/>
+          </a:solidFill>
+          <a:ln>
+            <a:noFill/>
+          </a:ln>
+          <a:effectLst/>
+        </p:spPr>
+        <p:style>
+          <a:lnRef idx="1">
+            <a:schemeClr val="accent1"/>
+          </a:lnRef>
+          <a:fillRef idx="3">
+            <a:schemeClr val="accent1"/>
+          </a:fillRef>
+          <a:effectRef idx="2">
+            <a:schemeClr val="accent1"/>
+          </a:effectRef>
+          <a:fontRef idx="minor">
+            <a:schemeClr val="lt1"/>
+          </a:fontRef>
+        </p:style>
+        <p:txBody>
+          <a:bodyPr rtlCol="0" anchor="ctr" lIns="0" rIns="0" tIns="0" bIns="0" wrap="none"/>
+          <a:lstStyle/>
+          <a:p>
+            <a:pPr algn="ctr"/>
+            <a:r>
+              <a:rPr sz="1000" b="1">
+                <a:solidFill>
+                  <a:srgbClr val="FFFFFF"/>
+                </a:solidFill>
+                <a:latin typeface="Calibri"/>
+              </a:rPr>
+              <a:t>item 1</a:t>
+            </a:r>
+          </a:p>
+        </p:txBody>
+      </p:sp>
+      <p:sp>
+        <p:nvSpPr>
+          <p:cNvPr id="22" name="Rounded Rectangle 21"/>
+          <p:cNvSpPr/>
+          <p:nvPr/>
+        </p:nvSpPr>
+        <p:spPr>
+          <a:xfrm>
+            <a:off x="2706624" y="5129784"/>
+            <a:ext cx="1371600" cy="822960"/>
+          </a:xfrm>
+          <a:prstGeom prst="roundRect">
+            <a:avLst>
+              <a:gd name="adj" fmla="val 18000"/>
+            </a:avLst>
+          </a:prstGeom>
+          <a:solidFill>
+            <a:srgbClr val="6FCF97"/>
+          </a:solidFill>
+          <a:ln>
+            <a:noFill/>
+          </a:ln>
+          <a:effectLst/>
+        </p:spPr>
+        <p:style>
+          <a:lnRef idx="1">
+            <a:schemeClr val="accent1"/>
+          </a:lnRef>
+          <a:fillRef idx="3">
+            <a:schemeClr val="accent1"/>
+          </a:fillRef>
+          <a:effectRef idx="2">
+            <a:schemeClr val="accent1"/>
+          </a:effectRef>
+          <a:fontRef idx="minor">
+            <a:schemeClr val="lt1"/>
+          </a:fontRef>
+        </p:style>
+        <p:txBody>
+          <a:bodyPr rtlCol="0" anchor="ctr" lIns="0" rIns="0" tIns="0" bIns="0" wrap="none"/>
+          <a:lstStyle/>
+          <a:p>
+            <a:pPr algn="ctr"/>
+            <a:r>
+              <a:rPr sz="1000" b="1">
+                <a:solidFill>
+                  <a:srgbClr val="FFFFFF"/>
+                </a:solidFill>
+                <a:latin typeface="Calibri"/>
+              </a:rPr>
+              <a:t>item 2</a:t>
+            </a:r>
+          </a:p>
+        </p:txBody>
+      </p:sp>
+      <p:sp>
+        <p:nvSpPr>
+          <p:cNvPr id="23" name="Rounded Rectangle 22"/>
+          <p:cNvSpPr/>
+          <p:nvPr/>
+        </p:nvSpPr>
+        <p:spPr>
+          <a:xfrm>
+            <a:off x="4261104" y="4672584"/>
+            <a:ext cx="1371600" cy="1280160"/>
+          </a:xfrm>
+          <a:prstGeom prst="roundRect">
+            <a:avLst>
+              <a:gd name="adj" fmla="val 18000"/>
+            </a:avLst>
+          </a:prstGeom>
+          <a:solidFill>
+            <a:srgbClr val="F2994A"/>
+          </a:solidFill>
+          <a:ln>
+            <a:noFill/>
+          </a:ln>
+          <a:effectLst/>
+        </p:spPr>
+        <p:style>
+          <a:lnRef idx="1">
+            <a:schemeClr val="accent1"/>
+          </a:lnRef>
+          <a:fillRef idx="3">
+            <a:schemeClr val="accent1"/>
+          </a:fillRef>
+          <a:effectRef idx="2">
+            <a:schemeClr val="accent1"/>
+          </a:effectRef>
+          <a:fontRef idx="minor">
+            <a:schemeClr val="lt1"/>
+          </a:fontRef>
+        </p:style>
+        <p:txBody>
+          <a:bodyPr rtlCol="0" anchor="ctr" lIns="0" rIns="0" tIns="0" bIns="0" wrap="none"/>
+          <a:lstStyle/>
+          <a:p>
+            <a:pPr algn="ctr"/>
+            <a:r>
+              <a:rPr sz="1000" b="1">
+                <a:solidFill>
+                  <a:srgbClr val="FFFFFF"/>
+                </a:solidFill>
+                <a:latin typeface="Calibri"/>
+              </a:rPr>
+              <a:t>item 3</a:t>
+            </a:r>
+          </a:p>
+        </p:txBody>
+      </p:sp>
+      <p:sp>
+        <p:nvSpPr>
+          <p:cNvPr id="24" name="TextBox 23"/>
+          <p:cNvSpPr txBox="1"/>
+          <p:nvPr/>
+        </p:nvSpPr>
+        <p:spPr>
+          <a:xfrm>
+            <a:off x="6254496" y="4242816"/>
+            <a:ext cx="5084064" cy="256032"/>
+          </a:xfrm>
+          <a:prstGeom prst="rect">
+            <a:avLst/>
+          </a:prstGeom>
+          <a:noFill/>
+        </p:spPr>
+        <p:txBody>
+          <a:bodyPr wrap="none" lIns="0" tIns="0" bIns="0" rIns="0">
+            <a:spAutoFit/>
+          </a:bodyPr>
+          <a:lstStyle/>
+          <a:p>
+            <a:r>
+              <a:rPr sz="1100" b="1">
+                <a:solidFill>
+                  <a:srgbClr val="1F2429"/>
+                </a:solidFill>
+                <a:latin typeface="Calibri"/>
+              </a:rPr>
+              <a:t>align-items: center (items align to the vertical center)</a:t>
+            </a:r>
+          </a:p>
+        </p:txBody>
+      </p:sp>
+      <p:sp>
+        <p:nvSpPr>
+          <p:cNvPr id="25" name="Rectangle 24"/>
+          <p:cNvSpPr/>
+          <p:nvPr/>
+        </p:nvSpPr>
+        <p:spPr>
+          <a:xfrm>
+            <a:off x="6254496" y="4553712"/>
+            <a:ext cx="5084064" cy="1472184"/>
+          </a:xfrm>
+          <a:prstGeom prst="rect">
+            <a:avLst/>
+          </a:prstGeom>
+          <a:solidFill>
+            <a:srgbClr val="F7F8F9"/>
+          </a:solidFill>
+          <a:ln w="12700">
+            <a:solidFill>
+              <a:srgbClr val="B8C0C8"/>
+            </a:solidFill>
+            <a:prstDash val="dash"/>
+          </a:ln>
+          <a:effectLst/>
+        </p:spPr>
+        <p:style>
+          <a:lnRef idx="1">
+            <a:schemeClr val="accent1"/>
+          </a:lnRef>
+          <a:fillRef idx="3">
+            <a:schemeClr val="accent1"/>
+          </a:fillRef>
+          <a:effectRef idx="2">
+            <a:schemeClr val="accent1"/>
+          </a:effectRef>
+          <a:fontRef idx="minor">
+            <a:schemeClr val="lt1"/>
+          </a:fontRef>
+        </p:style>
+        <p:txBody>
+          <a:bodyPr rtlCol="0" anchor="ctr"/>
+          <a:lstStyle/>
+          <a:p>
+            <a:pPr algn="ctr"/>
+          </a:p>
+        </p:txBody>
+      </p:sp>
+      <p:sp>
+        <p:nvSpPr>
+          <p:cNvPr id="26" name="Rounded Rectangle 25"/>
+          <p:cNvSpPr/>
+          <p:nvPr/>
+        </p:nvSpPr>
+        <p:spPr>
+          <a:xfrm>
+            <a:off x="6556248" y="5061204"/>
+            <a:ext cx="1371600" cy="457200"/>
+          </a:xfrm>
+          <a:prstGeom prst="roundRect">
+            <a:avLst>
+              <a:gd name="adj" fmla="val 18000"/>
+            </a:avLst>
+          </a:prstGeom>
+          <a:solidFill>
+            <a:srgbClr val="4A90E2"/>
+          </a:solidFill>
+          <a:ln>
+            <a:noFill/>
+          </a:ln>
+          <a:effectLst/>
+        </p:spPr>
+        <p:style>
+          <a:lnRef idx="1">
+            <a:schemeClr val="accent1"/>
+          </a:lnRef>
+          <a:fillRef idx="3">
+            <a:schemeClr val="accent1"/>
+          </a:fillRef>
+          <a:effectRef idx="2">
+            <a:schemeClr val="accent1"/>
+          </a:effectRef>
+          <a:fontRef idx="minor">
+            <a:schemeClr val="lt1"/>
+          </a:fontRef>
+        </p:style>
+        <p:txBody>
+          <a:bodyPr rtlCol="0" anchor="ctr" lIns="0" rIns="0" tIns="0" bIns="0" wrap="none"/>
+          <a:lstStyle/>
+          <a:p>
+            <a:pPr algn="ctr"/>
+            <a:r>
+              <a:rPr sz="1000" b="1">
+                <a:solidFill>
+                  <a:srgbClr val="FFFFFF"/>
+                </a:solidFill>
+                <a:latin typeface="Calibri"/>
+              </a:rPr>
+              <a:t>item 1</a:t>
+            </a:r>
+          </a:p>
+        </p:txBody>
+      </p:sp>
+      <p:sp>
+        <p:nvSpPr>
+          <p:cNvPr id="27" name="Rounded Rectangle 26"/>
+          <p:cNvSpPr/>
+          <p:nvPr/>
+        </p:nvSpPr>
+        <p:spPr>
+          <a:xfrm>
+            <a:off x="8110728" y="4878324"/>
+            <a:ext cx="1371600" cy="822960"/>
+          </a:xfrm>
+          <a:prstGeom prst="roundRect">
+            <a:avLst>
+              <a:gd name="adj" fmla="val 18000"/>
+            </a:avLst>
+          </a:prstGeom>
+          <a:solidFill>
+            <a:srgbClr val="6FCF97"/>
+          </a:solidFill>
+          <a:ln>
+            <a:noFill/>
+          </a:ln>
+          <a:effectLst/>
+        </p:spPr>
+        <p:style>
+          <a:lnRef idx="1">
+            <a:schemeClr val="accent1"/>
+          </a:lnRef>
+          <a:fillRef idx="3">
+            <a:schemeClr val="accent1"/>
+          </a:fillRef>
+          <a:effectRef idx="2">
+            <a:schemeClr val="accent1"/>
+          </a:effectRef>
+          <a:fontRef idx="minor">
+            <a:schemeClr val="lt1"/>
+          </a:fontRef>
+        </p:style>
+        <p:txBody>
+          <a:bodyPr rtlCol="0" anchor="ctr" lIns="0" rIns="0" tIns="0" bIns="0" wrap="none"/>
+          <a:lstStyle/>
+          <a:p>
+            <a:pPr algn="ctr"/>
+            <a:r>
+              <a:rPr sz="1000" b="1">
+                <a:solidFill>
+                  <a:srgbClr val="FFFFFF"/>
+                </a:solidFill>
+                <a:latin typeface="Calibri"/>
+              </a:rPr>
+              <a:t>item 2</a:t>
+            </a:r>
+          </a:p>
+        </p:txBody>
+      </p:sp>
+      <p:sp>
+        <p:nvSpPr>
+          <p:cNvPr id="28" name="Rounded Rectangle 27"/>
+          <p:cNvSpPr/>
+          <p:nvPr/>
+        </p:nvSpPr>
+        <p:spPr>
+          <a:xfrm>
+            <a:off x="9665208" y="4649724"/>
+            <a:ext cx="1371600" cy="1280160"/>
+          </a:xfrm>
+          <a:prstGeom prst="roundRect">
+            <a:avLst>
+              <a:gd name="adj" fmla="val 18000"/>
+            </a:avLst>
+          </a:prstGeom>
+          <a:solidFill>
+            <a:srgbClr val="F2994A"/>
+          </a:solidFill>
+          <a:ln>
+            <a:noFill/>
+          </a:ln>
+          <a:effectLst/>
+        </p:spPr>
+        <p:style>
+          <a:lnRef idx="1">
+            <a:schemeClr val="accent1"/>
+          </a:lnRef>
+          <a:fillRef idx="3">
+            <a:schemeClr val="accent1"/>
+          </a:fillRef>
+          <a:effectRef idx="2">
+            <a:schemeClr val="accent1"/>
+          </a:effectRef>
+          <a:fontRef idx="minor">
+            <a:schemeClr val="lt1"/>
+          </a:fontRef>
+        </p:style>
+        <p:txBody>
+          <a:bodyPr rtlCol="0" anchor="ctr" lIns="0" rIns="0" tIns="0" bIns="0" wrap="none"/>
+          <a:lstStyle/>
+          <a:p>
+            <a:pPr algn="ctr"/>
+            <a:r>
+              <a:rPr sz="1000" b="1">
+                <a:solidFill>
+                  <a:srgbClr val="FFFFFF"/>
+                </a:solidFill>
+                <a:latin typeface="Calibri"/>
+              </a:rPr>
+              <a:t>item 3</a:t>
+            </a:r>
           </a:p>
         </p:txBody>
       </p:sp>
@@ -4698,6 +5561,10 @@
           </a:solidFill>
           <a:ln/>
         </p:spPr>
+        <p:txBody>
+          <a:bodyPr/>
+          <a:p/>
+        </p:txBody>
       </p:sp>
       <p:sp>
         <p:nvSpPr>
@@ -4862,79 +5729,44 @@
       </p:sp>
       <p:sp>
         <p:nvSpPr>
-          <p:cNvPr id="7" name="Text 5"/>
+          <p:cNvPr id="9" name="cuinotes-footer-mark"/>
           <p:cNvSpPr txBox="1"/>
           <p:nvPr/>
         </p:nvSpPr>
         <p:spPr>
           <a:xfrm>
-            <a:off x="640080" y="6446520"/>
-            <a:ext cx="8686800" cy="292608"/>
+            <a:off x="9951720" y="6455664"/>
+            <a:ext cx="2011680" cy="292608"/>
           </a:xfrm>
           <a:prstGeom prst="rect">
             <a:avLst/>
           </a:prstGeom>
           <a:noFill/>
-          <a:ln/>
-        </p:spPr>
-        <p:txBody>
-          <a:bodyPr wrap="square" lIns="0" tIns="0" rIns="0" bIns="0" rtlCol="0" anchor="ctr"/>
-          <a:lstStyle/>
-          <a:p>
-            <a:pPr algn="l" indent="0" marL="0">
-              <a:buNone/>
-            </a:pPr>
-            <a:r>
-              <a:rPr lang="en-US" sz="900" dirty="0">
-                <a:solidFill>
-                  <a:srgbClr val="5D5D72"/>
-                </a:solidFill>
-                <a:latin typeface="Calibri" pitchFamily="34" charset="0"/>
-                <a:ea typeface="Calibri" pitchFamily="34" charset="-122"/>
-                <a:cs typeface="Calibri" pitchFamily="34" charset="-120"/>
-              </a:rPr>
-              <a:t>Usman Akram  •  COMSATS University Islamabad</a:t>
-            </a:r>
-            <a:endParaRPr lang="en-US" sz="900" dirty="0"/>
-          </a:p>
-        </p:txBody>
-      </p:sp>
-      <p:sp>
-        <p:nvSpPr>
-          <p:cNvPr id="8" name="Text 6"/>
-          <p:cNvSpPr txBox="1"/>
-          <p:nvPr/>
-        </p:nvSpPr>
-        <p:spPr>
-          <a:xfrm>
-            <a:off x="11155680" y="6446520"/>
-            <a:ext cx="457200" cy="292608"/>
-          </a:xfrm>
-          <a:prstGeom prst="rect">
-            <a:avLst/>
-          </a:prstGeom>
-          <a:noFill/>
-          <a:ln/>
-        </p:spPr>
-        <p:txBody>
-          <a:bodyPr wrap="square" lIns="0" tIns="0" rIns="0" bIns="0" rtlCol="0" anchor="ctr"/>
-          <a:lstStyle/>
-          <a:p>
-            <a:pPr algn="r" indent="0" marL="0">
-              <a:buNone/>
-            </a:pPr>
-            <a:r>
-              <a:rPr lang="en-US" sz="900" dirty="0">
-                <a:solidFill>
-                  <a:srgbClr val="5D5D72"/>
-                </a:solidFill>
-                <a:latin typeface="Calibri" pitchFamily="34" charset="0"/>
-                <a:ea typeface="Calibri" pitchFamily="34" charset="-122"/>
-                <a:cs typeface="Calibri" pitchFamily="34" charset="-120"/>
-              </a:rPr>
-              <a:t>12</a:t>
-            </a:r>
-            <a:endParaRPr lang="en-US" sz="900" dirty="0"/>
+        </p:spPr>
+        <p:txBody>
+          <a:bodyPr wrap="none" lIns="0" rIns="0" tIns="0" bIns="0">
+            <a:spAutoFit/>
+          </a:bodyPr>
+          <a:lstStyle/>
+          <a:p>
+            <a:pPr algn="r"/>
+            <a:r>
+              <a:rPr sz="1000">
+                <a:solidFill>
+                  <a:srgbClr val="8A939B"/>
+                </a:solidFill>
+                <a:hlinkClick r:id="rId3"/>
+              </a:rPr>
+              <a:t>cuinotes.com</a:t>
+            </a:r>
+            <a:r>
+              <a:rPr sz="1000">
+                <a:solidFill>
+                  <a:srgbClr val="8A939B"/>
+                </a:solidFill>
+              </a:rPr>
+              <a:t>  ·  12</a:t>
+            </a:r>
           </a:p>
         </p:txBody>
       </p:sp>
@@ -5081,6 +5913,10 @@
             </a:outerShdw>
           </a:effectLst>
         </p:spPr>
+        <p:txBody>
+          <a:bodyPr/>
+          <a:p/>
+        </p:txBody>
       </p:sp>
       <p:pic>
         <p:nvPicPr>
@@ -5108,79 +5944,44 @@
       </p:pic>
       <p:sp>
         <p:nvSpPr>
-          <p:cNvPr id="6" name="Text 3"/>
+          <p:cNvPr id="8" name="cuinotes-footer-mark"/>
           <p:cNvSpPr txBox="1"/>
           <p:nvPr/>
         </p:nvSpPr>
         <p:spPr>
           <a:xfrm>
-            <a:off x="640080" y="6446520"/>
-            <a:ext cx="8686800" cy="292608"/>
+            <a:off x="9951720" y="6455664"/>
+            <a:ext cx="2011680" cy="292608"/>
           </a:xfrm>
           <a:prstGeom prst="rect">
             <a:avLst/>
           </a:prstGeom>
           <a:noFill/>
-          <a:ln/>
-        </p:spPr>
-        <p:txBody>
-          <a:bodyPr wrap="square" lIns="0" tIns="0" rIns="0" bIns="0" rtlCol="0" anchor="ctr"/>
-          <a:lstStyle/>
-          <a:p>
-            <a:pPr algn="l" indent="0" marL="0">
-              <a:buNone/>
-            </a:pPr>
-            <a:r>
-              <a:rPr lang="en-US" sz="900" dirty="0">
-                <a:solidFill>
-                  <a:srgbClr val="5D5D72"/>
-                </a:solidFill>
-                <a:latin typeface="Calibri" pitchFamily="34" charset="0"/>
-                <a:ea typeface="Calibri" pitchFamily="34" charset="-122"/>
-                <a:cs typeface="Calibri" pitchFamily="34" charset="-120"/>
-              </a:rPr>
-              <a:t>Usman Akram  •  COMSATS University Islamabad</a:t>
-            </a:r>
-            <a:endParaRPr lang="en-US" sz="900" dirty="0"/>
-          </a:p>
-        </p:txBody>
-      </p:sp>
-      <p:sp>
-        <p:nvSpPr>
-          <p:cNvPr id="7" name="Text 4"/>
-          <p:cNvSpPr txBox="1"/>
-          <p:nvPr/>
-        </p:nvSpPr>
-        <p:spPr>
-          <a:xfrm>
-            <a:off x="11155680" y="6446520"/>
-            <a:ext cx="457200" cy="292608"/>
-          </a:xfrm>
-          <a:prstGeom prst="rect">
-            <a:avLst/>
-          </a:prstGeom>
-          <a:noFill/>
-          <a:ln/>
-        </p:spPr>
-        <p:txBody>
-          <a:bodyPr wrap="square" lIns="0" tIns="0" rIns="0" bIns="0" rtlCol="0" anchor="ctr"/>
-          <a:lstStyle/>
-          <a:p>
-            <a:pPr algn="r" indent="0" marL="0">
-              <a:buNone/>
-            </a:pPr>
-            <a:r>
-              <a:rPr lang="en-US" sz="900" dirty="0">
-                <a:solidFill>
-                  <a:srgbClr val="5D5D72"/>
-                </a:solidFill>
-                <a:latin typeface="Calibri" pitchFamily="34" charset="0"/>
-                <a:ea typeface="Calibri" pitchFamily="34" charset="-122"/>
-                <a:cs typeface="Calibri" pitchFamily="34" charset="-120"/>
-              </a:rPr>
-              <a:t>13</a:t>
-            </a:r>
-            <a:endParaRPr lang="en-US" sz="900" dirty="0"/>
+        </p:spPr>
+        <p:txBody>
+          <a:bodyPr wrap="none" lIns="0" rIns="0" tIns="0" bIns="0">
+            <a:spAutoFit/>
+          </a:bodyPr>
+          <a:lstStyle/>
+          <a:p>
+            <a:pPr algn="r"/>
+            <a:r>
+              <a:rPr sz="1000">
+                <a:solidFill>
+                  <a:srgbClr val="8A939B"/>
+                </a:solidFill>
+                <a:hlinkClick r:id="rId4"/>
+              </a:rPr>
+              <a:t>cuinotes.com</a:t>
+            </a:r>
+            <a:r>
+              <a:rPr sz="1000">
+                <a:solidFill>
+                  <a:srgbClr val="8A939B"/>
+                </a:solidFill>
+              </a:rPr>
+              <a:t>  ·  13</a:t>
+            </a:r>
           </a:p>
         </p:txBody>
       </p:sp>
@@ -5315,6 +6116,10 @@
           </a:solidFill>
           <a:ln/>
         </p:spPr>
+        <p:txBody>
+          <a:bodyPr/>
+          <a:p/>
+        </p:txBody>
       </p:sp>
       <p:sp>
         <p:nvSpPr>
@@ -5399,79 +6204,44 @@
       </p:sp>
       <p:sp>
         <p:nvSpPr>
-          <p:cNvPr id="7" name="Text 5"/>
+          <p:cNvPr id="9" name="cuinotes-footer-mark"/>
           <p:cNvSpPr txBox="1"/>
           <p:nvPr/>
         </p:nvSpPr>
         <p:spPr>
           <a:xfrm>
-            <a:off x="640080" y="6446520"/>
-            <a:ext cx="8686800" cy="292608"/>
+            <a:off x="9951720" y="6455664"/>
+            <a:ext cx="2011680" cy="292608"/>
           </a:xfrm>
           <a:prstGeom prst="rect">
             <a:avLst/>
           </a:prstGeom>
           <a:noFill/>
-          <a:ln/>
-        </p:spPr>
-        <p:txBody>
-          <a:bodyPr wrap="square" lIns="0" tIns="0" rIns="0" bIns="0" rtlCol="0" anchor="ctr"/>
-          <a:lstStyle/>
-          <a:p>
-            <a:pPr algn="l" indent="0" marL="0">
-              <a:buNone/>
-            </a:pPr>
-            <a:r>
-              <a:rPr lang="en-US" sz="900" dirty="0">
-                <a:solidFill>
-                  <a:srgbClr val="5D5D72"/>
-                </a:solidFill>
-                <a:latin typeface="Calibri" pitchFamily="34" charset="0"/>
-                <a:ea typeface="Calibri" pitchFamily="34" charset="-122"/>
-                <a:cs typeface="Calibri" pitchFamily="34" charset="-120"/>
-              </a:rPr>
-              <a:t>Usman Akram  •  COMSATS University Islamabad</a:t>
-            </a:r>
-            <a:endParaRPr lang="en-US" sz="900" dirty="0"/>
-          </a:p>
-        </p:txBody>
-      </p:sp>
-      <p:sp>
-        <p:nvSpPr>
-          <p:cNvPr id="8" name="Text 6"/>
-          <p:cNvSpPr txBox="1"/>
-          <p:nvPr/>
-        </p:nvSpPr>
-        <p:spPr>
-          <a:xfrm>
-            <a:off x="11155680" y="6446520"/>
-            <a:ext cx="457200" cy="292608"/>
-          </a:xfrm>
-          <a:prstGeom prst="rect">
-            <a:avLst/>
-          </a:prstGeom>
-          <a:noFill/>
-          <a:ln/>
-        </p:spPr>
-        <p:txBody>
-          <a:bodyPr wrap="square" lIns="0" tIns="0" rIns="0" bIns="0" rtlCol="0" anchor="ctr"/>
-          <a:lstStyle/>
-          <a:p>
-            <a:pPr algn="r" indent="0" marL="0">
-              <a:buNone/>
-            </a:pPr>
-            <a:r>
-              <a:rPr lang="en-US" sz="900" dirty="0">
-                <a:solidFill>
-                  <a:srgbClr val="5D5D72"/>
-                </a:solidFill>
-                <a:latin typeface="Calibri" pitchFamily="34" charset="0"/>
-                <a:ea typeface="Calibri" pitchFamily="34" charset="-122"/>
-                <a:cs typeface="Calibri" pitchFamily="34" charset="-120"/>
-              </a:rPr>
-              <a:t>14</a:t>
-            </a:r>
-            <a:endParaRPr lang="en-US" sz="900" dirty="0"/>
+        </p:spPr>
+        <p:txBody>
+          <a:bodyPr wrap="none" lIns="0" rIns="0" tIns="0" bIns="0">
+            <a:spAutoFit/>
+          </a:bodyPr>
+          <a:lstStyle/>
+          <a:p>
+            <a:pPr algn="r"/>
+            <a:r>
+              <a:rPr sz="1000">
+                <a:solidFill>
+                  <a:srgbClr val="8A939B"/>
+                </a:solidFill>
+                <a:hlinkClick r:id="rId3"/>
+              </a:rPr>
+              <a:t>cuinotes.com</a:t>
+            </a:r>
+            <a:r>
+              <a:rPr sz="1000">
+                <a:solidFill>
+                  <a:srgbClr val="8A939B"/>
+                </a:solidFill>
+              </a:rPr>
+              <a:t>  ·  14</a:t>
+            </a:r>
           </a:p>
         </p:txBody>
       </p:sp>
@@ -5618,6 +6388,10 @@
             </a:outerShdw>
           </a:effectLst>
         </p:spPr>
+        <p:txBody>
+          <a:bodyPr/>
+          <a:p/>
+        </p:txBody>
       </p:sp>
       <p:pic>
         <p:nvPicPr>
@@ -5645,79 +6419,44 @@
       </p:pic>
       <p:sp>
         <p:nvSpPr>
-          <p:cNvPr id="6" name="Text 3"/>
+          <p:cNvPr id="8" name="cuinotes-footer-mark"/>
           <p:cNvSpPr txBox="1"/>
           <p:nvPr/>
         </p:nvSpPr>
         <p:spPr>
           <a:xfrm>
-            <a:off x="640080" y="6446520"/>
-            <a:ext cx="8686800" cy="292608"/>
+            <a:off x="9951720" y="6455664"/>
+            <a:ext cx="2011680" cy="292608"/>
           </a:xfrm>
           <a:prstGeom prst="rect">
             <a:avLst/>
           </a:prstGeom>
           <a:noFill/>
-          <a:ln/>
-        </p:spPr>
-        <p:txBody>
-          <a:bodyPr wrap="square" lIns="0" tIns="0" rIns="0" bIns="0" rtlCol="0" anchor="ctr"/>
-          <a:lstStyle/>
-          <a:p>
-            <a:pPr algn="l" indent="0" marL="0">
-              <a:buNone/>
-            </a:pPr>
-            <a:r>
-              <a:rPr lang="en-US" sz="900" dirty="0">
-                <a:solidFill>
-                  <a:srgbClr val="5D5D72"/>
-                </a:solidFill>
-                <a:latin typeface="Calibri" pitchFamily="34" charset="0"/>
-                <a:ea typeface="Calibri" pitchFamily="34" charset="-122"/>
-                <a:cs typeface="Calibri" pitchFamily="34" charset="-120"/>
-              </a:rPr>
-              <a:t>Usman Akram  •  COMSATS University Islamabad</a:t>
-            </a:r>
-            <a:endParaRPr lang="en-US" sz="900" dirty="0"/>
-          </a:p>
-        </p:txBody>
-      </p:sp>
-      <p:sp>
-        <p:nvSpPr>
-          <p:cNvPr id="7" name="Text 4"/>
-          <p:cNvSpPr txBox="1"/>
-          <p:nvPr/>
-        </p:nvSpPr>
-        <p:spPr>
-          <a:xfrm>
-            <a:off x="11155680" y="6446520"/>
-            <a:ext cx="457200" cy="292608"/>
-          </a:xfrm>
-          <a:prstGeom prst="rect">
-            <a:avLst/>
-          </a:prstGeom>
-          <a:noFill/>
-          <a:ln/>
-        </p:spPr>
-        <p:txBody>
-          <a:bodyPr wrap="square" lIns="0" tIns="0" rIns="0" bIns="0" rtlCol="0" anchor="ctr"/>
-          <a:lstStyle/>
-          <a:p>
-            <a:pPr algn="r" indent="0" marL="0">
-              <a:buNone/>
-            </a:pPr>
-            <a:r>
-              <a:rPr lang="en-US" sz="900" dirty="0">
-                <a:solidFill>
-                  <a:srgbClr val="5D5D72"/>
-                </a:solidFill>
-                <a:latin typeface="Calibri" pitchFamily="34" charset="0"/>
-                <a:ea typeface="Calibri" pitchFamily="34" charset="-122"/>
-                <a:cs typeface="Calibri" pitchFamily="34" charset="-120"/>
-              </a:rPr>
-              <a:t>15</a:t>
-            </a:r>
-            <a:endParaRPr lang="en-US" sz="900" dirty="0"/>
+        </p:spPr>
+        <p:txBody>
+          <a:bodyPr wrap="none" lIns="0" rIns="0" tIns="0" bIns="0">
+            <a:spAutoFit/>
+          </a:bodyPr>
+          <a:lstStyle/>
+          <a:p>
+            <a:pPr algn="r"/>
+            <a:r>
+              <a:rPr sz="1000">
+                <a:solidFill>
+                  <a:srgbClr val="8A939B"/>
+                </a:solidFill>
+                <a:hlinkClick r:id="rId4"/>
+              </a:rPr>
+              <a:t>cuinotes.com</a:t>
+            </a:r>
+            <a:r>
+              <a:rPr sz="1000">
+                <a:solidFill>
+                  <a:srgbClr val="8A939B"/>
+                </a:solidFill>
+              </a:rPr>
+              <a:t>  ·  15</a:t>
+            </a:r>
           </a:p>
         </p:txBody>
       </p:sp>
@@ -5852,6 +6591,10 @@
           </a:solidFill>
           <a:ln/>
         </p:spPr>
+        <p:txBody>
+          <a:bodyPr/>
+          <a:p/>
+        </p:txBody>
       </p:sp>
       <p:sp>
         <p:nvSpPr>
@@ -5937,79 +6680,44 @@
       </p:sp>
       <p:sp>
         <p:nvSpPr>
-          <p:cNvPr id="6" name="Text 4"/>
+          <p:cNvPr id="8" name="cuinotes-footer-mark"/>
           <p:cNvSpPr txBox="1"/>
           <p:nvPr/>
         </p:nvSpPr>
         <p:spPr>
           <a:xfrm>
-            <a:off x="640080" y="6446520"/>
-            <a:ext cx="8686800" cy="292608"/>
+            <a:off x="9951720" y="6455664"/>
+            <a:ext cx="2011680" cy="292608"/>
           </a:xfrm>
           <a:prstGeom prst="rect">
             <a:avLst/>
           </a:prstGeom>
           <a:noFill/>
-          <a:ln/>
-        </p:spPr>
-        <p:txBody>
-          <a:bodyPr wrap="square" lIns="0" tIns="0" rIns="0" bIns="0" rtlCol="0" anchor="ctr"/>
-          <a:lstStyle/>
-          <a:p>
-            <a:pPr algn="l" indent="0" marL="0">
-              <a:buNone/>
-            </a:pPr>
-            <a:r>
-              <a:rPr lang="en-US" sz="900" dirty="0">
-                <a:solidFill>
-                  <a:srgbClr val="5D5D72"/>
-                </a:solidFill>
-                <a:latin typeface="Calibri" pitchFamily="34" charset="0"/>
-                <a:ea typeface="Calibri" pitchFamily="34" charset="-122"/>
-                <a:cs typeface="Calibri" pitchFamily="34" charset="-120"/>
-              </a:rPr>
-              <a:t>Usman Akram  •  COMSATS University Islamabad</a:t>
-            </a:r>
-            <a:endParaRPr lang="en-US" sz="900" dirty="0"/>
-          </a:p>
-        </p:txBody>
-      </p:sp>
-      <p:sp>
-        <p:nvSpPr>
-          <p:cNvPr id="7" name="Text 5"/>
-          <p:cNvSpPr txBox="1"/>
-          <p:nvPr/>
-        </p:nvSpPr>
-        <p:spPr>
-          <a:xfrm>
-            <a:off x="11155680" y="6446520"/>
-            <a:ext cx="457200" cy="292608"/>
-          </a:xfrm>
-          <a:prstGeom prst="rect">
-            <a:avLst/>
-          </a:prstGeom>
-          <a:noFill/>
-          <a:ln/>
-        </p:spPr>
-        <p:txBody>
-          <a:bodyPr wrap="square" lIns="0" tIns="0" rIns="0" bIns="0" rtlCol="0" anchor="ctr"/>
-          <a:lstStyle/>
-          <a:p>
-            <a:pPr algn="r" indent="0" marL="0">
-              <a:buNone/>
-            </a:pPr>
-            <a:r>
-              <a:rPr lang="en-US" sz="900" dirty="0">
-                <a:solidFill>
-                  <a:srgbClr val="5D5D72"/>
-                </a:solidFill>
-                <a:latin typeface="Calibri" pitchFamily="34" charset="0"/>
-                <a:ea typeface="Calibri" pitchFamily="34" charset="-122"/>
-                <a:cs typeface="Calibri" pitchFamily="34" charset="-120"/>
-              </a:rPr>
-              <a:t>16</a:t>
-            </a:r>
-            <a:endParaRPr lang="en-US" sz="900" dirty="0"/>
+        </p:spPr>
+        <p:txBody>
+          <a:bodyPr wrap="none" lIns="0" rIns="0" tIns="0" bIns="0">
+            <a:spAutoFit/>
+          </a:bodyPr>
+          <a:lstStyle/>
+          <a:p>
+            <a:pPr algn="r"/>
+            <a:r>
+              <a:rPr sz="1000">
+                <a:solidFill>
+                  <a:srgbClr val="8A939B"/>
+                </a:solidFill>
+                <a:hlinkClick r:id="rId3"/>
+              </a:rPr>
+              <a:t>cuinotes.com</a:t>
+            </a:r>
+            <a:r>
+              <a:rPr sz="1000">
+                <a:solidFill>
+                  <a:srgbClr val="8A939B"/>
+                </a:solidFill>
+              </a:rPr>
+              <a:t>  ·  16</a:t>
+            </a:r>
           </a:p>
         </p:txBody>
       </p:sp>
@@ -6156,6 +6864,10 @@
             </a:outerShdw>
           </a:effectLst>
         </p:spPr>
+        <p:txBody>
+          <a:bodyPr/>
+          <a:p/>
+        </p:txBody>
       </p:sp>
       <p:pic>
         <p:nvPicPr>
@@ -6183,79 +6895,44 @@
       </p:pic>
       <p:sp>
         <p:nvSpPr>
-          <p:cNvPr id="6" name="Text 3"/>
+          <p:cNvPr id="8" name="cuinotes-footer-mark"/>
           <p:cNvSpPr txBox="1"/>
           <p:nvPr/>
         </p:nvSpPr>
         <p:spPr>
           <a:xfrm>
-            <a:off x="640080" y="6446520"/>
-            <a:ext cx="8686800" cy="292608"/>
+            <a:off x="9951720" y="6455664"/>
+            <a:ext cx="2011680" cy="292608"/>
           </a:xfrm>
           <a:prstGeom prst="rect">
             <a:avLst/>
           </a:prstGeom>
           <a:noFill/>
-          <a:ln/>
-        </p:spPr>
-        <p:txBody>
-          <a:bodyPr wrap="square" lIns="0" tIns="0" rIns="0" bIns="0" rtlCol="0" anchor="ctr"/>
-          <a:lstStyle/>
-          <a:p>
-            <a:pPr algn="l" indent="0" marL="0">
-              <a:buNone/>
-            </a:pPr>
-            <a:r>
-              <a:rPr lang="en-US" sz="900" dirty="0">
-                <a:solidFill>
-                  <a:srgbClr val="5D5D72"/>
-                </a:solidFill>
-                <a:latin typeface="Calibri" pitchFamily="34" charset="0"/>
-                <a:ea typeface="Calibri" pitchFamily="34" charset="-122"/>
-                <a:cs typeface="Calibri" pitchFamily="34" charset="-120"/>
-              </a:rPr>
-              <a:t>Usman Akram  •  COMSATS University Islamabad</a:t>
-            </a:r>
-            <a:endParaRPr lang="en-US" sz="900" dirty="0"/>
-          </a:p>
-        </p:txBody>
-      </p:sp>
-      <p:sp>
-        <p:nvSpPr>
-          <p:cNvPr id="7" name="Text 4"/>
-          <p:cNvSpPr txBox="1"/>
-          <p:nvPr/>
-        </p:nvSpPr>
-        <p:spPr>
-          <a:xfrm>
-            <a:off x="11155680" y="6446520"/>
-            <a:ext cx="457200" cy="292608"/>
-          </a:xfrm>
-          <a:prstGeom prst="rect">
-            <a:avLst/>
-          </a:prstGeom>
-          <a:noFill/>
-          <a:ln/>
-        </p:spPr>
-        <p:txBody>
-          <a:bodyPr wrap="square" lIns="0" tIns="0" rIns="0" bIns="0" rtlCol="0" anchor="ctr"/>
-          <a:lstStyle/>
-          <a:p>
-            <a:pPr algn="r" indent="0" marL="0">
-              <a:buNone/>
-            </a:pPr>
-            <a:r>
-              <a:rPr lang="en-US" sz="900" dirty="0">
-                <a:solidFill>
-                  <a:srgbClr val="5D5D72"/>
-                </a:solidFill>
-                <a:latin typeface="Calibri" pitchFamily="34" charset="0"/>
-                <a:ea typeface="Calibri" pitchFamily="34" charset="-122"/>
-                <a:cs typeface="Calibri" pitchFamily="34" charset="-120"/>
-              </a:rPr>
-              <a:t>17</a:t>
-            </a:r>
-            <a:endParaRPr lang="en-US" sz="900" dirty="0"/>
+        </p:spPr>
+        <p:txBody>
+          <a:bodyPr wrap="none" lIns="0" rIns="0" tIns="0" bIns="0">
+            <a:spAutoFit/>
+          </a:bodyPr>
+          <a:lstStyle/>
+          <a:p>
+            <a:pPr algn="r"/>
+            <a:r>
+              <a:rPr sz="1000">
+                <a:solidFill>
+                  <a:srgbClr val="8A939B"/>
+                </a:solidFill>
+                <a:hlinkClick r:id="rId4"/>
+              </a:rPr>
+              <a:t>cuinotes.com</a:t>
+            </a:r>
+            <a:r>
+              <a:rPr sz="1000">
+                <a:solidFill>
+                  <a:srgbClr val="8A939B"/>
+                </a:solidFill>
+              </a:rPr>
+              <a:t>  ·  17</a:t>
+            </a:r>
           </a:p>
         </p:txBody>
       </p:sp>
@@ -6390,6 +7067,10 @@
           </a:solidFill>
           <a:ln/>
         </p:spPr>
+        <p:txBody>
+          <a:bodyPr/>
+          <a:p/>
+        </p:txBody>
       </p:sp>
       <p:sp>
         <p:nvSpPr>
@@ -6535,79 +7216,44 @@
       </p:sp>
       <p:sp>
         <p:nvSpPr>
-          <p:cNvPr id="6" name="Text 4"/>
+          <p:cNvPr id="8" name="cuinotes-footer-mark"/>
           <p:cNvSpPr txBox="1"/>
           <p:nvPr/>
         </p:nvSpPr>
         <p:spPr>
           <a:xfrm>
-            <a:off x="640080" y="6446520"/>
-            <a:ext cx="8686800" cy="292608"/>
+            <a:off x="9951720" y="6455664"/>
+            <a:ext cx="2011680" cy="292608"/>
           </a:xfrm>
           <a:prstGeom prst="rect">
             <a:avLst/>
           </a:prstGeom>
           <a:noFill/>
-          <a:ln/>
-        </p:spPr>
-        <p:txBody>
-          <a:bodyPr wrap="square" lIns="0" tIns="0" rIns="0" bIns="0" rtlCol="0" anchor="ctr"/>
-          <a:lstStyle/>
-          <a:p>
-            <a:pPr algn="l" indent="0" marL="0">
-              <a:buNone/>
-            </a:pPr>
-            <a:r>
-              <a:rPr lang="en-US" sz="900" dirty="0">
-                <a:solidFill>
-                  <a:srgbClr val="5D5D72"/>
-                </a:solidFill>
-                <a:latin typeface="Calibri" pitchFamily="34" charset="0"/>
-                <a:ea typeface="Calibri" pitchFamily="34" charset="-122"/>
-                <a:cs typeface="Calibri" pitchFamily="34" charset="-120"/>
-              </a:rPr>
-              <a:t>Usman Akram  •  COMSATS University Islamabad</a:t>
-            </a:r>
-            <a:endParaRPr lang="en-US" sz="900" dirty="0"/>
-          </a:p>
-        </p:txBody>
-      </p:sp>
-      <p:sp>
-        <p:nvSpPr>
-          <p:cNvPr id="7" name="Text 5"/>
-          <p:cNvSpPr txBox="1"/>
-          <p:nvPr/>
-        </p:nvSpPr>
-        <p:spPr>
-          <a:xfrm>
-            <a:off x="11155680" y="6446520"/>
-            <a:ext cx="457200" cy="292608"/>
-          </a:xfrm>
-          <a:prstGeom prst="rect">
-            <a:avLst/>
-          </a:prstGeom>
-          <a:noFill/>
-          <a:ln/>
-        </p:spPr>
-        <p:txBody>
-          <a:bodyPr wrap="square" lIns="0" tIns="0" rIns="0" bIns="0" rtlCol="0" anchor="ctr"/>
-          <a:lstStyle/>
-          <a:p>
-            <a:pPr algn="r" indent="0" marL="0">
-              <a:buNone/>
-            </a:pPr>
-            <a:r>
-              <a:rPr lang="en-US" sz="900" dirty="0">
-                <a:solidFill>
-                  <a:srgbClr val="5D5D72"/>
-                </a:solidFill>
-                <a:latin typeface="Calibri" pitchFamily="34" charset="0"/>
-                <a:ea typeface="Calibri" pitchFamily="34" charset="-122"/>
-                <a:cs typeface="Calibri" pitchFamily="34" charset="-120"/>
-              </a:rPr>
-              <a:t>18</a:t>
-            </a:r>
-            <a:endParaRPr lang="en-US" sz="900" dirty="0"/>
+        </p:spPr>
+        <p:txBody>
+          <a:bodyPr wrap="none" lIns="0" rIns="0" tIns="0" bIns="0">
+            <a:spAutoFit/>
+          </a:bodyPr>
+          <a:lstStyle/>
+          <a:p>
+            <a:pPr algn="r"/>
+            <a:r>
+              <a:rPr sz="1000">
+                <a:solidFill>
+                  <a:srgbClr val="8A939B"/>
+                </a:solidFill>
+                <a:hlinkClick r:id="rId3"/>
+              </a:rPr>
+              <a:t>cuinotes.com</a:t>
+            </a:r>
+            <a:r>
+              <a:rPr sz="1000">
+                <a:solidFill>
+                  <a:srgbClr val="8A939B"/>
+                </a:solidFill>
+              </a:rPr>
+              <a:t>  ·  18</a:t>
+            </a:r>
           </a:p>
         </p:txBody>
       </p:sp>
@@ -6754,6 +7400,10 @@
             </a:outerShdw>
           </a:effectLst>
         </p:spPr>
+        <p:txBody>
+          <a:bodyPr/>
+          <a:p/>
+        </p:txBody>
       </p:sp>
       <p:pic>
         <p:nvPicPr>
@@ -6781,79 +7431,44 @@
       </p:pic>
       <p:sp>
         <p:nvSpPr>
-          <p:cNvPr id="6" name="Text 3"/>
+          <p:cNvPr id="8" name="cuinotes-footer-mark"/>
           <p:cNvSpPr txBox="1"/>
           <p:nvPr/>
         </p:nvSpPr>
         <p:spPr>
           <a:xfrm>
-            <a:off x="640080" y="6446520"/>
-            <a:ext cx="8686800" cy="292608"/>
+            <a:off x="9951720" y="6455664"/>
+            <a:ext cx="2011680" cy="292608"/>
           </a:xfrm>
           <a:prstGeom prst="rect">
             <a:avLst/>
           </a:prstGeom>
           <a:noFill/>
-          <a:ln/>
-        </p:spPr>
-        <p:txBody>
-          <a:bodyPr wrap="square" lIns="0" tIns="0" rIns="0" bIns="0" rtlCol="0" anchor="ctr"/>
-          <a:lstStyle/>
-          <a:p>
-            <a:pPr algn="l" indent="0" marL="0">
-              <a:buNone/>
-            </a:pPr>
-            <a:r>
-              <a:rPr lang="en-US" sz="900" dirty="0">
-                <a:solidFill>
-                  <a:srgbClr val="5D5D72"/>
-                </a:solidFill>
-                <a:latin typeface="Calibri" pitchFamily="34" charset="0"/>
-                <a:ea typeface="Calibri" pitchFamily="34" charset="-122"/>
-                <a:cs typeface="Calibri" pitchFamily="34" charset="-120"/>
-              </a:rPr>
-              <a:t>Usman Akram  •  COMSATS University Islamabad</a:t>
-            </a:r>
-            <a:endParaRPr lang="en-US" sz="900" dirty="0"/>
-          </a:p>
-        </p:txBody>
-      </p:sp>
-      <p:sp>
-        <p:nvSpPr>
-          <p:cNvPr id="7" name="Text 4"/>
-          <p:cNvSpPr txBox="1"/>
-          <p:nvPr/>
-        </p:nvSpPr>
-        <p:spPr>
-          <a:xfrm>
-            <a:off x="11155680" y="6446520"/>
-            <a:ext cx="457200" cy="292608"/>
-          </a:xfrm>
-          <a:prstGeom prst="rect">
-            <a:avLst/>
-          </a:prstGeom>
-          <a:noFill/>
-          <a:ln/>
-        </p:spPr>
-        <p:txBody>
-          <a:bodyPr wrap="square" lIns="0" tIns="0" rIns="0" bIns="0" rtlCol="0" anchor="ctr"/>
-          <a:lstStyle/>
-          <a:p>
-            <a:pPr algn="r" indent="0" marL="0">
-              <a:buNone/>
-            </a:pPr>
-            <a:r>
-              <a:rPr lang="en-US" sz="900" dirty="0">
-                <a:solidFill>
-                  <a:srgbClr val="5D5D72"/>
-                </a:solidFill>
-                <a:latin typeface="Calibri" pitchFamily="34" charset="0"/>
-                <a:ea typeface="Calibri" pitchFamily="34" charset="-122"/>
-                <a:cs typeface="Calibri" pitchFamily="34" charset="-120"/>
-              </a:rPr>
-              <a:t>19</a:t>
-            </a:r>
-            <a:endParaRPr lang="en-US" sz="900" dirty="0"/>
+        </p:spPr>
+        <p:txBody>
+          <a:bodyPr wrap="none" lIns="0" rIns="0" tIns="0" bIns="0">
+            <a:spAutoFit/>
+          </a:bodyPr>
+          <a:lstStyle/>
+          <a:p>
+            <a:pPr algn="r"/>
+            <a:r>
+              <a:rPr sz="1000">
+                <a:solidFill>
+                  <a:srgbClr val="8A939B"/>
+                </a:solidFill>
+                <a:hlinkClick r:id="rId4"/>
+              </a:rPr>
+              <a:t>cuinotes.com</a:t>
+            </a:r>
+            <a:r>
+              <a:rPr sz="1000">
+                <a:solidFill>
+                  <a:srgbClr val="8A939B"/>
+                </a:solidFill>
+              </a:rPr>
+              <a:t>  ·  19</a:t>
+            </a:r>
           </a:p>
         </p:txBody>
       </p:sp>
@@ -6986,6 +7601,10 @@
           </a:solidFill>
           <a:ln/>
         </p:spPr>
+        <p:txBody>
+          <a:bodyPr/>
+          <a:p/>
+        </p:txBody>
       </p:sp>
       <p:sp>
         <p:nvSpPr>
@@ -7084,6 +7703,10 @@
           </a:solidFill>
           <a:ln/>
         </p:spPr>
+        <p:txBody>
+          <a:bodyPr/>
+          <a:p/>
+        </p:txBody>
       </p:sp>
       <p:sp>
         <p:nvSpPr>
@@ -7182,6 +7805,10 @@
           </a:solidFill>
           <a:ln/>
         </p:spPr>
+        <p:txBody>
+          <a:bodyPr/>
+          <a:p/>
+        </p:txBody>
       </p:sp>
       <p:sp>
         <p:nvSpPr>
@@ -7280,6 +7907,10 @@
           </a:solidFill>
           <a:ln/>
         </p:spPr>
+        <p:txBody>
+          <a:bodyPr/>
+          <a:p/>
+        </p:txBody>
       </p:sp>
       <p:sp>
         <p:nvSpPr>
@@ -7378,6 +8009,10 @@
           </a:solidFill>
           <a:ln/>
         </p:spPr>
+        <p:txBody>
+          <a:bodyPr/>
+          <a:p/>
+        </p:txBody>
       </p:sp>
       <p:sp>
         <p:nvSpPr>
@@ -7459,79 +8094,44 @@
       </p:sp>
       <p:sp>
         <p:nvSpPr>
-          <p:cNvPr id="19" name="Text 17"/>
+          <p:cNvPr id="21" name="cuinotes-footer-mark"/>
           <p:cNvSpPr txBox="1"/>
           <p:nvPr/>
         </p:nvSpPr>
         <p:spPr>
           <a:xfrm>
-            <a:off x="640080" y="6446520"/>
-            <a:ext cx="8686800" cy="292608"/>
+            <a:off x="9951720" y="6455664"/>
+            <a:ext cx="2011680" cy="292608"/>
           </a:xfrm>
           <a:prstGeom prst="rect">
             <a:avLst/>
           </a:prstGeom>
           <a:noFill/>
-          <a:ln/>
-        </p:spPr>
-        <p:txBody>
-          <a:bodyPr wrap="square" lIns="0" tIns="0" rIns="0" bIns="0" rtlCol="0" anchor="ctr"/>
-          <a:lstStyle/>
-          <a:p>
-            <a:pPr algn="l" indent="0" marL="0">
-              <a:buNone/>
-            </a:pPr>
-            <a:r>
-              <a:rPr lang="en-US" sz="900" dirty="0">
-                <a:solidFill>
-                  <a:srgbClr val="5D5D72"/>
-                </a:solidFill>
-                <a:latin typeface="Calibri" pitchFamily="34" charset="0"/>
-                <a:ea typeface="Calibri" pitchFamily="34" charset="-122"/>
-                <a:cs typeface="Calibri" pitchFamily="34" charset="-120"/>
-              </a:rPr>
-              <a:t>Usman Akram  •  COMSATS University Islamabad</a:t>
-            </a:r>
-            <a:endParaRPr lang="en-US" sz="900" dirty="0"/>
-          </a:p>
-        </p:txBody>
-      </p:sp>
-      <p:sp>
-        <p:nvSpPr>
-          <p:cNvPr id="20" name="Text 18"/>
-          <p:cNvSpPr txBox="1"/>
-          <p:nvPr/>
-        </p:nvSpPr>
-        <p:spPr>
-          <a:xfrm>
-            <a:off x="11155680" y="6446520"/>
-            <a:ext cx="457200" cy="292608"/>
-          </a:xfrm>
-          <a:prstGeom prst="rect">
-            <a:avLst/>
-          </a:prstGeom>
-          <a:noFill/>
-          <a:ln/>
-        </p:spPr>
-        <p:txBody>
-          <a:bodyPr wrap="square" lIns="0" tIns="0" rIns="0" bIns="0" rtlCol="0" anchor="ctr"/>
-          <a:lstStyle/>
-          <a:p>
-            <a:pPr algn="r" indent="0" marL="0">
-              <a:buNone/>
-            </a:pPr>
-            <a:r>
-              <a:rPr lang="en-US" sz="900" dirty="0">
-                <a:solidFill>
-                  <a:srgbClr val="5D5D72"/>
-                </a:solidFill>
-                <a:latin typeface="Calibri" pitchFamily="34" charset="0"/>
-                <a:ea typeface="Calibri" pitchFamily="34" charset="-122"/>
-                <a:cs typeface="Calibri" pitchFamily="34" charset="-120"/>
-              </a:rPr>
-              <a:t>2</a:t>
-            </a:r>
-            <a:endParaRPr lang="en-US" sz="900" dirty="0"/>
+        </p:spPr>
+        <p:txBody>
+          <a:bodyPr wrap="none" lIns="0" rIns="0" tIns="0" bIns="0">
+            <a:spAutoFit/>
+          </a:bodyPr>
+          <a:lstStyle/>
+          <a:p>
+            <a:pPr algn="r"/>
+            <a:r>
+              <a:rPr sz="1000">
+                <a:solidFill>
+                  <a:srgbClr val="8A939B"/>
+                </a:solidFill>
+                <a:hlinkClick r:id="rId3"/>
+              </a:rPr>
+              <a:t>cuinotes.com</a:t>
+            </a:r>
+            <a:r>
+              <a:rPr sz="1000">
+                <a:solidFill>
+                  <a:srgbClr val="8A939B"/>
+                </a:solidFill>
+              </a:rPr>
+              <a:t>  ·  2</a:t>
+            </a:r>
           </a:p>
         </p:txBody>
       </p:sp>
@@ -7666,6 +8266,10 @@
           </a:solidFill>
           <a:ln/>
         </p:spPr>
+        <p:txBody>
+          <a:bodyPr/>
+          <a:p/>
+        </p:txBody>
       </p:sp>
       <p:sp>
         <p:nvSpPr>
@@ -7790,79 +8394,44 @@
       </p:sp>
       <p:sp>
         <p:nvSpPr>
-          <p:cNvPr id="7" name="Text 5"/>
+          <p:cNvPr id="9" name="cuinotes-footer-mark"/>
           <p:cNvSpPr txBox="1"/>
           <p:nvPr/>
         </p:nvSpPr>
         <p:spPr>
           <a:xfrm>
-            <a:off x="640080" y="6446520"/>
-            <a:ext cx="8686800" cy="292608"/>
+            <a:off x="9951720" y="6455664"/>
+            <a:ext cx="2011680" cy="292608"/>
           </a:xfrm>
           <a:prstGeom prst="rect">
             <a:avLst/>
           </a:prstGeom>
           <a:noFill/>
-          <a:ln/>
-        </p:spPr>
-        <p:txBody>
-          <a:bodyPr wrap="square" lIns="0" tIns="0" rIns="0" bIns="0" rtlCol="0" anchor="ctr"/>
-          <a:lstStyle/>
-          <a:p>
-            <a:pPr algn="l" indent="0" marL="0">
-              <a:buNone/>
-            </a:pPr>
-            <a:r>
-              <a:rPr lang="en-US" sz="900" dirty="0">
-                <a:solidFill>
-                  <a:srgbClr val="5D5D72"/>
-                </a:solidFill>
-                <a:latin typeface="Calibri" pitchFamily="34" charset="0"/>
-                <a:ea typeface="Calibri" pitchFamily="34" charset="-122"/>
-                <a:cs typeface="Calibri" pitchFamily="34" charset="-120"/>
-              </a:rPr>
-              <a:t>Usman Akram  •  COMSATS University Islamabad</a:t>
-            </a:r>
-            <a:endParaRPr lang="en-US" sz="900" dirty="0"/>
-          </a:p>
-        </p:txBody>
-      </p:sp>
-      <p:sp>
-        <p:nvSpPr>
-          <p:cNvPr id="8" name="Text 6"/>
-          <p:cNvSpPr txBox="1"/>
-          <p:nvPr/>
-        </p:nvSpPr>
-        <p:spPr>
-          <a:xfrm>
-            <a:off x="11155680" y="6446520"/>
-            <a:ext cx="457200" cy="292608"/>
-          </a:xfrm>
-          <a:prstGeom prst="rect">
-            <a:avLst/>
-          </a:prstGeom>
-          <a:noFill/>
-          <a:ln/>
-        </p:spPr>
-        <p:txBody>
-          <a:bodyPr wrap="square" lIns="0" tIns="0" rIns="0" bIns="0" rtlCol="0" anchor="ctr"/>
-          <a:lstStyle/>
-          <a:p>
-            <a:pPr algn="r" indent="0" marL="0">
-              <a:buNone/>
-            </a:pPr>
-            <a:r>
-              <a:rPr lang="en-US" sz="900" dirty="0">
-                <a:solidFill>
-                  <a:srgbClr val="5D5D72"/>
-                </a:solidFill>
-                <a:latin typeface="Calibri" pitchFamily="34" charset="0"/>
-                <a:ea typeface="Calibri" pitchFamily="34" charset="-122"/>
-                <a:cs typeface="Calibri" pitchFamily="34" charset="-120"/>
-              </a:rPr>
-              <a:t>20</a:t>
-            </a:r>
-            <a:endParaRPr lang="en-US" sz="900" dirty="0"/>
+        </p:spPr>
+        <p:txBody>
+          <a:bodyPr wrap="none" lIns="0" rIns="0" tIns="0" bIns="0">
+            <a:spAutoFit/>
+          </a:bodyPr>
+          <a:lstStyle/>
+          <a:p>
+            <a:pPr algn="r"/>
+            <a:r>
+              <a:rPr sz="1000">
+                <a:solidFill>
+                  <a:srgbClr val="8A939B"/>
+                </a:solidFill>
+                <a:hlinkClick r:id="rId3"/>
+              </a:rPr>
+              <a:t>cuinotes.com</a:t>
+            </a:r>
+            <a:r>
+              <a:rPr sz="1000">
+                <a:solidFill>
+                  <a:srgbClr val="8A939B"/>
+                </a:solidFill>
+              </a:rPr>
+              <a:t>  ·  20</a:t>
+            </a:r>
           </a:p>
         </p:txBody>
       </p:sp>
@@ -8009,6 +8578,10 @@
             </a:outerShdw>
           </a:effectLst>
         </p:spPr>
+        <p:txBody>
+          <a:bodyPr/>
+          <a:p/>
+        </p:txBody>
       </p:sp>
       <p:pic>
         <p:nvPicPr>
@@ -8036,79 +8609,44 @@
       </p:pic>
       <p:sp>
         <p:nvSpPr>
-          <p:cNvPr id="6" name="Text 3"/>
+          <p:cNvPr id="8" name="cuinotes-footer-mark"/>
           <p:cNvSpPr txBox="1"/>
           <p:nvPr/>
         </p:nvSpPr>
         <p:spPr>
           <a:xfrm>
-            <a:off x="640080" y="6446520"/>
-            <a:ext cx="8686800" cy="292608"/>
+            <a:off x="9951720" y="6455664"/>
+            <a:ext cx="2011680" cy="292608"/>
           </a:xfrm>
           <a:prstGeom prst="rect">
             <a:avLst/>
           </a:prstGeom>
           <a:noFill/>
-          <a:ln/>
-        </p:spPr>
-        <p:txBody>
-          <a:bodyPr wrap="square" lIns="0" tIns="0" rIns="0" bIns="0" rtlCol="0" anchor="ctr"/>
-          <a:lstStyle/>
-          <a:p>
-            <a:pPr algn="l" indent="0" marL="0">
-              <a:buNone/>
-            </a:pPr>
-            <a:r>
-              <a:rPr lang="en-US" sz="900" dirty="0">
-                <a:solidFill>
-                  <a:srgbClr val="5D5D72"/>
-                </a:solidFill>
-                <a:latin typeface="Calibri" pitchFamily="34" charset="0"/>
-                <a:ea typeface="Calibri" pitchFamily="34" charset="-122"/>
-                <a:cs typeface="Calibri" pitchFamily="34" charset="-120"/>
-              </a:rPr>
-              <a:t>Usman Akram  •  COMSATS University Islamabad</a:t>
-            </a:r>
-            <a:endParaRPr lang="en-US" sz="900" dirty="0"/>
-          </a:p>
-        </p:txBody>
-      </p:sp>
-      <p:sp>
-        <p:nvSpPr>
-          <p:cNvPr id="7" name="Text 4"/>
-          <p:cNvSpPr txBox="1"/>
-          <p:nvPr/>
-        </p:nvSpPr>
-        <p:spPr>
-          <a:xfrm>
-            <a:off x="11155680" y="6446520"/>
-            <a:ext cx="457200" cy="292608"/>
-          </a:xfrm>
-          <a:prstGeom prst="rect">
-            <a:avLst/>
-          </a:prstGeom>
-          <a:noFill/>
-          <a:ln/>
-        </p:spPr>
-        <p:txBody>
-          <a:bodyPr wrap="square" lIns="0" tIns="0" rIns="0" bIns="0" rtlCol="0" anchor="ctr"/>
-          <a:lstStyle/>
-          <a:p>
-            <a:pPr algn="r" indent="0" marL="0">
-              <a:buNone/>
-            </a:pPr>
-            <a:r>
-              <a:rPr lang="en-US" sz="900" dirty="0">
-                <a:solidFill>
-                  <a:srgbClr val="5D5D72"/>
-                </a:solidFill>
-                <a:latin typeface="Calibri" pitchFamily="34" charset="0"/>
-                <a:ea typeface="Calibri" pitchFamily="34" charset="-122"/>
-                <a:cs typeface="Calibri" pitchFamily="34" charset="-120"/>
-              </a:rPr>
-              <a:t>21</a:t>
-            </a:r>
-            <a:endParaRPr lang="en-US" sz="900" dirty="0"/>
+        </p:spPr>
+        <p:txBody>
+          <a:bodyPr wrap="none" lIns="0" rIns="0" tIns="0" bIns="0">
+            <a:spAutoFit/>
+          </a:bodyPr>
+          <a:lstStyle/>
+          <a:p>
+            <a:pPr algn="r"/>
+            <a:r>
+              <a:rPr sz="1000">
+                <a:solidFill>
+                  <a:srgbClr val="8A939B"/>
+                </a:solidFill>
+                <a:hlinkClick r:id="rId4"/>
+              </a:rPr>
+              <a:t>cuinotes.com</a:t>
+            </a:r>
+            <a:r>
+              <a:rPr sz="1000">
+                <a:solidFill>
+                  <a:srgbClr val="8A939B"/>
+                </a:solidFill>
+              </a:rPr>
+              <a:t>  ·  21</a:t>
+            </a:r>
           </a:p>
         </p:txBody>
       </p:sp>
@@ -8243,6 +8781,10 @@
           </a:solidFill>
           <a:ln/>
         </p:spPr>
+        <p:txBody>
+          <a:bodyPr/>
+          <a:p/>
+        </p:txBody>
       </p:sp>
       <p:sp>
         <p:nvSpPr>
@@ -8407,79 +8949,44 @@
       </p:sp>
       <p:sp>
         <p:nvSpPr>
-          <p:cNvPr id="7" name="Text 5"/>
+          <p:cNvPr id="9" name="cuinotes-footer-mark"/>
           <p:cNvSpPr txBox="1"/>
           <p:nvPr/>
         </p:nvSpPr>
         <p:spPr>
           <a:xfrm>
-            <a:off x="640080" y="6446520"/>
-            <a:ext cx="8686800" cy="292608"/>
+            <a:off x="9951720" y="6455664"/>
+            <a:ext cx="2011680" cy="292608"/>
           </a:xfrm>
           <a:prstGeom prst="rect">
             <a:avLst/>
           </a:prstGeom>
           <a:noFill/>
-          <a:ln/>
-        </p:spPr>
-        <p:txBody>
-          <a:bodyPr wrap="square" lIns="0" tIns="0" rIns="0" bIns="0" rtlCol="0" anchor="ctr"/>
-          <a:lstStyle/>
-          <a:p>
-            <a:pPr algn="l" indent="0" marL="0">
-              <a:buNone/>
-            </a:pPr>
-            <a:r>
-              <a:rPr lang="en-US" sz="900" dirty="0">
-                <a:solidFill>
-                  <a:srgbClr val="5D5D72"/>
-                </a:solidFill>
-                <a:latin typeface="Calibri" pitchFamily="34" charset="0"/>
-                <a:ea typeface="Calibri" pitchFamily="34" charset="-122"/>
-                <a:cs typeface="Calibri" pitchFamily="34" charset="-120"/>
-              </a:rPr>
-              <a:t>Usman Akram  •  COMSATS University Islamabad</a:t>
-            </a:r>
-            <a:endParaRPr lang="en-US" sz="900" dirty="0"/>
-          </a:p>
-        </p:txBody>
-      </p:sp>
-      <p:sp>
-        <p:nvSpPr>
-          <p:cNvPr id="8" name="Text 6"/>
-          <p:cNvSpPr txBox="1"/>
-          <p:nvPr/>
-        </p:nvSpPr>
-        <p:spPr>
-          <a:xfrm>
-            <a:off x="11155680" y="6446520"/>
-            <a:ext cx="457200" cy="292608"/>
-          </a:xfrm>
-          <a:prstGeom prst="rect">
-            <a:avLst/>
-          </a:prstGeom>
-          <a:noFill/>
-          <a:ln/>
-        </p:spPr>
-        <p:txBody>
-          <a:bodyPr wrap="square" lIns="0" tIns="0" rIns="0" bIns="0" rtlCol="0" anchor="ctr"/>
-          <a:lstStyle/>
-          <a:p>
-            <a:pPr algn="r" indent="0" marL="0">
-              <a:buNone/>
-            </a:pPr>
-            <a:r>
-              <a:rPr lang="en-US" sz="900" dirty="0">
-                <a:solidFill>
-                  <a:srgbClr val="5D5D72"/>
-                </a:solidFill>
-                <a:latin typeface="Calibri" pitchFamily="34" charset="0"/>
-                <a:ea typeface="Calibri" pitchFamily="34" charset="-122"/>
-                <a:cs typeface="Calibri" pitchFamily="34" charset="-120"/>
-              </a:rPr>
-              <a:t>22</a:t>
-            </a:r>
-            <a:endParaRPr lang="en-US" sz="900" dirty="0"/>
+        </p:spPr>
+        <p:txBody>
+          <a:bodyPr wrap="none" lIns="0" rIns="0" tIns="0" bIns="0">
+            <a:spAutoFit/>
+          </a:bodyPr>
+          <a:lstStyle/>
+          <a:p>
+            <a:pPr algn="r"/>
+            <a:r>
+              <a:rPr sz="1000">
+                <a:solidFill>
+                  <a:srgbClr val="8A939B"/>
+                </a:solidFill>
+                <a:hlinkClick r:id="rId3"/>
+              </a:rPr>
+              <a:t>cuinotes.com</a:t>
+            </a:r>
+            <a:r>
+              <a:rPr sz="1000">
+                <a:solidFill>
+                  <a:srgbClr val="8A939B"/>
+                </a:solidFill>
+              </a:rPr>
+              <a:t>  ·  22</a:t>
+            </a:r>
           </a:p>
         </p:txBody>
       </p:sp>
@@ -8626,6 +9133,10 @@
             </a:outerShdw>
           </a:effectLst>
         </p:spPr>
+        <p:txBody>
+          <a:bodyPr/>
+          <a:p/>
+        </p:txBody>
       </p:sp>
       <p:pic>
         <p:nvPicPr>
@@ -8653,79 +9164,44 @@
       </p:pic>
       <p:sp>
         <p:nvSpPr>
-          <p:cNvPr id="6" name="Text 3"/>
+          <p:cNvPr id="8" name="cuinotes-footer-mark"/>
           <p:cNvSpPr txBox="1"/>
           <p:nvPr/>
         </p:nvSpPr>
         <p:spPr>
           <a:xfrm>
-            <a:off x="640080" y="6446520"/>
-            <a:ext cx="8686800" cy="292608"/>
+            <a:off x="9951720" y="6455664"/>
+            <a:ext cx="2011680" cy="292608"/>
           </a:xfrm>
           <a:prstGeom prst="rect">
             <a:avLst/>
           </a:prstGeom>
           <a:noFill/>
-          <a:ln/>
-        </p:spPr>
-        <p:txBody>
-          <a:bodyPr wrap="square" lIns="0" tIns="0" rIns="0" bIns="0" rtlCol="0" anchor="ctr"/>
-          <a:lstStyle/>
-          <a:p>
-            <a:pPr algn="l" indent="0" marL="0">
-              <a:buNone/>
-            </a:pPr>
-            <a:r>
-              <a:rPr lang="en-US" sz="900" dirty="0">
-                <a:solidFill>
-                  <a:srgbClr val="5D5D72"/>
-                </a:solidFill>
-                <a:latin typeface="Calibri" pitchFamily="34" charset="0"/>
-                <a:ea typeface="Calibri" pitchFamily="34" charset="-122"/>
-                <a:cs typeface="Calibri" pitchFamily="34" charset="-120"/>
-              </a:rPr>
-              <a:t>Usman Akram  •  COMSATS University Islamabad</a:t>
-            </a:r>
-            <a:endParaRPr lang="en-US" sz="900" dirty="0"/>
-          </a:p>
-        </p:txBody>
-      </p:sp>
-      <p:sp>
-        <p:nvSpPr>
-          <p:cNvPr id="7" name="Text 4"/>
-          <p:cNvSpPr txBox="1"/>
-          <p:nvPr/>
-        </p:nvSpPr>
-        <p:spPr>
-          <a:xfrm>
-            <a:off x="11155680" y="6446520"/>
-            <a:ext cx="457200" cy="292608"/>
-          </a:xfrm>
-          <a:prstGeom prst="rect">
-            <a:avLst/>
-          </a:prstGeom>
-          <a:noFill/>
-          <a:ln/>
-        </p:spPr>
-        <p:txBody>
-          <a:bodyPr wrap="square" lIns="0" tIns="0" rIns="0" bIns="0" rtlCol="0" anchor="ctr"/>
-          <a:lstStyle/>
-          <a:p>
-            <a:pPr algn="r" indent="0" marL="0">
-              <a:buNone/>
-            </a:pPr>
-            <a:r>
-              <a:rPr lang="en-US" sz="900" dirty="0">
-                <a:solidFill>
-                  <a:srgbClr val="5D5D72"/>
-                </a:solidFill>
-                <a:latin typeface="Calibri" pitchFamily="34" charset="0"/>
-                <a:ea typeface="Calibri" pitchFamily="34" charset="-122"/>
-                <a:cs typeface="Calibri" pitchFamily="34" charset="-120"/>
-              </a:rPr>
-              <a:t>23</a:t>
-            </a:r>
-            <a:endParaRPr lang="en-US" sz="900" dirty="0"/>
+        </p:spPr>
+        <p:txBody>
+          <a:bodyPr wrap="none" lIns="0" rIns="0" tIns="0" bIns="0">
+            <a:spAutoFit/>
+          </a:bodyPr>
+          <a:lstStyle/>
+          <a:p>
+            <a:pPr algn="r"/>
+            <a:r>
+              <a:rPr sz="1000">
+                <a:solidFill>
+                  <a:srgbClr val="8A939B"/>
+                </a:solidFill>
+                <a:hlinkClick r:id="rId4"/>
+              </a:rPr>
+              <a:t>cuinotes.com</a:t>
+            </a:r>
+            <a:r>
+              <a:rPr sz="1000">
+                <a:solidFill>
+                  <a:srgbClr val="8A939B"/>
+                </a:solidFill>
+              </a:rPr>
+              <a:t>  ·  23</a:t>
+            </a:r>
           </a:p>
         </p:txBody>
       </p:sp>
@@ -8860,6 +9336,10 @@
           </a:solidFill>
           <a:ln/>
         </p:spPr>
+        <p:txBody>
+          <a:bodyPr/>
+          <a:p/>
+        </p:txBody>
       </p:sp>
       <p:sp>
         <p:nvSpPr>
@@ -8964,79 +9444,44 @@
       </p:sp>
       <p:sp>
         <p:nvSpPr>
-          <p:cNvPr id="7" name="Text 5"/>
+          <p:cNvPr id="9" name="cuinotes-footer-mark"/>
           <p:cNvSpPr txBox="1"/>
           <p:nvPr/>
         </p:nvSpPr>
         <p:spPr>
           <a:xfrm>
-            <a:off x="640080" y="6446520"/>
-            <a:ext cx="8686800" cy="292608"/>
+            <a:off x="9951720" y="6455664"/>
+            <a:ext cx="2011680" cy="292608"/>
           </a:xfrm>
           <a:prstGeom prst="rect">
             <a:avLst/>
           </a:prstGeom>
           <a:noFill/>
-          <a:ln/>
-        </p:spPr>
-        <p:txBody>
-          <a:bodyPr wrap="square" lIns="0" tIns="0" rIns="0" bIns="0" rtlCol="0" anchor="ctr"/>
-          <a:lstStyle/>
-          <a:p>
-            <a:pPr algn="l" indent="0" marL="0">
-              <a:buNone/>
-            </a:pPr>
-            <a:r>
-              <a:rPr lang="en-US" sz="900" dirty="0">
-                <a:solidFill>
-                  <a:srgbClr val="5D5D72"/>
-                </a:solidFill>
-                <a:latin typeface="Calibri" pitchFamily="34" charset="0"/>
-                <a:ea typeface="Calibri" pitchFamily="34" charset="-122"/>
-                <a:cs typeface="Calibri" pitchFamily="34" charset="-120"/>
-              </a:rPr>
-              <a:t>Usman Akram  •  COMSATS University Islamabad</a:t>
-            </a:r>
-            <a:endParaRPr lang="en-US" sz="900" dirty="0"/>
-          </a:p>
-        </p:txBody>
-      </p:sp>
-      <p:sp>
-        <p:nvSpPr>
-          <p:cNvPr id="8" name="Text 6"/>
-          <p:cNvSpPr txBox="1"/>
-          <p:nvPr/>
-        </p:nvSpPr>
-        <p:spPr>
-          <a:xfrm>
-            <a:off x="11155680" y="6446520"/>
-            <a:ext cx="457200" cy="292608"/>
-          </a:xfrm>
-          <a:prstGeom prst="rect">
-            <a:avLst/>
-          </a:prstGeom>
-          <a:noFill/>
-          <a:ln/>
-        </p:spPr>
-        <p:txBody>
-          <a:bodyPr wrap="square" lIns="0" tIns="0" rIns="0" bIns="0" rtlCol="0" anchor="ctr"/>
-          <a:lstStyle/>
-          <a:p>
-            <a:pPr algn="r" indent="0" marL="0">
-              <a:buNone/>
-            </a:pPr>
-            <a:r>
-              <a:rPr lang="en-US" sz="900" dirty="0">
-                <a:solidFill>
-                  <a:srgbClr val="5D5D72"/>
-                </a:solidFill>
-                <a:latin typeface="Calibri" pitchFamily="34" charset="0"/>
-                <a:ea typeface="Calibri" pitchFamily="34" charset="-122"/>
-                <a:cs typeface="Calibri" pitchFamily="34" charset="-120"/>
-              </a:rPr>
-              <a:t>24</a:t>
-            </a:r>
-            <a:endParaRPr lang="en-US" sz="900" dirty="0"/>
+        </p:spPr>
+        <p:txBody>
+          <a:bodyPr wrap="none" lIns="0" rIns="0" tIns="0" bIns="0">
+            <a:spAutoFit/>
+          </a:bodyPr>
+          <a:lstStyle/>
+          <a:p>
+            <a:pPr algn="r"/>
+            <a:r>
+              <a:rPr sz="1000">
+                <a:solidFill>
+                  <a:srgbClr val="8A939B"/>
+                </a:solidFill>
+                <a:hlinkClick r:id="rId3"/>
+              </a:rPr>
+              <a:t>cuinotes.com</a:t>
+            </a:r>
+            <a:r>
+              <a:rPr sz="1000">
+                <a:solidFill>
+                  <a:srgbClr val="8A939B"/>
+                </a:solidFill>
+              </a:rPr>
+              <a:t>  ·  24</a:t>
+            </a:r>
           </a:p>
         </p:txBody>
       </p:sp>
@@ -9183,6 +9628,10 @@
             </a:outerShdw>
           </a:effectLst>
         </p:spPr>
+        <p:txBody>
+          <a:bodyPr/>
+          <a:p/>
+        </p:txBody>
       </p:sp>
       <p:pic>
         <p:nvPicPr>
@@ -9210,79 +9659,44 @@
       </p:pic>
       <p:sp>
         <p:nvSpPr>
-          <p:cNvPr id="6" name="Text 3"/>
+          <p:cNvPr id="8" name="cuinotes-footer-mark"/>
           <p:cNvSpPr txBox="1"/>
           <p:nvPr/>
         </p:nvSpPr>
         <p:spPr>
           <a:xfrm>
-            <a:off x="640080" y="6446520"/>
-            <a:ext cx="8686800" cy="292608"/>
+            <a:off x="9951720" y="6455664"/>
+            <a:ext cx="2011680" cy="292608"/>
           </a:xfrm>
           <a:prstGeom prst="rect">
             <a:avLst/>
           </a:prstGeom>
           <a:noFill/>
-          <a:ln/>
-        </p:spPr>
-        <p:txBody>
-          <a:bodyPr wrap="square" lIns="0" tIns="0" rIns="0" bIns="0" rtlCol="0" anchor="ctr"/>
-          <a:lstStyle/>
-          <a:p>
-            <a:pPr algn="l" indent="0" marL="0">
-              <a:buNone/>
-            </a:pPr>
-            <a:r>
-              <a:rPr lang="en-US" sz="900" dirty="0">
-                <a:solidFill>
-                  <a:srgbClr val="5D5D72"/>
-                </a:solidFill>
-                <a:latin typeface="Calibri" pitchFamily="34" charset="0"/>
-                <a:ea typeface="Calibri" pitchFamily="34" charset="-122"/>
-                <a:cs typeface="Calibri" pitchFamily="34" charset="-120"/>
-              </a:rPr>
-              <a:t>Usman Akram  •  COMSATS University Islamabad</a:t>
-            </a:r>
-            <a:endParaRPr lang="en-US" sz="900" dirty="0"/>
-          </a:p>
-        </p:txBody>
-      </p:sp>
-      <p:sp>
-        <p:nvSpPr>
-          <p:cNvPr id="7" name="Text 4"/>
-          <p:cNvSpPr txBox="1"/>
-          <p:nvPr/>
-        </p:nvSpPr>
-        <p:spPr>
-          <a:xfrm>
-            <a:off x="11155680" y="6446520"/>
-            <a:ext cx="457200" cy="292608"/>
-          </a:xfrm>
-          <a:prstGeom prst="rect">
-            <a:avLst/>
-          </a:prstGeom>
-          <a:noFill/>
-          <a:ln/>
-        </p:spPr>
-        <p:txBody>
-          <a:bodyPr wrap="square" lIns="0" tIns="0" rIns="0" bIns="0" rtlCol="0" anchor="ctr"/>
-          <a:lstStyle/>
-          <a:p>
-            <a:pPr algn="r" indent="0" marL="0">
-              <a:buNone/>
-            </a:pPr>
-            <a:r>
-              <a:rPr lang="en-US" sz="900" dirty="0">
-                <a:solidFill>
-                  <a:srgbClr val="5D5D72"/>
-                </a:solidFill>
-                <a:latin typeface="Calibri" pitchFamily="34" charset="0"/>
-                <a:ea typeface="Calibri" pitchFamily="34" charset="-122"/>
-                <a:cs typeface="Calibri" pitchFamily="34" charset="-120"/>
-              </a:rPr>
-              <a:t>25</a:t>
-            </a:r>
-            <a:endParaRPr lang="en-US" sz="900" dirty="0"/>
+        </p:spPr>
+        <p:txBody>
+          <a:bodyPr wrap="none" lIns="0" rIns="0" tIns="0" bIns="0">
+            <a:spAutoFit/>
+          </a:bodyPr>
+          <a:lstStyle/>
+          <a:p>
+            <a:pPr algn="r"/>
+            <a:r>
+              <a:rPr sz="1000">
+                <a:solidFill>
+                  <a:srgbClr val="8A939B"/>
+                </a:solidFill>
+                <a:hlinkClick r:id="rId4"/>
+              </a:rPr>
+              <a:t>cuinotes.com</a:t>
+            </a:r>
+            <a:r>
+              <a:rPr sz="1000">
+                <a:solidFill>
+                  <a:srgbClr val="8A939B"/>
+                </a:solidFill>
+              </a:rPr>
+              <a:t>  ·  25</a:t>
+            </a:r>
           </a:p>
         </p:txBody>
       </p:sp>
@@ -9417,6 +9831,10 @@
           </a:solidFill>
           <a:ln/>
         </p:spPr>
+        <p:txBody>
+          <a:bodyPr/>
+          <a:p/>
+        </p:txBody>
       </p:sp>
       <p:sp>
         <p:nvSpPr>
@@ -9561,79 +9979,44 @@
       </p:sp>
       <p:sp>
         <p:nvSpPr>
-          <p:cNvPr id="7" name="Text 5"/>
+          <p:cNvPr id="9" name="cuinotes-footer-mark"/>
           <p:cNvSpPr txBox="1"/>
           <p:nvPr/>
         </p:nvSpPr>
         <p:spPr>
           <a:xfrm>
-            <a:off x="640080" y="6446520"/>
-            <a:ext cx="8686800" cy="292608"/>
+            <a:off x="9951720" y="6455664"/>
+            <a:ext cx="2011680" cy="292608"/>
           </a:xfrm>
           <a:prstGeom prst="rect">
             <a:avLst/>
           </a:prstGeom>
           <a:noFill/>
-          <a:ln/>
-        </p:spPr>
-        <p:txBody>
-          <a:bodyPr wrap="square" lIns="0" tIns="0" rIns="0" bIns="0" rtlCol="0" anchor="ctr"/>
-          <a:lstStyle/>
-          <a:p>
-            <a:pPr algn="l" indent="0" marL="0">
-              <a:buNone/>
-            </a:pPr>
-            <a:r>
-              <a:rPr lang="en-US" sz="900" dirty="0">
-                <a:solidFill>
-                  <a:srgbClr val="5D5D72"/>
-                </a:solidFill>
-                <a:latin typeface="Calibri" pitchFamily="34" charset="0"/>
-                <a:ea typeface="Calibri" pitchFamily="34" charset="-122"/>
-                <a:cs typeface="Calibri" pitchFamily="34" charset="-120"/>
-              </a:rPr>
-              <a:t>Usman Akram  •  COMSATS University Islamabad</a:t>
-            </a:r>
-            <a:endParaRPr lang="en-US" sz="900" dirty="0"/>
-          </a:p>
-        </p:txBody>
-      </p:sp>
-      <p:sp>
-        <p:nvSpPr>
-          <p:cNvPr id="8" name="Text 6"/>
-          <p:cNvSpPr txBox="1"/>
-          <p:nvPr/>
-        </p:nvSpPr>
-        <p:spPr>
-          <a:xfrm>
-            <a:off x="11155680" y="6446520"/>
-            <a:ext cx="457200" cy="292608"/>
-          </a:xfrm>
-          <a:prstGeom prst="rect">
-            <a:avLst/>
-          </a:prstGeom>
-          <a:noFill/>
-          <a:ln/>
-        </p:spPr>
-        <p:txBody>
-          <a:bodyPr wrap="square" lIns="0" tIns="0" rIns="0" bIns="0" rtlCol="0" anchor="ctr"/>
-          <a:lstStyle/>
-          <a:p>
-            <a:pPr algn="r" indent="0" marL="0">
-              <a:buNone/>
-            </a:pPr>
-            <a:r>
-              <a:rPr lang="en-US" sz="900" dirty="0">
-                <a:solidFill>
-                  <a:srgbClr val="5D5D72"/>
-                </a:solidFill>
-                <a:latin typeface="Calibri" pitchFamily="34" charset="0"/>
-                <a:ea typeface="Calibri" pitchFamily="34" charset="-122"/>
-                <a:cs typeface="Calibri" pitchFamily="34" charset="-120"/>
-              </a:rPr>
-              <a:t>26</a:t>
-            </a:r>
-            <a:endParaRPr lang="en-US" sz="900" dirty="0"/>
+        </p:spPr>
+        <p:txBody>
+          <a:bodyPr wrap="none" lIns="0" rIns="0" tIns="0" bIns="0">
+            <a:spAutoFit/>
+          </a:bodyPr>
+          <a:lstStyle/>
+          <a:p>
+            <a:pPr algn="r"/>
+            <a:r>
+              <a:rPr sz="1000">
+                <a:solidFill>
+                  <a:srgbClr val="8A939B"/>
+                </a:solidFill>
+                <a:hlinkClick r:id="rId3"/>
+              </a:rPr>
+              <a:t>cuinotes.com</a:t>
+            </a:r>
+            <a:r>
+              <a:rPr sz="1000">
+                <a:solidFill>
+                  <a:srgbClr val="8A939B"/>
+                </a:solidFill>
+              </a:rPr>
+              <a:t>  ·  26</a:t>
+            </a:r>
           </a:p>
         </p:txBody>
       </p:sp>
@@ -9780,6 +10163,10 @@
             </a:outerShdw>
           </a:effectLst>
         </p:spPr>
+        <p:txBody>
+          <a:bodyPr/>
+          <a:p/>
+        </p:txBody>
       </p:sp>
       <p:pic>
         <p:nvPicPr>
@@ -9807,79 +10194,44 @@
       </p:pic>
       <p:sp>
         <p:nvSpPr>
-          <p:cNvPr id="6" name="Text 3"/>
+          <p:cNvPr id="8" name="cuinotes-footer-mark"/>
           <p:cNvSpPr txBox="1"/>
           <p:nvPr/>
         </p:nvSpPr>
         <p:spPr>
           <a:xfrm>
-            <a:off x="640080" y="6446520"/>
-            <a:ext cx="8686800" cy="292608"/>
+            <a:off x="9951720" y="6455664"/>
+            <a:ext cx="2011680" cy="292608"/>
           </a:xfrm>
           <a:prstGeom prst="rect">
             <a:avLst/>
           </a:prstGeom>
           <a:noFill/>
-          <a:ln/>
-        </p:spPr>
-        <p:txBody>
-          <a:bodyPr wrap="square" lIns="0" tIns="0" rIns="0" bIns="0" rtlCol="0" anchor="ctr"/>
-          <a:lstStyle/>
-          <a:p>
-            <a:pPr algn="l" indent="0" marL="0">
-              <a:buNone/>
-            </a:pPr>
-            <a:r>
-              <a:rPr lang="en-US" sz="900" dirty="0">
-                <a:solidFill>
-                  <a:srgbClr val="5D5D72"/>
-                </a:solidFill>
-                <a:latin typeface="Calibri" pitchFamily="34" charset="0"/>
-                <a:ea typeface="Calibri" pitchFamily="34" charset="-122"/>
-                <a:cs typeface="Calibri" pitchFamily="34" charset="-120"/>
-              </a:rPr>
-              <a:t>Usman Akram  •  COMSATS University Islamabad</a:t>
-            </a:r>
-            <a:endParaRPr lang="en-US" sz="900" dirty="0"/>
-          </a:p>
-        </p:txBody>
-      </p:sp>
-      <p:sp>
-        <p:nvSpPr>
-          <p:cNvPr id="7" name="Text 4"/>
-          <p:cNvSpPr txBox="1"/>
-          <p:nvPr/>
-        </p:nvSpPr>
-        <p:spPr>
-          <a:xfrm>
-            <a:off x="11155680" y="6446520"/>
-            <a:ext cx="457200" cy="292608"/>
-          </a:xfrm>
-          <a:prstGeom prst="rect">
-            <a:avLst/>
-          </a:prstGeom>
-          <a:noFill/>
-          <a:ln/>
-        </p:spPr>
-        <p:txBody>
-          <a:bodyPr wrap="square" lIns="0" tIns="0" rIns="0" bIns="0" rtlCol="0" anchor="ctr"/>
-          <a:lstStyle/>
-          <a:p>
-            <a:pPr algn="r" indent="0" marL="0">
-              <a:buNone/>
-            </a:pPr>
-            <a:r>
-              <a:rPr lang="en-US" sz="900" dirty="0">
-                <a:solidFill>
-                  <a:srgbClr val="5D5D72"/>
-                </a:solidFill>
-                <a:latin typeface="Calibri" pitchFamily="34" charset="0"/>
-                <a:ea typeface="Calibri" pitchFamily="34" charset="-122"/>
-                <a:cs typeface="Calibri" pitchFamily="34" charset="-120"/>
-              </a:rPr>
-              <a:t>27</a:t>
-            </a:r>
-            <a:endParaRPr lang="en-US" sz="900" dirty="0"/>
+        </p:spPr>
+        <p:txBody>
+          <a:bodyPr wrap="none" lIns="0" rIns="0" tIns="0" bIns="0">
+            <a:spAutoFit/>
+          </a:bodyPr>
+          <a:lstStyle/>
+          <a:p>
+            <a:pPr algn="r"/>
+            <a:r>
+              <a:rPr sz="1000">
+                <a:solidFill>
+                  <a:srgbClr val="8A939B"/>
+                </a:solidFill>
+                <a:hlinkClick r:id="rId4"/>
+              </a:rPr>
+              <a:t>cuinotes.com</a:t>
+            </a:r>
+            <a:r>
+              <a:rPr sz="1000">
+                <a:solidFill>
+                  <a:srgbClr val="8A939B"/>
+                </a:solidFill>
+              </a:rPr>
+              <a:t>  ·  27</a:t>
+            </a:r>
           </a:p>
         </p:txBody>
       </p:sp>
@@ -10014,6 +10366,10 @@
           </a:solidFill>
           <a:ln/>
         </p:spPr>
+        <p:txBody>
+          <a:bodyPr/>
+          <a:p/>
+        </p:txBody>
       </p:sp>
       <p:sp>
         <p:nvSpPr>
@@ -10218,79 +10574,44 @@
       </p:sp>
       <p:sp>
         <p:nvSpPr>
-          <p:cNvPr id="7" name="Text 5"/>
+          <p:cNvPr id="9" name="cuinotes-footer-mark"/>
           <p:cNvSpPr txBox="1"/>
           <p:nvPr/>
         </p:nvSpPr>
         <p:spPr>
           <a:xfrm>
-            <a:off x="640080" y="6446520"/>
-            <a:ext cx="8686800" cy="292608"/>
+            <a:off x="9951720" y="6455664"/>
+            <a:ext cx="2011680" cy="292608"/>
           </a:xfrm>
           <a:prstGeom prst="rect">
             <a:avLst/>
           </a:prstGeom>
           <a:noFill/>
-          <a:ln/>
-        </p:spPr>
-        <p:txBody>
-          <a:bodyPr wrap="square" lIns="0" tIns="0" rIns="0" bIns="0" rtlCol="0" anchor="ctr"/>
-          <a:lstStyle/>
-          <a:p>
-            <a:pPr algn="l" indent="0" marL="0">
-              <a:buNone/>
-            </a:pPr>
-            <a:r>
-              <a:rPr lang="en-US" sz="900" dirty="0">
-                <a:solidFill>
-                  <a:srgbClr val="5D5D72"/>
-                </a:solidFill>
-                <a:latin typeface="Calibri" pitchFamily="34" charset="0"/>
-                <a:ea typeface="Calibri" pitchFamily="34" charset="-122"/>
-                <a:cs typeface="Calibri" pitchFamily="34" charset="-120"/>
-              </a:rPr>
-              <a:t>Usman Akram  •  COMSATS University Islamabad</a:t>
-            </a:r>
-            <a:endParaRPr lang="en-US" sz="900" dirty="0"/>
-          </a:p>
-        </p:txBody>
-      </p:sp>
-      <p:sp>
-        <p:nvSpPr>
-          <p:cNvPr id="8" name="Text 6"/>
-          <p:cNvSpPr txBox="1"/>
-          <p:nvPr/>
-        </p:nvSpPr>
-        <p:spPr>
-          <a:xfrm>
-            <a:off x="11155680" y="6446520"/>
-            <a:ext cx="457200" cy="292608"/>
-          </a:xfrm>
-          <a:prstGeom prst="rect">
-            <a:avLst/>
-          </a:prstGeom>
-          <a:noFill/>
-          <a:ln/>
-        </p:spPr>
-        <p:txBody>
-          <a:bodyPr wrap="square" lIns="0" tIns="0" rIns="0" bIns="0" rtlCol="0" anchor="ctr"/>
-          <a:lstStyle/>
-          <a:p>
-            <a:pPr algn="r" indent="0" marL="0">
-              <a:buNone/>
-            </a:pPr>
-            <a:r>
-              <a:rPr lang="en-US" sz="900" dirty="0">
-                <a:solidFill>
-                  <a:srgbClr val="5D5D72"/>
-                </a:solidFill>
-                <a:latin typeface="Calibri" pitchFamily="34" charset="0"/>
-                <a:ea typeface="Calibri" pitchFamily="34" charset="-122"/>
-                <a:cs typeface="Calibri" pitchFamily="34" charset="-120"/>
-              </a:rPr>
-              <a:t>28</a:t>
-            </a:r>
-            <a:endParaRPr lang="en-US" sz="900" dirty="0"/>
+        </p:spPr>
+        <p:txBody>
+          <a:bodyPr wrap="none" lIns="0" rIns="0" tIns="0" bIns="0">
+            <a:spAutoFit/>
+          </a:bodyPr>
+          <a:lstStyle/>
+          <a:p>
+            <a:pPr algn="r"/>
+            <a:r>
+              <a:rPr sz="1000">
+                <a:solidFill>
+                  <a:srgbClr val="8A939B"/>
+                </a:solidFill>
+                <a:hlinkClick r:id="rId3"/>
+              </a:rPr>
+              <a:t>cuinotes.com</a:t>
+            </a:r>
+            <a:r>
+              <a:rPr sz="1000">
+                <a:solidFill>
+                  <a:srgbClr val="8A939B"/>
+                </a:solidFill>
+              </a:rPr>
+              <a:t>  ·  28</a:t>
+            </a:r>
           </a:p>
         </p:txBody>
       </p:sp>
@@ -10437,6 +10758,10 @@
             </a:outerShdw>
           </a:effectLst>
         </p:spPr>
+        <p:txBody>
+          <a:bodyPr/>
+          <a:p/>
+        </p:txBody>
       </p:sp>
       <p:pic>
         <p:nvPicPr>
@@ -10464,79 +10789,44 @@
       </p:pic>
       <p:sp>
         <p:nvSpPr>
-          <p:cNvPr id="6" name="Text 3"/>
+          <p:cNvPr id="8" name="cuinotes-footer-mark"/>
           <p:cNvSpPr txBox="1"/>
           <p:nvPr/>
         </p:nvSpPr>
         <p:spPr>
           <a:xfrm>
-            <a:off x="640080" y="6446520"/>
-            <a:ext cx="8686800" cy="292608"/>
+            <a:off x="9951720" y="6455664"/>
+            <a:ext cx="2011680" cy="292608"/>
           </a:xfrm>
           <a:prstGeom prst="rect">
             <a:avLst/>
           </a:prstGeom>
           <a:noFill/>
-          <a:ln/>
-        </p:spPr>
-        <p:txBody>
-          <a:bodyPr wrap="square" lIns="0" tIns="0" rIns="0" bIns="0" rtlCol="0" anchor="ctr"/>
-          <a:lstStyle/>
-          <a:p>
-            <a:pPr algn="l" indent="0" marL="0">
-              <a:buNone/>
-            </a:pPr>
-            <a:r>
-              <a:rPr lang="en-US" sz="900" dirty="0">
-                <a:solidFill>
-                  <a:srgbClr val="5D5D72"/>
-                </a:solidFill>
-                <a:latin typeface="Calibri" pitchFamily="34" charset="0"/>
-                <a:ea typeface="Calibri" pitchFamily="34" charset="-122"/>
-                <a:cs typeface="Calibri" pitchFamily="34" charset="-120"/>
-              </a:rPr>
-              <a:t>Usman Akram  •  COMSATS University Islamabad</a:t>
-            </a:r>
-            <a:endParaRPr lang="en-US" sz="900" dirty="0"/>
-          </a:p>
-        </p:txBody>
-      </p:sp>
-      <p:sp>
-        <p:nvSpPr>
-          <p:cNvPr id="7" name="Text 4"/>
-          <p:cNvSpPr txBox="1"/>
-          <p:nvPr/>
-        </p:nvSpPr>
-        <p:spPr>
-          <a:xfrm>
-            <a:off x="11155680" y="6446520"/>
-            <a:ext cx="457200" cy="292608"/>
-          </a:xfrm>
-          <a:prstGeom prst="rect">
-            <a:avLst/>
-          </a:prstGeom>
-          <a:noFill/>
-          <a:ln/>
-        </p:spPr>
-        <p:txBody>
-          <a:bodyPr wrap="square" lIns="0" tIns="0" rIns="0" bIns="0" rtlCol="0" anchor="ctr"/>
-          <a:lstStyle/>
-          <a:p>
-            <a:pPr algn="r" indent="0" marL="0">
-              <a:buNone/>
-            </a:pPr>
-            <a:r>
-              <a:rPr lang="en-US" sz="900" dirty="0">
-                <a:solidFill>
-                  <a:srgbClr val="5D5D72"/>
-                </a:solidFill>
-                <a:latin typeface="Calibri" pitchFamily="34" charset="0"/>
-                <a:ea typeface="Calibri" pitchFamily="34" charset="-122"/>
-                <a:cs typeface="Calibri" pitchFamily="34" charset="-120"/>
-              </a:rPr>
-              <a:t>29</a:t>
-            </a:r>
-            <a:endParaRPr lang="en-US" sz="900" dirty="0"/>
+        </p:spPr>
+        <p:txBody>
+          <a:bodyPr wrap="none" lIns="0" rIns="0" tIns="0" bIns="0">
+            <a:spAutoFit/>
+          </a:bodyPr>
+          <a:lstStyle/>
+          <a:p>
+            <a:pPr algn="r"/>
+            <a:r>
+              <a:rPr sz="1000">
+                <a:solidFill>
+                  <a:srgbClr val="8A939B"/>
+                </a:solidFill>
+                <a:hlinkClick r:id="rId4"/>
+              </a:rPr>
+              <a:t>cuinotes.com</a:t>
+            </a:r>
+            <a:r>
+              <a:rPr sz="1000">
+                <a:solidFill>
+                  <a:srgbClr val="8A939B"/>
+                </a:solidFill>
+              </a:rPr>
+              <a:t>  ·  29</a:t>
+            </a:r>
           </a:p>
         </p:txBody>
       </p:sp>
@@ -10671,6 +10961,10 @@
           </a:solidFill>
           <a:ln/>
         </p:spPr>
+        <p:txBody>
+          <a:bodyPr/>
+          <a:p/>
+        </p:txBody>
       </p:sp>
       <p:sp>
         <p:nvSpPr>
@@ -10755,79 +11049,44 @@
       </p:sp>
       <p:sp>
         <p:nvSpPr>
-          <p:cNvPr id="7" name="Text 5"/>
+          <p:cNvPr id="9" name="cuinotes-footer-mark"/>
           <p:cNvSpPr txBox="1"/>
           <p:nvPr/>
         </p:nvSpPr>
         <p:spPr>
           <a:xfrm>
-            <a:off x="640080" y="6446520"/>
-            <a:ext cx="8686800" cy="292608"/>
+            <a:off x="9951720" y="6455664"/>
+            <a:ext cx="2011680" cy="292608"/>
           </a:xfrm>
           <a:prstGeom prst="rect">
             <a:avLst/>
           </a:prstGeom>
           <a:noFill/>
-          <a:ln/>
-        </p:spPr>
-        <p:txBody>
-          <a:bodyPr wrap="square" lIns="0" tIns="0" rIns="0" bIns="0" rtlCol="0" anchor="ctr"/>
-          <a:lstStyle/>
-          <a:p>
-            <a:pPr algn="l" indent="0" marL="0">
-              <a:buNone/>
-            </a:pPr>
-            <a:r>
-              <a:rPr lang="en-US" sz="900" dirty="0">
-                <a:solidFill>
-                  <a:srgbClr val="5D5D72"/>
-                </a:solidFill>
-                <a:latin typeface="Calibri" pitchFamily="34" charset="0"/>
-                <a:ea typeface="Calibri" pitchFamily="34" charset="-122"/>
-                <a:cs typeface="Calibri" pitchFamily="34" charset="-120"/>
-              </a:rPr>
-              <a:t>Usman Akram  •  COMSATS University Islamabad</a:t>
-            </a:r>
-            <a:endParaRPr lang="en-US" sz="900" dirty="0"/>
-          </a:p>
-        </p:txBody>
-      </p:sp>
-      <p:sp>
-        <p:nvSpPr>
-          <p:cNvPr id="8" name="Text 6"/>
-          <p:cNvSpPr txBox="1"/>
-          <p:nvPr/>
-        </p:nvSpPr>
-        <p:spPr>
-          <a:xfrm>
-            <a:off x="11155680" y="6446520"/>
-            <a:ext cx="457200" cy="292608"/>
-          </a:xfrm>
-          <a:prstGeom prst="rect">
-            <a:avLst/>
-          </a:prstGeom>
-          <a:noFill/>
-          <a:ln/>
-        </p:spPr>
-        <p:txBody>
-          <a:bodyPr wrap="square" lIns="0" tIns="0" rIns="0" bIns="0" rtlCol="0" anchor="ctr"/>
-          <a:lstStyle/>
-          <a:p>
-            <a:pPr algn="r" indent="0" marL="0">
-              <a:buNone/>
-            </a:pPr>
-            <a:r>
-              <a:rPr lang="en-US" sz="900" dirty="0">
-                <a:solidFill>
-                  <a:srgbClr val="5D5D72"/>
-                </a:solidFill>
-                <a:latin typeface="Calibri" pitchFamily="34" charset="0"/>
-                <a:ea typeface="Calibri" pitchFamily="34" charset="-122"/>
-                <a:cs typeface="Calibri" pitchFamily="34" charset="-120"/>
-              </a:rPr>
-              <a:t>3</a:t>
-            </a:r>
-            <a:endParaRPr lang="en-US" sz="900" dirty="0"/>
+        </p:spPr>
+        <p:txBody>
+          <a:bodyPr wrap="none" lIns="0" rIns="0" tIns="0" bIns="0">
+            <a:spAutoFit/>
+          </a:bodyPr>
+          <a:lstStyle/>
+          <a:p>
+            <a:pPr algn="r"/>
+            <a:r>
+              <a:rPr sz="1000">
+                <a:solidFill>
+                  <a:srgbClr val="8A939B"/>
+                </a:solidFill>
+                <a:hlinkClick r:id="rId3"/>
+              </a:rPr>
+              <a:t>cuinotes.com</a:t>
+            </a:r>
+            <a:r>
+              <a:rPr sz="1000">
+                <a:solidFill>
+                  <a:srgbClr val="8A939B"/>
+                </a:solidFill>
+              </a:rPr>
+              <a:t>  ·  3</a:t>
+            </a:r>
           </a:p>
         </p:txBody>
       </p:sp>
@@ -11787,79 +12046,44 @@
       </p:graphicFrame>
       <p:sp>
         <p:nvSpPr>
-          <p:cNvPr id="5" name="Text 2"/>
+          <p:cNvPr id="32" name="cuinotes-footer-mark"/>
           <p:cNvSpPr txBox="1"/>
           <p:nvPr/>
         </p:nvSpPr>
         <p:spPr>
           <a:xfrm>
-            <a:off x="640080" y="6446520"/>
-            <a:ext cx="8686800" cy="292608"/>
+            <a:off x="9951720" y="6455664"/>
+            <a:ext cx="2011680" cy="292608"/>
           </a:xfrm>
           <a:prstGeom prst="rect">
             <a:avLst/>
           </a:prstGeom>
           <a:noFill/>
-          <a:ln/>
-        </p:spPr>
-        <p:txBody>
-          <a:bodyPr wrap="square" lIns="0" tIns="0" rIns="0" bIns="0" rtlCol="0" anchor="ctr"/>
-          <a:lstStyle/>
-          <a:p>
-            <a:pPr algn="l" indent="0" marL="0">
-              <a:buNone/>
-            </a:pPr>
-            <a:r>
-              <a:rPr lang="en-US" sz="900" dirty="0">
-                <a:solidFill>
-                  <a:srgbClr val="5D5D72"/>
-                </a:solidFill>
-                <a:latin typeface="Calibri" pitchFamily="34" charset="0"/>
-                <a:ea typeface="Calibri" pitchFamily="34" charset="-122"/>
-                <a:cs typeface="Calibri" pitchFamily="34" charset="-120"/>
-              </a:rPr>
-              <a:t>Usman Akram  •  COMSATS University Islamabad</a:t>
-            </a:r>
-            <a:endParaRPr lang="en-US" sz="900" dirty="0"/>
-          </a:p>
-        </p:txBody>
-      </p:sp>
-      <p:sp>
-        <p:nvSpPr>
-          <p:cNvPr id="6" name="Text 3"/>
-          <p:cNvSpPr txBox="1"/>
-          <p:nvPr/>
-        </p:nvSpPr>
-        <p:spPr>
-          <a:xfrm>
-            <a:off x="11155680" y="6446520"/>
-            <a:ext cx="457200" cy="292608"/>
-          </a:xfrm>
-          <a:prstGeom prst="rect">
-            <a:avLst/>
-          </a:prstGeom>
-          <a:noFill/>
-          <a:ln/>
-        </p:spPr>
-        <p:txBody>
-          <a:bodyPr wrap="square" lIns="0" tIns="0" rIns="0" bIns="0" rtlCol="0" anchor="ctr"/>
-          <a:lstStyle/>
-          <a:p>
-            <a:pPr algn="r" indent="0" marL="0">
-              <a:buNone/>
-            </a:pPr>
-            <a:r>
-              <a:rPr lang="en-US" sz="900" dirty="0">
-                <a:solidFill>
-                  <a:srgbClr val="5D5D72"/>
-                </a:solidFill>
-                <a:latin typeface="Calibri" pitchFamily="34" charset="0"/>
-                <a:ea typeface="Calibri" pitchFamily="34" charset="-122"/>
-                <a:cs typeface="Calibri" pitchFamily="34" charset="-120"/>
-              </a:rPr>
-              <a:t>30</a:t>
-            </a:r>
-            <a:endParaRPr lang="en-US" sz="900" dirty="0"/>
+        </p:spPr>
+        <p:txBody>
+          <a:bodyPr wrap="none" lIns="0" rIns="0" tIns="0" bIns="0">
+            <a:spAutoFit/>
+          </a:bodyPr>
+          <a:lstStyle/>
+          <a:p>
+            <a:pPr algn="r"/>
+            <a:r>
+              <a:rPr sz="1000">
+                <a:solidFill>
+                  <a:srgbClr val="8A939B"/>
+                </a:solidFill>
+                <a:hlinkClick r:id="rId3"/>
+              </a:rPr>
+              <a:t>cuinotes.com</a:t>
+            </a:r>
+            <a:r>
+              <a:rPr sz="1000">
+                <a:solidFill>
+                  <a:srgbClr val="8A939B"/>
+                </a:solidFill>
+              </a:rPr>
+              <a:t>  ·  30</a:t>
+            </a:r>
           </a:p>
         </p:txBody>
       </p:sp>
@@ -11999,6 +12223,10 @@
             <a:prstDash val="solid"/>
           </a:ln>
         </p:spPr>
+        <p:txBody>
+          <a:bodyPr/>
+          <a:p/>
+        </p:txBody>
       </p:sp>
       <p:sp>
         <p:nvSpPr>
@@ -12080,79 +12308,44 @@
       </p:sp>
       <p:sp>
         <p:nvSpPr>
-          <p:cNvPr id="7" name="Text 5"/>
+          <p:cNvPr id="9" name="cuinotes-footer-mark"/>
           <p:cNvSpPr txBox="1"/>
           <p:nvPr/>
         </p:nvSpPr>
         <p:spPr>
           <a:xfrm>
-            <a:off x="640080" y="6446520"/>
-            <a:ext cx="8686800" cy="292608"/>
+            <a:off x="9951720" y="6455664"/>
+            <a:ext cx="2011680" cy="292608"/>
           </a:xfrm>
           <a:prstGeom prst="rect">
             <a:avLst/>
           </a:prstGeom>
           <a:noFill/>
-          <a:ln/>
-        </p:spPr>
-        <p:txBody>
-          <a:bodyPr wrap="square" lIns="0" tIns="0" rIns="0" bIns="0" rtlCol="0" anchor="ctr"/>
-          <a:lstStyle/>
-          <a:p>
-            <a:pPr algn="l" indent="0" marL="0">
-              <a:buNone/>
-            </a:pPr>
-            <a:r>
-              <a:rPr lang="en-US" sz="900" dirty="0">
-                <a:solidFill>
-                  <a:srgbClr val="5D5D72"/>
-                </a:solidFill>
-                <a:latin typeface="Calibri" pitchFamily="34" charset="0"/>
-                <a:ea typeface="Calibri" pitchFamily="34" charset="-122"/>
-                <a:cs typeface="Calibri" pitchFamily="34" charset="-120"/>
-              </a:rPr>
-              <a:t>Usman Akram  •  COMSATS University Islamabad</a:t>
-            </a:r>
-            <a:endParaRPr lang="en-US" sz="900" dirty="0"/>
-          </a:p>
-        </p:txBody>
-      </p:sp>
-      <p:sp>
-        <p:nvSpPr>
-          <p:cNvPr id="8" name="Text 6"/>
-          <p:cNvSpPr txBox="1"/>
-          <p:nvPr/>
-        </p:nvSpPr>
-        <p:spPr>
-          <a:xfrm>
-            <a:off x="11155680" y="6446520"/>
-            <a:ext cx="457200" cy="292608"/>
-          </a:xfrm>
-          <a:prstGeom prst="rect">
-            <a:avLst/>
-          </a:prstGeom>
-          <a:noFill/>
-          <a:ln/>
-        </p:spPr>
-        <p:txBody>
-          <a:bodyPr wrap="square" lIns="0" tIns="0" rIns="0" bIns="0" rtlCol="0" anchor="ctr"/>
-          <a:lstStyle/>
-          <a:p>
-            <a:pPr algn="r" indent="0" marL="0">
-              <a:buNone/>
-            </a:pPr>
-            <a:r>
-              <a:rPr lang="en-US" sz="900" dirty="0">
-                <a:solidFill>
-                  <a:srgbClr val="5D5D72"/>
-                </a:solidFill>
-                <a:latin typeface="Calibri" pitchFamily="34" charset="0"/>
-                <a:ea typeface="Calibri" pitchFamily="34" charset="-122"/>
-                <a:cs typeface="Calibri" pitchFamily="34" charset="-120"/>
-              </a:rPr>
-              <a:t>31</a:t>
-            </a:r>
-            <a:endParaRPr lang="en-US" sz="900" dirty="0"/>
+        </p:spPr>
+        <p:txBody>
+          <a:bodyPr wrap="none" lIns="0" rIns="0" tIns="0" bIns="0">
+            <a:spAutoFit/>
+          </a:bodyPr>
+          <a:lstStyle/>
+          <a:p>
+            <a:pPr algn="r"/>
+            <a:r>
+              <a:rPr sz="1000">
+                <a:solidFill>
+                  <a:srgbClr val="8A939B"/>
+                </a:solidFill>
+                <a:hlinkClick r:id="rId3"/>
+              </a:rPr>
+              <a:t>cuinotes.com</a:t>
+            </a:r>
+            <a:r>
+              <a:rPr sz="1000">
+                <a:solidFill>
+                  <a:srgbClr val="8A939B"/>
+                </a:solidFill>
+              </a:rPr>
+              <a:t>  ·  31</a:t>
+            </a:r>
           </a:p>
         </p:txBody>
       </p:sp>
@@ -12287,6 +12480,10 @@
           </a:solidFill>
           <a:ln/>
         </p:spPr>
+        <p:txBody>
+          <a:bodyPr/>
+          <a:p/>
+        </p:txBody>
       </p:sp>
       <p:sp>
         <p:nvSpPr>
@@ -12512,79 +12709,44 @@
       </p:sp>
       <p:sp>
         <p:nvSpPr>
-          <p:cNvPr id="6" name="Text 4"/>
+          <p:cNvPr id="8" name="cuinotes-footer-mark"/>
           <p:cNvSpPr txBox="1"/>
           <p:nvPr/>
         </p:nvSpPr>
         <p:spPr>
           <a:xfrm>
-            <a:off x="640080" y="6446520"/>
-            <a:ext cx="8686800" cy="292608"/>
+            <a:off x="9951720" y="6455664"/>
+            <a:ext cx="2011680" cy="292608"/>
           </a:xfrm>
           <a:prstGeom prst="rect">
             <a:avLst/>
           </a:prstGeom>
           <a:noFill/>
-          <a:ln/>
-        </p:spPr>
-        <p:txBody>
-          <a:bodyPr wrap="square" lIns="0" tIns="0" rIns="0" bIns="0" rtlCol="0" anchor="ctr"/>
-          <a:lstStyle/>
-          <a:p>
-            <a:pPr algn="l" indent="0" marL="0">
-              <a:buNone/>
-            </a:pPr>
-            <a:r>
-              <a:rPr lang="en-US" sz="900" dirty="0">
-                <a:solidFill>
-                  <a:srgbClr val="5D5D72"/>
-                </a:solidFill>
-                <a:latin typeface="Calibri" pitchFamily="34" charset="0"/>
-                <a:ea typeface="Calibri" pitchFamily="34" charset="-122"/>
-                <a:cs typeface="Calibri" pitchFamily="34" charset="-120"/>
-              </a:rPr>
-              <a:t>Usman Akram  •  COMSATS University Islamabad</a:t>
-            </a:r>
-            <a:endParaRPr lang="en-US" sz="900" dirty="0"/>
-          </a:p>
-        </p:txBody>
-      </p:sp>
-      <p:sp>
-        <p:nvSpPr>
-          <p:cNvPr id="7" name="Text 5"/>
-          <p:cNvSpPr txBox="1"/>
-          <p:nvPr/>
-        </p:nvSpPr>
-        <p:spPr>
-          <a:xfrm>
-            <a:off x="11155680" y="6446520"/>
-            <a:ext cx="457200" cy="292608"/>
-          </a:xfrm>
-          <a:prstGeom prst="rect">
-            <a:avLst/>
-          </a:prstGeom>
-          <a:noFill/>
-          <a:ln/>
-        </p:spPr>
-        <p:txBody>
-          <a:bodyPr wrap="square" lIns="0" tIns="0" rIns="0" bIns="0" rtlCol="0" anchor="ctr"/>
-          <a:lstStyle/>
-          <a:p>
-            <a:pPr algn="r" indent="0" marL="0">
-              <a:buNone/>
-            </a:pPr>
-            <a:r>
-              <a:rPr lang="en-US" sz="900" dirty="0">
-                <a:solidFill>
-                  <a:srgbClr val="5D5D72"/>
-                </a:solidFill>
-                <a:latin typeface="Calibri" pitchFamily="34" charset="0"/>
-                <a:ea typeface="Calibri" pitchFamily="34" charset="-122"/>
-                <a:cs typeface="Calibri" pitchFamily="34" charset="-120"/>
-              </a:rPr>
-              <a:t>32</a:t>
-            </a:r>
-            <a:endParaRPr lang="en-US" sz="900" dirty="0"/>
+        </p:spPr>
+        <p:txBody>
+          <a:bodyPr wrap="none" lIns="0" rIns="0" tIns="0" bIns="0">
+            <a:spAutoFit/>
+          </a:bodyPr>
+          <a:lstStyle/>
+          <a:p>
+            <a:pPr algn="r"/>
+            <a:r>
+              <a:rPr sz="1000">
+                <a:solidFill>
+                  <a:srgbClr val="8A939B"/>
+                </a:solidFill>
+                <a:hlinkClick r:id="rId3"/>
+              </a:rPr>
+              <a:t>cuinotes.com</a:t>
+            </a:r>
+            <a:r>
+              <a:rPr sz="1000">
+                <a:solidFill>
+                  <a:srgbClr val="8A939B"/>
+                </a:solidFill>
+              </a:rPr>
+              <a:t>  ·  32</a:t>
+            </a:r>
           </a:p>
         </p:txBody>
       </p:sp>
@@ -12731,6 +12893,10 @@
             </a:outerShdw>
           </a:effectLst>
         </p:spPr>
+        <p:txBody>
+          <a:bodyPr/>
+          <a:p/>
+        </p:txBody>
       </p:sp>
       <p:pic>
         <p:nvPicPr>
@@ -12758,79 +12924,44 @@
       </p:pic>
       <p:sp>
         <p:nvSpPr>
-          <p:cNvPr id="6" name="Text 3"/>
+          <p:cNvPr id="8" name="cuinotes-footer-mark"/>
           <p:cNvSpPr txBox="1"/>
           <p:nvPr/>
         </p:nvSpPr>
         <p:spPr>
           <a:xfrm>
-            <a:off x="640080" y="6446520"/>
-            <a:ext cx="8686800" cy="292608"/>
+            <a:off x="9951720" y="6455664"/>
+            <a:ext cx="2011680" cy="292608"/>
           </a:xfrm>
           <a:prstGeom prst="rect">
             <a:avLst/>
           </a:prstGeom>
           <a:noFill/>
-          <a:ln/>
-        </p:spPr>
-        <p:txBody>
-          <a:bodyPr wrap="square" lIns="0" tIns="0" rIns="0" bIns="0" rtlCol="0" anchor="ctr"/>
-          <a:lstStyle/>
-          <a:p>
-            <a:pPr algn="l" indent="0" marL="0">
-              <a:buNone/>
-            </a:pPr>
-            <a:r>
-              <a:rPr lang="en-US" sz="900" dirty="0">
-                <a:solidFill>
-                  <a:srgbClr val="5D5D72"/>
-                </a:solidFill>
-                <a:latin typeface="Calibri" pitchFamily="34" charset="0"/>
-                <a:ea typeface="Calibri" pitchFamily="34" charset="-122"/>
-                <a:cs typeface="Calibri" pitchFamily="34" charset="-120"/>
-              </a:rPr>
-              <a:t>Usman Akram  •  COMSATS University Islamabad</a:t>
-            </a:r>
-            <a:endParaRPr lang="en-US" sz="900" dirty="0"/>
-          </a:p>
-        </p:txBody>
-      </p:sp>
-      <p:sp>
-        <p:nvSpPr>
-          <p:cNvPr id="7" name="Text 4"/>
-          <p:cNvSpPr txBox="1"/>
-          <p:nvPr/>
-        </p:nvSpPr>
-        <p:spPr>
-          <a:xfrm>
-            <a:off x="11155680" y="6446520"/>
-            <a:ext cx="457200" cy="292608"/>
-          </a:xfrm>
-          <a:prstGeom prst="rect">
-            <a:avLst/>
-          </a:prstGeom>
-          <a:noFill/>
-          <a:ln/>
-        </p:spPr>
-        <p:txBody>
-          <a:bodyPr wrap="square" lIns="0" tIns="0" rIns="0" bIns="0" rtlCol="0" anchor="ctr"/>
-          <a:lstStyle/>
-          <a:p>
-            <a:pPr algn="r" indent="0" marL="0">
-              <a:buNone/>
-            </a:pPr>
-            <a:r>
-              <a:rPr lang="en-US" sz="900" dirty="0">
-                <a:solidFill>
-                  <a:srgbClr val="5D5D72"/>
-                </a:solidFill>
-                <a:latin typeface="Calibri" pitchFamily="34" charset="0"/>
-                <a:ea typeface="Calibri" pitchFamily="34" charset="-122"/>
-                <a:cs typeface="Calibri" pitchFamily="34" charset="-120"/>
-              </a:rPr>
-              <a:t>33</a:t>
-            </a:r>
-            <a:endParaRPr lang="en-US" sz="900" dirty="0"/>
+        </p:spPr>
+        <p:txBody>
+          <a:bodyPr wrap="none" lIns="0" rIns="0" tIns="0" bIns="0">
+            <a:spAutoFit/>
+          </a:bodyPr>
+          <a:lstStyle/>
+          <a:p>
+            <a:pPr algn="r"/>
+            <a:r>
+              <a:rPr sz="1000">
+                <a:solidFill>
+                  <a:srgbClr val="8A939B"/>
+                </a:solidFill>
+                <a:hlinkClick r:id="rId4"/>
+              </a:rPr>
+              <a:t>cuinotes.com</a:t>
+            </a:r>
+            <a:r>
+              <a:rPr sz="1000">
+                <a:solidFill>
+                  <a:srgbClr val="8A939B"/>
+                </a:solidFill>
+              </a:rPr>
+              <a:t>  ·  33</a:t>
+            </a:r>
           </a:p>
         </p:txBody>
       </p:sp>
@@ -12963,6 +13094,10 @@
           </a:solidFill>
           <a:ln/>
         </p:spPr>
+        <p:txBody>
+          <a:bodyPr/>
+          <a:p/>
+        </p:txBody>
       </p:sp>
       <p:sp>
         <p:nvSpPr>
@@ -13061,6 +13196,10 @@
           </a:solidFill>
           <a:ln/>
         </p:spPr>
+        <p:txBody>
+          <a:bodyPr/>
+          <a:p/>
+        </p:txBody>
       </p:sp>
       <p:sp>
         <p:nvSpPr>
@@ -13159,6 +13298,10 @@
           </a:solidFill>
           <a:ln/>
         </p:spPr>
+        <p:txBody>
+          <a:bodyPr/>
+          <a:p/>
+        </p:txBody>
       </p:sp>
       <p:sp>
         <p:nvSpPr>
@@ -13257,6 +13400,10 @@
           </a:solidFill>
           <a:ln/>
         </p:spPr>
+        <p:txBody>
+          <a:bodyPr/>
+          <a:p/>
+        </p:txBody>
       </p:sp>
       <p:sp>
         <p:nvSpPr>
@@ -13355,6 +13502,10 @@
           </a:solidFill>
           <a:ln/>
         </p:spPr>
+        <p:txBody>
+          <a:bodyPr/>
+          <a:p/>
+        </p:txBody>
       </p:sp>
       <p:sp>
         <p:nvSpPr>
@@ -13453,6 +13604,10 @@
           </a:solidFill>
           <a:ln/>
         </p:spPr>
+        <p:txBody>
+          <a:bodyPr/>
+          <a:p/>
+        </p:txBody>
       </p:sp>
       <p:sp>
         <p:nvSpPr>
@@ -13534,79 +13689,44 @@
       </p:sp>
       <p:sp>
         <p:nvSpPr>
-          <p:cNvPr id="22" name="Text 20"/>
+          <p:cNvPr id="24" name="cuinotes-footer-mark"/>
           <p:cNvSpPr txBox="1"/>
           <p:nvPr/>
         </p:nvSpPr>
         <p:spPr>
           <a:xfrm>
-            <a:off x="640080" y="6446520"/>
-            <a:ext cx="8686800" cy="292608"/>
+            <a:off x="9951720" y="6455664"/>
+            <a:ext cx="2011680" cy="292608"/>
           </a:xfrm>
           <a:prstGeom prst="rect">
             <a:avLst/>
           </a:prstGeom>
           <a:noFill/>
-          <a:ln/>
-        </p:spPr>
-        <p:txBody>
-          <a:bodyPr wrap="square" lIns="0" tIns="0" rIns="0" bIns="0" rtlCol="0" anchor="ctr"/>
-          <a:lstStyle/>
-          <a:p>
-            <a:pPr algn="l" indent="0" marL="0">
-              <a:buNone/>
-            </a:pPr>
-            <a:r>
-              <a:rPr lang="en-US" sz="900" dirty="0">
-                <a:solidFill>
-                  <a:srgbClr val="9AA3D8"/>
-                </a:solidFill>
-                <a:latin typeface="Calibri" pitchFamily="34" charset="0"/>
-                <a:ea typeface="Calibri" pitchFamily="34" charset="-122"/>
-                <a:cs typeface="Calibri" pitchFamily="34" charset="-120"/>
-              </a:rPr>
-              <a:t>Usman Akram  •  COMSATS University Islamabad</a:t>
-            </a:r>
-            <a:endParaRPr lang="en-US" sz="900" dirty="0"/>
-          </a:p>
-        </p:txBody>
-      </p:sp>
-      <p:sp>
-        <p:nvSpPr>
-          <p:cNvPr id="23" name="Text 21"/>
-          <p:cNvSpPr txBox="1"/>
-          <p:nvPr/>
-        </p:nvSpPr>
-        <p:spPr>
-          <a:xfrm>
-            <a:off x="11155680" y="6446520"/>
-            <a:ext cx="457200" cy="292608"/>
-          </a:xfrm>
-          <a:prstGeom prst="rect">
-            <a:avLst/>
-          </a:prstGeom>
-          <a:noFill/>
-          <a:ln/>
-        </p:spPr>
-        <p:txBody>
-          <a:bodyPr wrap="square" lIns="0" tIns="0" rIns="0" bIns="0" rtlCol="0" anchor="ctr"/>
-          <a:lstStyle/>
-          <a:p>
-            <a:pPr algn="r" indent="0" marL="0">
-              <a:buNone/>
-            </a:pPr>
-            <a:r>
-              <a:rPr lang="en-US" sz="900" dirty="0">
-                <a:solidFill>
-                  <a:srgbClr val="9AA3D8"/>
-                </a:solidFill>
-                <a:latin typeface="Calibri" pitchFamily="34" charset="0"/>
-                <a:ea typeface="Calibri" pitchFamily="34" charset="-122"/>
-                <a:cs typeface="Calibri" pitchFamily="34" charset="-120"/>
-              </a:rPr>
-              <a:t>34</a:t>
-            </a:r>
-            <a:endParaRPr lang="en-US" sz="900" dirty="0"/>
+        </p:spPr>
+        <p:txBody>
+          <a:bodyPr wrap="none" lIns="0" rIns="0" tIns="0" bIns="0">
+            <a:spAutoFit/>
+          </a:bodyPr>
+          <a:lstStyle/>
+          <a:p>
+            <a:pPr algn="r"/>
+            <a:r>
+              <a:rPr sz="1000">
+                <a:solidFill>
+                  <a:srgbClr val="8A939B"/>
+                </a:solidFill>
+                <a:hlinkClick r:id="rId3"/>
+              </a:rPr>
+              <a:t>cuinotes.com</a:t>
+            </a:r>
+            <a:r>
+              <a:rPr sz="1000">
+                <a:solidFill>
+                  <a:srgbClr val="8A939B"/>
+                </a:solidFill>
+              </a:rPr>
+              <a:t>  ·  34</a:t>
+            </a:r>
           </a:p>
         </p:txBody>
       </p:sp>
@@ -13753,6 +13873,10 @@
             </a:outerShdw>
           </a:effectLst>
         </p:spPr>
+        <p:txBody>
+          <a:bodyPr/>
+          <a:p/>
+        </p:txBody>
       </p:sp>
       <p:pic>
         <p:nvPicPr>
@@ -13780,79 +13904,44 @@
       </p:pic>
       <p:sp>
         <p:nvSpPr>
-          <p:cNvPr id="6" name="Text 3"/>
+          <p:cNvPr id="8" name="cuinotes-footer-mark"/>
           <p:cNvSpPr txBox="1"/>
           <p:nvPr/>
         </p:nvSpPr>
         <p:spPr>
           <a:xfrm>
-            <a:off x="640080" y="6446520"/>
-            <a:ext cx="8686800" cy="292608"/>
+            <a:off x="9951720" y="6455664"/>
+            <a:ext cx="2011680" cy="292608"/>
           </a:xfrm>
           <a:prstGeom prst="rect">
             <a:avLst/>
           </a:prstGeom>
           <a:noFill/>
-          <a:ln/>
-        </p:spPr>
-        <p:txBody>
-          <a:bodyPr wrap="square" lIns="0" tIns="0" rIns="0" bIns="0" rtlCol="0" anchor="ctr"/>
-          <a:lstStyle/>
-          <a:p>
-            <a:pPr algn="l" indent="0" marL="0">
-              <a:buNone/>
-            </a:pPr>
-            <a:r>
-              <a:rPr lang="en-US" sz="900" dirty="0">
-                <a:solidFill>
-                  <a:srgbClr val="5D5D72"/>
-                </a:solidFill>
-                <a:latin typeface="Calibri" pitchFamily="34" charset="0"/>
-                <a:ea typeface="Calibri" pitchFamily="34" charset="-122"/>
-                <a:cs typeface="Calibri" pitchFamily="34" charset="-120"/>
-              </a:rPr>
-              <a:t>Usman Akram  •  COMSATS University Islamabad</a:t>
-            </a:r>
-            <a:endParaRPr lang="en-US" sz="900" dirty="0"/>
-          </a:p>
-        </p:txBody>
-      </p:sp>
-      <p:sp>
-        <p:nvSpPr>
-          <p:cNvPr id="7" name="Text 4"/>
-          <p:cNvSpPr txBox="1"/>
-          <p:nvPr/>
-        </p:nvSpPr>
-        <p:spPr>
-          <a:xfrm>
-            <a:off x="11155680" y="6446520"/>
-            <a:ext cx="457200" cy="292608"/>
-          </a:xfrm>
-          <a:prstGeom prst="rect">
-            <a:avLst/>
-          </a:prstGeom>
-          <a:noFill/>
-          <a:ln/>
-        </p:spPr>
-        <p:txBody>
-          <a:bodyPr wrap="square" lIns="0" tIns="0" rIns="0" bIns="0" rtlCol="0" anchor="ctr"/>
-          <a:lstStyle/>
-          <a:p>
-            <a:pPr algn="r" indent="0" marL="0">
-              <a:buNone/>
-            </a:pPr>
-            <a:r>
-              <a:rPr lang="en-US" sz="900" dirty="0">
-                <a:solidFill>
-                  <a:srgbClr val="5D5D72"/>
-                </a:solidFill>
-                <a:latin typeface="Calibri" pitchFamily="34" charset="0"/>
-                <a:ea typeface="Calibri" pitchFamily="34" charset="-122"/>
-                <a:cs typeface="Calibri" pitchFamily="34" charset="-120"/>
-              </a:rPr>
-              <a:t>4</a:t>
-            </a:r>
-            <a:endParaRPr lang="en-US" sz="900" dirty="0"/>
+        </p:spPr>
+        <p:txBody>
+          <a:bodyPr wrap="none" lIns="0" rIns="0" tIns="0" bIns="0">
+            <a:spAutoFit/>
+          </a:bodyPr>
+          <a:lstStyle/>
+          <a:p>
+            <a:pPr algn="r"/>
+            <a:r>
+              <a:rPr sz="1000">
+                <a:solidFill>
+                  <a:srgbClr val="8A939B"/>
+                </a:solidFill>
+                <a:hlinkClick r:id="rId4"/>
+              </a:rPr>
+              <a:t>cuinotes.com</a:t>
+            </a:r>
+            <a:r>
+              <a:rPr sz="1000">
+                <a:solidFill>
+                  <a:srgbClr val="8A939B"/>
+                </a:solidFill>
+              </a:rPr>
+              <a:t>  ·  4</a:t>
+            </a:r>
           </a:p>
         </p:txBody>
       </p:sp>
@@ -14026,6 +14115,10 @@
           </a:solidFill>
           <a:ln/>
         </p:spPr>
+        <p:txBody>
+          <a:bodyPr/>
+          <a:p/>
+        </p:txBody>
       </p:sp>
       <p:sp>
         <p:nvSpPr>
@@ -14142,6 +14235,10 @@
             </a:outerShdw>
           </a:effectLst>
         </p:spPr>
+        <p:txBody>
+          <a:bodyPr/>
+          <a:p/>
+        </p:txBody>
       </p:sp>
       <p:pic>
         <p:nvPicPr>
@@ -14169,79 +14266,44 @@
       </p:pic>
       <p:sp>
         <p:nvSpPr>
-          <p:cNvPr id="9" name="Text 6"/>
+          <p:cNvPr id="11" name="cuinotes-footer-mark"/>
           <p:cNvSpPr txBox="1"/>
           <p:nvPr/>
         </p:nvSpPr>
         <p:spPr>
           <a:xfrm>
-            <a:off x="640080" y="6446520"/>
-            <a:ext cx="8686800" cy="292608"/>
+            <a:off x="9951720" y="6455664"/>
+            <a:ext cx="2011680" cy="292608"/>
           </a:xfrm>
           <a:prstGeom prst="rect">
             <a:avLst/>
           </a:prstGeom>
           <a:noFill/>
-          <a:ln/>
-        </p:spPr>
-        <p:txBody>
-          <a:bodyPr wrap="square" lIns="0" tIns="0" rIns="0" bIns="0" rtlCol="0" anchor="ctr"/>
-          <a:lstStyle/>
-          <a:p>
-            <a:pPr algn="l" indent="0" marL="0">
-              <a:buNone/>
-            </a:pPr>
-            <a:r>
-              <a:rPr lang="en-US" sz="900" dirty="0">
-                <a:solidFill>
-                  <a:srgbClr val="5D5D72"/>
-                </a:solidFill>
-                <a:latin typeface="Calibri" pitchFamily="34" charset="0"/>
-                <a:ea typeface="Calibri" pitchFamily="34" charset="-122"/>
-                <a:cs typeface="Calibri" pitchFamily="34" charset="-120"/>
-              </a:rPr>
-              <a:t>Usman Akram  •  COMSATS University Islamabad</a:t>
-            </a:r>
-            <a:endParaRPr lang="en-US" sz="900" dirty="0"/>
-          </a:p>
-        </p:txBody>
-      </p:sp>
-      <p:sp>
-        <p:nvSpPr>
-          <p:cNvPr id="10" name="Text 7"/>
-          <p:cNvSpPr txBox="1"/>
-          <p:nvPr/>
-        </p:nvSpPr>
-        <p:spPr>
-          <a:xfrm>
-            <a:off x="11155680" y="6446520"/>
-            <a:ext cx="457200" cy="292608"/>
-          </a:xfrm>
-          <a:prstGeom prst="rect">
-            <a:avLst/>
-          </a:prstGeom>
-          <a:noFill/>
-          <a:ln/>
-        </p:spPr>
-        <p:txBody>
-          <a:bodyPr wrap="square" lIns="0" tIns="0" rIns="0" bIns="0" rtlCol="0" anchor="ctr"/>
-          <a:lstStyle/>
-          <a:p>
-            <a:pPr algn="r" indent="0" marL="0">
-              <a:buNone/>
-            </a:pPr>
-            <a:r>
-              <a:rPr lang="en-US" sz="900" dirty="0">
-                <a:solidFill>
-                  <a:srgbClr val="5D5D72"/>
-                </a:solidFill>
-                <a:latin typeface="Calibri" pitchFamily="34" charset="0"/>
-                <a:ea typeface="Calibri" pitchFamily="34" charset="-122"/>
-                <a:cs typeface="Calibri" pitchFamily="34" charset="-120"/>
-              </a:rPr>
-              <a:t>5</a:t>
-            </a:r>
-            <a:endParaRPr lang="en-US" sz="900" dirty="0"/>
+        </p:spPr>
+        <p:txBody>
+          <a:bodyPr wrap="none" lIns="0" rIns="0" tIns="0" bIns="0">
+            <a:spAutoFit/>
+          </a:bodyPr>
+          <a:lstStyle/>
+          <a:p>
+            <a:pPr algn="r"/>
+            <a:r>
+              <a:rPr sz="1000">
+                <a:solidFill>
+                  <a:srgbClr val="8A939B"/>
+                </a:solidFill>
+                <a:hlinkClick r:id="rId4"/>
+              </a:rPr>
+              <a:t>cuinotes.com</a:t>
+            </a:r>
+            <a:r>
+              <a:rPr sz="1000">
+                <a:solidFill>
+                  <a:srgbClr val="8A939B"/>
+                </a:solidFill>
+              </a:rPr>
+              <a:t>  ·  5</a:t>
+            </a:r>
           </a:p>
         </p:txBody>
       </p:sp>
@@ -14376,6 +14438,10 @@
           </a:solidFill>
           <a:ln/>
         </p:spPr>
+        <p:txBody>
+          <a:bodyPr/>
+          <a:p/>
+        </p:txBody>
       </p:sp>
       <p:sp>
         <p:nvSpPr>
@@ -14421,79 +14487,44 @@
       </p:sp>
       <p:sp>
         <p:nvSpPr>
-          <p:cNvPr id="6" name="Text 4"/>
+          <p:cNvPr id="8" name="cuinotes-footer-mark"/>
           <p:cNvSpPr txBox="1"/>
           <p:nvPr/>
         </p:nvSpPr>
         <p:spPr>
           <a:xfrm>
-            <a:off x="640080" y="6446520"/>
-            <a:ext cx="8686800" cy="292608"/>
+            <a:off x="9951720" y="6455664"/>
+            <a:ext cx="2011680" cy="292608"/>
           </a:xfrm>
           <a:prstGeom prst="rect">
             <a:avLst/>
           </a:prstGeom>
           <a:noFill/>
-          <a:ln/>
-        </p:spPr>
-        <p:txBody>
-          <a:bodyPr wrap="square" lIns="0" tIns="0" rIns="0" bIns="0" rtlCol="0" anchor="ctr"/>
-          <a:lstStyle/>
-          <a:p>
-            <a:pPr algn="l" indent="0" marL="0">
-              <a:buNone/>
-            </a:pPr>
-            <a:r>
-              <a:rPr lang="en-US" sz="900" dirty="0">
-                <a:solidFill>
-                  <a:srgbClr val="5D5D72"/>
-                </a:solidFill>
-                <a:latin typeface="Calibri" pitchFamily="34" charset="0"/>
-                <a:ea typeface="Calibri" pitchFamily="34" charset="-122"/>
-                <a:cs typeface="Calibri" pitchFamily="34" charset="-120"/>
-              </a:rPr>
-              <a:t>Usman Akram  •  COMSATS University Islamabad</a:t>
-            </a:r>
-            <a:endParaRPr lang="en-US" sz="900" dirty="0"/>
-          </a:p>
-        </p:txBody>
-      </p:sp>
-      <p:sp>
-        <p:nvSpPr>
-          <p:cNvPr id="7" name="Text 5"/>
-          <p:cNvSpPr txBox="1"/>
-          <p:nvPr/>
-        </p:nvSpPr>
-        <p:spPr>
-          <a:xfrm>
-            <a:off x="11155680" y="6446520"/>
-            <a:ext cx="457200" cy="292608"/>
-          </a:xfrm>
-          <a:prstGeom prst="rect">
-            <a:avLst/>
-          </a:prstGeom>
-          <a:noFill/>
-          <a:ln/>
-        </p:spPr>
-        <p:txBody>
-          <a:bodyPr wrap="square" lIns="0" tIns="0" rIns="0" bIns="0" rtlCol="0" anchor="ctr"/>
-          <a:lstStyle/>
-          <a:p>
-            <a:pPr algn="r" indent="0" marL="0">
-              <a:buNone/>
-            </a:pPr>
-            <a:r>
-              <a:rPr lang="en-US" sz="900" dirty="0">
-                <a:solidFill>
-                  <a:srgbClr val="5D5D72"/>
-                </a:solidFill>
-                <a:latin typeface="Calibri" pitchFamily="34" charset="0"/>
-                <a:ea typeface="Calibri" pitchFamily="34" charset="-122"/>
-                <a:cs typeface="Calibri" pitchFamily="34" charset="-120"/>
-              </a:rPr>
-              <a:t>6</a:t>
-            </a:r>
-            <a:endParaRPr lang="en-US" sz="900" dirty="0"/>
+        </p:spPr>
+        <p:txBody>
+          <a:bodyPr wrap="none" lIns="0" rIns="0" tIns="0" bIns="0">
+            <a:spAutoFit/>
+          </a:bodyPr>
+          <a:lstStyle/>
+          <a:p>
+            <a:pPr algn="r"/>
+            <a:r>
+              <a:rPr sz="1000">
+                <a:solidFill>
+                  <a:srgbClr val="8A939B"/>
+                </a:solidFill>
+                <a:hlinkClick r:id="rId3"/>
+              </a:rPr>
+              <a:t>cuinotes.com</a:t>
+            </a:r>
+            <a:r>
+              <a:rPr sz="1000">
+                <a:solidFill>
+                  <a:srgbClr val="8A939B"/>
+                </a:solidFill>
+              </a:rPr>
+              <a:t>  ·  6</a:t>
+            </a:r>
           </a:p>
         </p:txBody>
       </p:sp>
@@ -14640,106 +14671,1035 @@
             </a:outerShdw>
           </a:effectLst>
         </p:spPr>
-      </p:sp>
-      <p:pic>
-        <p:nvPicPr>
-          <p:cNvPr id="5" name="Image 0" descr="D:/GitHub/mern-web-book/docs/assets/img/lecture-09/flex-direction-comparison.png">    </p:cNvPr>
-          <p:cNvPicPr>
-            <a:picLocks noChangeAspect="1"/>
-          </p:cNvPicPr>
-          <p:nvPr/>
-        </p:nvPicPr>
-        <p:blipFill>
-          <a:blip r:embed="rId1"/>
-          <a:stretch>
-            <a:fillRect/>
-          </a:stretch>
-        </p:blipFill>
-        <p:spPr>
-          <a:xfrm>
-            <a:off x="4931239" y="2057400"/>
-            <a:ext cx="2329218" cy="4114800"/>
-          </a:xfrm>
-          <a:prstGeom prst="rect">
-            <a:avLst/>
-          </a:prstGeom>
-        </p:spPr>
-      </p:pic>
-      <p:sp>
-        <p:nvSpPr>
-          <p:cNvPr id="6" name="Text 3"/>
+        <p:txBody>
+          <a:bodyPr/>
+          <a:p/>
+        </p:txBody>
+      </p:sp>
+      <p:sp>
+        <p:nvSpPr>
+          <p:cNvPr id="8" name="cuinotes-footer-mark"/>
           <p:cNvSpPr txBox="1"/>
           <p:nvPr/>
         </p:nvSpPr>
         <p:spPr>
           <a:xfrm>
-            <a:off x="640080" y="6446520"/>
-            <a:ext cx="8686800" cy="292608"/>
+            <a:off x="9951720" y="6455664"/>
+            <a:ext cx="2011680" cy="292608"/>
           </a:xfrm>
           <a:prstGeom prst="rect">
             <a:avLst/>
           </a:prstGeom>
           <a:noFill/>
-          <a:ln/>
-        </p:spPr>
-        <p:txBody>
-          <a:bodyPr wrap="square" lIns="0" tIns="0" rIns="0" bIns="0" rtlCol="0" anchor="ctr"/>
-          <a:lstStyle/>
-          <a:p>
-            <a:pPr algn="l" indent="0" marL="0">
-              <a:buNone/>
-            </a:pPr>
-            <a:r>
-              <a:rPr lang="en-US" sz="900" dirty="0">
-                <a:solidFill>
-                  <a:srgbClr val="5D5D72"/>
-                </a:solidFill>
-                <a:latin typeface="Calibri" pitchFamily="34" charset="0"/>
-                <a:ea typeface="Calibri" pitchFamily="34" charset="-122"/>
-                <a:cs typeface="Calibri" pitchFamily="34" charset="-120"/>
-              </a:rPr>
-              <a:t>Usman Akram  •  COMSATS University Islamabad</a:t>
-            </a:r>
-            <a:endParaRPr lang="en-US" sz="900" dirty="0"/>
-          </a:p>
-        </p:txBody>
-      </p:sp>
-      <p:sp>
-        <p:nvSpPr>
-          <p:cNvPr id="7" name="Text 4"/>
+        </p:spPr>
+        <p:txBody>
+          <a:bodyPr wrap="none" lIns="0" rIns="0" tIns="0" bIns="0">
+            <a:spAutoFit/>
+          </a:bodyPr>
+          <a:lstStyle/>
+          <a:p>
+            <a:pPr algn="r"/>
+            <a:r>
+              <a:rPr sz="1000">
+                <a:solidFill>
+                  <a:srgbClr val="8A939B"/>
+                </a:solidFill>
+                <a:hlinkClick r:id="rId4"/>
+              </a:rPr>
+              <a:t>cuinotes.com</a:t>
+            </a:r>
+            <a:r>
+              <a:rPr sz="1000">
+                <a:solidFill>
+                  <a:srgbClr val="8A939B"/>
+                </a:solidFill>
+              </a:rPr>
+              <a:t>  ·  7</a:t>
+            </a:r>
+          </a:p>
+        </p:txBody>
+      </p:sp>
+      <p:sp>
+        <p:nvSpPr>
+          <p:cNvPr id="9" name="TextBox 8"/>
           <p:cNvSpPr txBox="1"/>
           <p:nvPr/>
         </p:nvSpPr>
         <p:spPr>
           <a:xfrm>
-            <a:off x="11155680" y="6446520"/>
-            <a:ext cx="457200" cy="292608"/>
+            <a:off x="850392" y="2203704"/>
+            <a:ext cx="5084064" cy="256032"/>
           </a:xfrm>
           <a:prstGeom prst="rect">
             <a:avLst/>
           </a:prstGeom>
           <a:noFill/>
-          <a:ln/>
-        </p:spPr>
-        <p:txBody>
-          <a:bodyPr wrap="square" lIns="0" tIns="0" rIns="0" bIns="0" rtlCol="0" anchor="ctr"/>
-          <a:lstStyle/>
-          <a:p>
-            <a:pPr algn="r" indent="0" marL="0">
-              <a:buNone/>
-            </a:pPr>
-            <a:r>
-              <a:rPr lang="en-US" sz="900" dirty="0">
-                <a:solidFill>
-                  <a:srgbClr val="5D5D72"/>
-                </a:solidFill>
-                <a:latin typeface="Calibri" pitchFamily="34" charset="0"/>
-                <a:ea typeface="Calibri" pitchFamily="34" charset="-122"/>
-                <a:cs typeface="Calibri" pitchFamily="34" charset="-120"/>
-              </a:rPr>
-              <a:t>7</a:t>
-            </a:r>
-            <a:endParaRPr lang="en-US" sz="900" dirty="0"/>
+        </p:spPr>
+        <p:txBody>
+          <a:bodyPr wrap="none" lIns="0" tIns="0" bIns="0" rIns="0">
+            <a:spAutoFit/>
+          </a:bodyPr>
+          <a:lstStyle/>
+          <a:p>
+            <a:r>
+              <a:rPr sz="1100" b="1">
+                <a:solidFill>
+                  <a:srgbClr val="1F2429"/>
+                </a:solidFill>
+                <a:latin typeface="Calibri"/>
+              </a:rPr>
+              <a:t>flex-direction: row (default: left to right)</a:t>
+            </a:r>
+          </a:p>
+        </p:txBody>
+      </p:sp>
+      <p:sp>
+        <p:nvSpPr>
+          <p:cNvPr id="10" name="Rectangle 9"/>
+          <p:cNvSpPr/>
+          <p:nvPr/>
+        </p:nvSpPr>
+        <p:spPr>
+          <a:xfrm>
+            <a:off x="850392" y="2514600"/>
+            <a:ext cx="5084064" cy="1472184"/>
+          </a:xfrm>
+          <a:prstGeom prst="rect">
+            <a:avLst/>
+          </a:prstGeom>
+          <a:solidFill>
+            <a:srgbClr val="F7F8F9"/>
+          </a:solidFill>
+          <a:ln w="12700">
+            <a:solidFill>
+              <a:srgbClr val="B8C0C8"/>
+            </a:solidFill>
+            <a:prstDash val="dash"/>
+          </a:ln>
+          <a:effectLst/>
+        </p:spPr>
+        <p:style>
+          <a:lnRef idx="1">
+            <a:schemeClr val="accent1"/>
+          </a:lnRef>
+          <a:fillRef idx="3">
+            <a:schemeClr val="accent1"/>
+          </a:fillRef>
+          <a:effectRef idx="2">
+            <a:schemeClr val="accent1"/>
+          </a:effectRef>
+          <a:fontRef idx="minor">
+            <a:schemeClr val="lt1"/>
+          </a:fontRef>
+        </p:style>
+        <p:txBody>
+          <a:bodyPr rtlCol="0" anchor="ctr"/>
+          <a:lstStyle/>
+          <a:p>
+            <a:pPr algn="ctr"/>
+          </a:p>
+        </p:txBody>
+      </p:sp>
+      <p:sp>
+        <p:nvSpPr>
+          <p:cNvPr id="11" name="Rounded Rectangle 10"/>
+          <p:cNvSpPr/>
+          <p:nvPr/>
+        </p:nvSpPr>
+        <p:spPr>
+          <a:xfrm>
+            <a:off x="1014984" y="3022092"/>
+            <a:ext cx="1234440" cy="457200"/>
+          </a:xfrm>
+          <a:prstGeom prst="roundRect">
+            <a:avLst>
+              <a:gd name="adj" fmla="val 18000"/>
+            </a:avLst>
+          </a:prstGeom>
+          <a:solidFill>
+            <a:srgbClr val="4A90E2"/>
+          </a:solidFill>
+          <a:ln>
+            <a:noFill/>
+          </a:ln>
+          <a:effectLst/>
+        </p:spPr>
+        <p:style>
+          <a:lnRef idx="1">
+            <a:schemeClr val="accent1"/>
+          </a:lnRef>
+          <a:fillRef idx="3">
+            <a:schemeClr val="accent1"/>
+          </a:fillRef>
+          <a:effectRef idx="2">
+            <a:schemeClr val="accent1"/>
+          </a:effectRef>
+          <a:fontRef idx="minor">
+            <a:schemeClr val="lt1"/>
+          </a:fontRef>
+        </p:style>
+        <p:txBody>
+          <a:bodyPr rtlCol="0" anchor="ctr" lIns="0" rIns="0" tIns="0" bIns="0" wrap="none"/>
+          <a:lstStyle/>
+          <a:p>
+            <a:pPr algn="ctr"/>
+            <a:r>
+              <a:rPr sz="1000" b="1">
+                <a:solidFill>
+                  <a:srgbClr val="FFFFFF"/>
+                </a:solidFill>
+                <a:latin typeface="Calibri"/>
+              </a:rPr>
+              <a:t>item 1</a:t>
+            </a:r>
+          </a:p>
+        </p:txBody>
+      </p:sp>
+      <p:sp>
+        <p:nvSpPr>
+          <p:cNvPr id="12" name="Rounded Rectangle 11"/>
+          <p:cNvSpPr/>
+          <p:nvPr/>
+        </p:nvSpPr>
+        <p:spPr>
+          <a:xfrm>
+            <a:off x="2377440" y="3022092"/>
+            <a:ext cx="1234440" cy="457200"/>
+          </a:xfrm>
+          <a:prstGeom prst="roundRect">
+            <a:avLst>
+              <a:gd name="adj" fmla="val 18000"/>
+            </a:avLst>
+          </a:prstGeom>
+          <a:solidFill>
+            <a:srgbClr val="6FCF97"/>
+          </a:solidFill>
+          <a:ln>
+            <a:noFill/>
+          </a:ln>
+          <a:effectLst/>
+        </p:spPr>
+        <p:style>
+          <a:lnRef idx="1">
+            <a:schemeClr val="accent1"/>
+          </a:lnRef>
+          <a:fillRef idx="3">
+            <a:schemeClr val="accent1"/>
+          </a:fillRef>
+          <a:effectRef idx="2">
+            <a:schemeClr val="accent1"/>
+          </a:effectRef>
+          <a:fontRef idx="minor">
+            <a:schemeClr val="lt1"/>
+          </a:fontRef>
+        </p:style>
+        <p:txBody>
+          <a:bodyPr rtlCol="0" anchor="ctr" lIns="0" rIns="0" tIns="0" bIns="0" wrap="none"/>
+          <a:lstStyle/>
+          <a:p>
+            <a:pPr algn="ctr"/>
+            <a:r>
+              <a:rPr sz="1000" b="1">
+                <a:solidFill>
+                  <a:srgbClr val="FFFFFF"/>
+                </a:solidFill>
+                <a:latin typeface="Calibri"/>
+              </a:rPr>
+              <a:t>item 2</a:t>
+            </a:r>
+          </a:p>
+        </p:txBody>
+      </p:sp>
+      <p:sp>
+        <p:nvSpPr>
+          <p:cNvPr id="13" name="Rounded Rectangle 12"/>
+          <p:cNvSpPr/>
+          <p:nvPr/>
+        </p:nvSpPr>
+        <p:spPr>
+          <a:xfrm>
+            <a:off x="3739896" y="3022092"/>
+            <a:ext cx="1234440" cy="457200"/>
+          </a:xfrm>
+          <a:prstGeom prst="roundRect">
+            <a:avLst>
+              <a:gd name="adj" fmla="val 18000"/>
+            </a:avLst>
+          </a:prstGeom>
+          <a:solidFill>
+            <a:srgbClr val="F2994A"/>
+          </a:solidFill>
+          <a:ln>
+            <a:noFill/>
+          </a:ln>
+          <a:effectLst/>
+        </p:spPr>
+        <p:style>
+          <a:lnRef idx="1">
+            <a:schemeClr val="accent1"/>
+          </a:lnRef>
+          <a:fillRef idx="3">
+            <a:schemeClr val="accent1"/>
+          </a:fillRef>
+          <a:effectRef idx="2">
+            <a:schemeClr val="accent1"/>
+          </a:effectRef>
+          <a:fontRef idx="minor">
+            <a:schemeClr val="lt1"/>
+          </a:fontRef>
+        </p:style>
+        <p:txBody>
+          <a:bodyPr rtlCol="0" anchor="ctr" lIns="0" rIns="0" tIns="0" bIns="0" wrap="none"/>
+          <a:lstStyle/>
+          <a:p>
+            <a:pPr algn="ctr"/>
+            <a:r>
+              <a:rPr sz="1000" b="1">
+                <a:solidFill>
+                  <a:srgbClr val="FFFFFF"/>
+                </a:solidFill>
+                <a:latin typeface="Calibri"/>
+              </a:rPr>
+              <a:t>item 3</a:t>
+            </a:r>
+          </a:p>
+        </p:txBody>
+      </p:sp>
+      <p:sp>
+        <p:nvSpPr>
+          <p:cNvPr id="14" name="TextBox 13"/>
+          <p:cNvSpPr txBox="1"/>
+          <p:nvPr/>
+        </p:nvSpPr>
+        <p:spPr>
+          <a:xfrm>
+            <a:off x="6254496" y="2203704"/>
+            <a:ext cx="5084064" cy="256032"/>
+          </a:xfrm>
+          <a:prstGeom prst="rect">
+            <a:avLst/>
+          </a:prstGeom>
+          <a:noFill/>
+        </p:spPr>
+        <p:txBody>
+          <a:bodyPr wrap="none" lIns="0" tIns="0" bIns="0" rIns="0">
+            <a:spAutoFit/>
+          </a:bodyPr>
+          <a:lstStyle/>
+          <a:p>
+            <a:r>
+              <a:rPr sz="1100" b="1">
+                <a:solidFill>
+                  <a:srgbClr val="1F2429"/>
+                </a:solidFill>
+                <a:latin typeface="Calibri"/>
+              </a:rPr>
+              <a:t>flex-direction: row-reverse (right to left)</a:t>
+            </a:r>
+          </a:p>
+        </p:txBody>
+      </p:sp>
+      <p:sp>
+        <p:nvSpPr>
+          <p:cNvPr id="15" name="Rectangle 14"/>
+          <p:cNvSpPr/>
+          <p:nvPr/>
+        </p:nvSpPr>
+        <p:spPr>
+          <a:xfrm>
+            <a:off x="6254496" y="2514600"/>
+            <a:ext cx="5084064" cy="1472184"/>
+          </a:xfrm>
+          <a:prstGeom prst="rect">
+            <a:avLst/>
+          </a:prstGeom>
+          <a:solidFill>
+            <a:srgbClr val="F7F8F9"/>
+          </a:solidFill>
+          <a:ln w="12700">
+            <a:solidFill>
+              <a:srgbClr val="B8C0C8"/>
+            </a:solidFill>
+            <a:prstDash val="dash"/>
+          </a:ln>
+          <a:effectLst/>
+        </p:spPr>
+        <p:style>
+          <a:lnRef idx="1">
+            <a:schemeClr val="accent1"/>
+          </a:lnRef>
+          <a:fillRef idx="3">
+            <a:schemeClr val="accent1"/>
+          </a:fillRef>
+          <a:effectRef idx="2">
+            <a:schemeClr val="accent1"/>
+          </a:effectRef>
+          <a:fontRef idx="minor">
+            <a:schemeClr val="lt1"/>
+          </a:fontRef>
+        </p:style>
+        <p:txBody>
+          <a:bodyPr rtlCol="0" anchor="ctr"/>
+          <a:lstStyle/>
+          <a:p>
+            <a:pPr algn="ctr"/>
+          </a:p>
+        </p:txBody>
+      </p:sp>
+      <p:sp>
+        <p:nvSpPr>
+          <p:cNvPr id="16" name="Rounded Rectangle 15"/>
+          <p:cNvSpPr/>
+          <p:nvPr/>
+        </p:nvSpPr>
+        <p:spPr>
+          <a:xfrm>
+            <a:off x="7214616" y="3022092"/>
+            <a:ext cx="1234440" cy="457200"/>
+          </a:xfrm>
+          <a:prstGeom prst="roundRect">
+            <a:avLst>
+              <a:gd name="adj" fmla="val 18000"/>
+            </a:avLst>
+          </a:prstGeom>
+          <a:solidFill>
+            <a:srgbClr val="F2994A"/>
+          </a:solidFill>
+          <a:ln>
+            <a:noFill/>
+          </a:ln>
+          <a:effectLst/>
+        </p:spPr>
+        <p:style>
+          <a:lnRef idx="1">
+            <a:schemeClr val="accent1"/>
+          </a:lnRef>
+          <a:fillRef idx="3">
+            <a:schemeClr val="accent1"/>
+          </a:fillRef>
+          <a:effectRef idx="2">
+            <a:schemeClr val="accent1"/>
+          </a:effectRef>
+          <a:fontRef idx="minor">
+            <a:schemeClr val="lt1"/>
+          </a:fontRef>
+        </p:style>
+        <p:txBody>
+          <a:bodyPr rtlCol="0" anchor="ctr" lIns="0" rIns="0" tIns="0" bIns="0" wrap="none"/>
+          <a:lstStyle/>
+          <a:p>
+            <a:pPr algn="ctr"/>
+            <a:r>
+              <a:rPr sz="1000" b="1">
+                <a:solidFill>
+                  <a:srgbClr val="FFFFFF"/>
+                </a:solidFill>
+                <a:latin typeface="Calibri"/>
+              </a:rPr>
+              <a:t>item 3</a:t>
+            </a:r>
+          </a:p>
+        </p:txBody>
+      </p:sp>
+      <p:sp>
+        <p:nvSpPr>
+          <p:cNvPr id="17" name="Rounded Rectangle 16"/>
+          <p:cNvSpPr/>
+          <p:nvPr/>
+        </p:nvSpPr>
+        <p:spPr>
+          <a:xfrm>
+            <a:off x="8577072" y="3022092"/>
+            <a:ext cx="1234440" cy="457200"/>
+          </a:xfrm>
+          <a:prstGeom prst="roundRect">
+            <a:avLst>
+              <a:gd name="adj" fmla="val 18000"/>
+            </a:avLst>
+          </a:prstGeom>
+          <a:solidFill>
+            <a:srgbClr val="6FCF97"/>
+          </a:solidFill>
+          <a:ln>
+            <a:noFill/>
+          </a:ln>
+          <a:effectLst/>
+        </p:spPr>
+        <p:style>
+          <a:lnRef idx="1">
+            <a:schemeClr val="accent1"/>
+          </a:lnRef>
+          <a:fillRef idx="3">
+            <a:schemeClr val="accent1"/>
+          </a:fillRef>
+          <a:effectRef idx="2">
+            <a:schemeClr val="accent1"/>
+          </a:effectRef>
+          <a:fontRef idx="minor">
+            <a:schemeClr val="lt1"/>
+          </a:fontRef>
+        </p:style>
+        <p:txBody>
+          <a:bodyPr rtlCol="0" anchor="ctr" lIns="0" rIns="0" tIns="0" bIns="0" wrap="none"/>
+          <a:lstStyle/>
+          <a:p>
+            <a:pPr algn="ctr"/>
+            <a:r>
+              <a:rPr sz="1000" b="1">
+                <a:solidFill>
+                  <a:srgbClr val="FFFFFF"/>
+                </a:solidFill>
+                <a:latin typeface="Calibri"/>
+              </a:rPr>
+              <a:t>item 2</a:t>
+            </a:r>
+          </a:p>
+        </p:txBody>
+      </p:sp>
+      <p:sp>
+        <p:nvSpPr>
+          <p:cNvPr id="18" name="Rounded Rectangle 17"/>
+          <p:cNvSpPr/>
+          <p:nvPr/>
+        </p:nvSpPr>
+        <p:spPr>
+          <a:xfrm>
+            <a:off x="9939528" y="3022092"/>
+            <a:ext cx="1234440" cy="457200"/>
+          </a:xfrm>
+          <a:prstGeom prst="roundRect">
+            <a:avLst>
+              <a:gd name="adj" fmla="val 18000"/>
+            </a:avLst>
+          </a:prstGeom>
+          <a:solidFill>
+            <a:srgbClr val="4A90E2"/>
+          </a:solidFill>
+          <a:ln>
+            <a:noFill/>
+          </a:ln>
+          <a:effectLst/>
+        </p:spPr>
+        <p:style>
+          <a:lnRef idx="1">
+            <a:schemeClr val="accent1"/>
+          </a:lnRef>
+          <a:fillRef idx="3">
+            <a:schemeClr val="accent1"/>
+          </a:fillRef>
+          <a:effectRef idx="2">
+            <a:schemeClr val="accent1"/>
+          </a:effectRef>
+          <a:fontRef idx="minor">
+            <a:schemeClr val="lt1"/>
+          </a:fontRef>
+        </p:style>
+        <p:txBody>
+          <a:bodyPr rtlCol="0" anchor="ctr" lIns="0" rIns="0" tIns="0" bIns="0" wrap="none"/>
+          <a:lstStyle/>
+          <a:p>
+            <a:pPr algn="ctr"/>
+            <a:r>
+              <a:rPr sz="1000" b="1">
+                <a:solidFill>
+                  <a:srgbClr val="FFFFFF"/>
+                </a:solidFill>
+                <a:latin typeface="Calibri"/>
+              </a:rPr>
+              <a:t>item 1</a:t>
+            </a:r>
+          </a:p>
+        </p:txBody>
+      </p:sp>
+      <p:sp>
+        <p:nvSpPr>
+          <p:cNvPr id="19" name="TextBox 18"/>
+          <p:cNvSpPr txBox="1"/>
+          <p:nvPr/>
+        </p:nvSpPr>
+        <p:spPr>
+          <a:xfrm>
+            <a:off x="850392" y="4242816"/>
+            <a:ext cx="5084064" cy="256032"/>
+          </a:xfrm>
+          <a:prstGeom prst="rect">
+            <a:avLst/>
+          </a:prstGeom>
+          <a:noFill/>
+        </p:spPr>
+        <p:txBody>
+          <a:bodyPr wrap="none" lIns="0" tIns="0" bIns="0" rIns="0">
+            <a:spAutoFit/>
+          </a:bodyPr>
+          <a:lstStyle/>
+          <a:p>
+            <a:r>
+              <a:rPr sz="1100" b="1">
+                <a:solidFill>
+                  <a:srgbClr val="1F2429"/>
+                </a:solidFill>
+                <a:latin typeface="Calibri"/>
+              </a:rPr>
+              <a:t>flex-direction: column (top to bottom)</a:t>
+            </a:r>
+          </a:p>
+        </p:txBody>
+      </p:sp>
+      <p:sp>
+        <p:nvSpPr>
+          <p:cNvPr id="20" name="Rectangle 19"/>
+          <p:cNvSpPr/>
+          <p:nvPr/>
+        </p:nvSpPr>
+        <p:spPr>
+          <a:xfrm>
+            <a:off x="850392" y="4553712"/>
+            <a:ext cx="5084064" cy="1472184"/>
+          </a:xfrm>
+          <a:prstGeom prst="rect">
+            <a:avLst/>
+          </a:prstGeom>
+          <a:solidFill>
+            <a:srgbClr val="F7F8F9"/>
+          </a:solidFill>
+          <a:ln w="12700">
+            <a:solidFill>
+              <a:srgbClr val="B8C0C8"/>
+            </a:solidFill>
+            <a:prstDash val="dash"/>
+          </a:ln>
+          <a:effectLst/>
+        </p:spPr>
+        <p:style>
+          <a:lnRef idx="1">
+            <a:schemeClr val="accent1"/>
+          </a:lnRef>
+          <a:fillRef idx="3">
+            <a:schemeClr val="accent1"/>
+          </a:fillRef>
+          <a:effectRef idx="2">
+            <a:schemeClr val="accent1"/>
+          </a:effectRef>
+          <a:fontRef idx="minor">
+            <a:schemeClr val="lt1"/>
+          </a:fontRef>
+        </p:style>
+        <p:txBody>
+          <a:bodyPr rtlCol="0" anchor="ctr"/>
+          <a:lstStyle/>
+          <a:p>
+            <a:pPr algn="ctr"/>
+          </a:p>
+        </p:txBody>
+      </p:sp>
+      <p:sp>
+        <p:nvSpPr>
+          <p:cNvPr id="21" name="Rounded Rectangle 20"/>
+          <p:cNvSpPr/>
+          <p:nvPr/>
+        </p:nvSpPr>
+        <p:spPr>
+          <a:xfrm>
+            <a:off x="1014984" y="4663440"/>
+            <a:ext cx="1554480" cy="384048"/>
+          </a:xfrm>
+          <a:prstGeom prst="roundRect">
+            <a:avLst>
+              <a:gd name="adj" fmla="val 18000"/>
+            </a:avLst>
+          </a:prstGeom>
+          <a:solidFill>
+            <a:srgbClr val="4A90E2"/>
+          </a:solidFill>
+          <a:ln>
+            <a:noFill/>
+          </a:ln>
+          <a:effectLst/>
+        </p:spPr>
+        <p:style>
+          <a:lnRef idx="1">
+            <a:schemeClr val="accent1"/>
+          </a:lnRef>
+          <a:fillRef idx="3">
+            <a:schemeClr val="accent1"/>
+          </a:fillRef>
+          <a:effectRef idx="2">
+            <a:schemeClr val="accent1"/>
+          </a:effectRef>
+          <a:fontRef idx="minor">
+            <a:schemeClr val="lt1"/>
+          </a:fontRef>
+        </p:style>
+        <p:txBody>
+          <a:bodyPr rtlCol="0" anchor="ctr" lIns="0" rIns="0" tIns="0" bIns="0" wrap="none"/>
+          <a:lstStyle/>
+          <a:p>
+            <a:pPr algn="ctr"/>
+            <a:r>
+              <a:rPr sz="1000" b="1">
+                <a:solidFill>
+                  <a:srgbClr val="FFFFFF"/>
+                </a:solidFill>
+                <a:latin typeface="Calibri"/>
+              </a:rPr>
+              <a:t>item 1</a:t>
+            </a:r>
+          </a:p>
+        </p:txBody>
+      </p:sp>
+      <p:sp>
+        <p:nvSpPr>
+          <p:cNvPr id="22" name="Rounded Rectangle 21"/>
+          <p:cNvSpPr/>
+          <p:nvPr/>
+        </p:nvSpPr>
+        <p:spPr>
+          <a:xfrm>
+            <a:off x="1014984" y="5138928"/>
+            <a:ext cx="1554480" cy="384048"/>
+          </a:xfrm>
+          <a:prstGeom prst="roundRect">
+            <a:avLst>
+              <a:gd name="adj" fmla="val 18000"/>
+            </a:avLst>
+          </a:prstGeom>
+          <a:solidFill>
+            <a:srgbClr val="6FCF97"/>
+          </a:solidFill>
+          <a:ln>
+            <a:noFill/>
+          </a:ln>
+          <a:effectLst/>
+        </p:spPr>
+        <p:style>
+          <a:lnRef idx="1">
+            <a:schemeClr val="accent1"/>
+          </a:lnRef>
+          <a:fillRef idx="3">
+            <a:schemeClr val="accent1"/>
+          </a:fillRef>
+          <a:effectRef idx="2">
+            <a:schemeClr val="accent1"/>
+          </a:effectRef>
+          <a:fontRef idx="minor">
+            <a:schemeClr val="lt1"/>
+          </a:fontRef>
+        </p:style>
+        <p:txBody>
+          <a:bodyPr rtlCol="0" anchor="ctr" lIns="0" rIns="0" tIns="0" bIns="0" wrap="none"/>
+          <a:lstStyle/>
+          <a:p>
+            <a:pPr algn="ctr"/>
+            <a:r>
+              <a:rPr sz="1000" b="1">
+                <a:solidFill>
+                  <a:srgbClr val="FFFFFF"/>
+                </a:solidFill>
+                <a:latin typeface="Calibri"/>
+              </a:rPr>
+              <a:t>item 2</a:t>
+            </a:r>
+          </a:p>
+        </p:txBody>
+      </p:sp>
+      <p:sp>
+        <p:nvSpPr>
+          <p:cNvPr id="23" name="Rounded Rectangle 22"/>
+          <p:cNvSpPr/>
+          <p:nvPr/>
+        </p:nvSpPr>
+        <p:spPr>
+          <a:xfrm>
+            <a:off x="1014984" y="5614416"/>
+            <a:ext cx="1554480" cy="384048"/>
+          </a:xfrm>
+          <a:prstGeom prst="roundRect">
+            <a:avLst>
+              <a:gd name="adj" fmla="val 18000"/>
+            </a:avLst>
+          </a:prstGeom>
+          <a:solidFill>
+            <a:srgbClr val="F2994A"/>
+          </a:solidFill>
+          <a:ln>
+            <a:noFill/>
+          </a:ln>
+          <a:effectLst/>
+        </p:spPr>
+        <p:style>
+          <a:lnRef idx="1">
+            <a:schemeClr val="accent1"/>
+          </a:lnRef>
+          <a:fillRef idx="3">
+            <a:schemeClr val="accent1"/>
+          </a:fillRef>
+          <a:effectRef idx="2">
+            <a:schemeClr val="accent1"/>
+          </a:effectRef>
+          <a:fontRef idx="minor">
+            <a:schemeClr val="lt1"/>
+          </a:fontRef>
+        </p:style>
+        <p:txBody>
+          <a:bodyPr rtlCol="0" anchor="ctr" lIns="0" rIns="0" tIns="0" bIns="0" wrap="none"/>
+          <a:lstStyle/>
+          <a:p>
+            <a:pPr algn="ctr"/>
+            <a:r>
+              <a:rPr sz="1000" b="1">
+                <a:solidFill>
+                  <a:srgbClr val="FFFFFF"/>
+                </a:solidFill>
+                <a:latin typeface="Calibri"/>
+              </a:rPr>
+              <a:t>item 3</a:t>
+            </a:r>
+          </a:p>
+        </p:txBody>
+      </p:sp>
+      <p:sp>
+        <p:nvSpPr>
+          <p:cNvPr id="24" name="TextBox 23"/>
+          <p:cNvSpPr txBox="1"/>
+          <p:nvPr/>
+        </p:nvSpPr>
+        <p:spPr>
+          <a:xfrm>
+            <a:off x="6254496" y="4242816"/>
+            <a:ext cx="5084064" cy="256032"/>
+          </a:xfrm>
+          <a:prstGeom prst="rect">
+            <a:avLst/>
+          </a:prstGeom>
+          <a:noFill/>
+        </p:spPr>
+        <p:txBody>
+          <a:bodyPr wrap="none" lIns="0" tIns="0" bIns="0" rIns="0">
+            <a:spAutoFit/>
+          </a:bodyPr>
+          <a:lstStyle/>
+          <a:p>
+            <a:r>
+              <a:rPr sz="1100" b="1">
+                <a:solidFill>
+                  <a:srgbClr val="1F2429"/>
+                </a:solidFill>
+                <a:latin typeface="Calibri"/>
+              </a:rPr>
+              <a:t>flex-direction: column-reverse (bottom to top)</a:t>
+            </a:r>
+          </a:p>
+        </p:txBody>
+      </p:sp>
+      <p:sp>
+        <p:nvSpPr>
+          <p:cNvPr id="25" name="Rectangle 24"/>
+          <p:cNvSpPr/>
+          <p:nvPr/>
+        </p:nvSpPr>
+        <p:spPr>
+          <a:xfrm>
+            <a:off x="6254496" y="4553712"/>
+            <a:ext cx="5084064" cy="1472184"/>
+          </a:xfrm>
+          <a:prstGeom prst="rect">
+            <a:avLst/>
+          </a:prstGeom>
+          <a:solidFill>
+            <a:srgbClr val="F7F8F9"/>
+          </a:solidFill>
+          <a:ln w="12700">
+            <a:solidFill>
+              <a:srgbClr val="B8C0C8"/>
+            </a:solidFill>
+            <a:prstDash val="dash"/>
+          </a:ln>
+          <a:effectLst/>
+        </p:spPr>
+        <p:style>
+          <a:lnRef idx="1">
+            <a:schemeClr val="accent1"/>
+          </a:lnRef>
+          <a:fillRef idx="3">
+            <a:schemeClr val="accent1"/>
+          </a:fillRef>
+          <a:effectRef idx="2">
+            <a:schemeClr val="accent1"/>
+          </a:effectRef>
+          <a:fontRef idx="minor">
+            <a:schemeClr val="lt1"/>
+          </a:fontRef>
+        </p:style>
+        <p:txBody>
+          <a:bodyPr rtlCol="0" anchor="ctr"/>
+          <a:lstStyle/>
+          <a:p>
+            <a:pPr algn="ctr"/>
+          </a:p>
+        </p:txBody>
+      </p:sp>
+      <p:sp>
+        <p:nvSpPr>
+          <p:cNvPr id="26" name="Rounded Rectangle 25"/>
+          <p:cNvSpPr/>
+          <p:nvPr/>
+        </p:nvSpPr>
+        <p:spPr>
+          <a:xfrm>
+            <a:off x="6419088" y="4663440"/>
+            <a:ext cx="1554480" cy="384048"/>
+          </a:xfrm>
+          <a:prstGeom prst="roundRect">
+            <a:avLst>
+              <a:gd name="adj" fmla="val 18000"/>
+            </a:avLst>
+          </a:prstGeom>
+          <a:solidFill>
+            <a:srgbClr val="F2994A"/>
+          </a:solidFill>
+          <a:ln>
+            <a:noFill/>
+          </a:ln>
+          <a:effectLst/>
+        </p:spPr>
+        <p:style>
+          <a:lnRef idx="1">
+            <a:schemeClr val="accent1"/>
+          </a:lnRef>
+          <a:fillRef idx="3">
+            <a:schemeClr val="accent1"/>
+          </a:fillRef>
+          <a:effectRef idx="2">
+            <a:schemeClr val="accent1"/>
+          </a:effectRef>
+          <a:fontRef idx="minor">
+            <a:schemeClr val="lt1"/>
+          </a:fontRef>
+        </p:style>
+        <p:txBody>
+          <a:bodyPr rtlCol="0" anchor="ctr" lIns="0" rIns="0" tIns="0" bIns="0" wrap="none"/>
+          <a:lstStyle/>
+          <a:p>
+            <a:pPr algn="ctr"/>
+            <a:r>
+              <a:rPr sz="1000" b="1">
+                <a:solidFill>
+                  <a:srgbClr val="FFFFFF"/>
+                </a:solidFill>
+                <a:latin typeface="Calibri"/>
+              </a:rPr>
+              <a:t>item 3</a:t>
+            </a:r>
+          </a:p>
+        </p:txBody>
+      </p:sp>
+      <p:sp>
+        <p:nvSpPr>
+          <p:cNvPr id="27" name="Rounded Rectangle 26"/>
+          <p:cNvSpPr/>
+          <p:nvPr/>
+        </p:nvSpPr>
+        <p:spPr>
+          <a:xfrm>
+            <a:off x="6419088" y="5138928"/>
+            <a:ext cx="1554480" cy="384048"/>
+          </a:xfrm>
+          <a:prstGeom prst="roundRect">
+            <a:avLst>
+              <a:gd name="adj" fmla="val 18000"/>
+            </a:avLst>
+          </a:prstGeom>
+          <a:solidFill>
+            <a:srgbClr val="6FCF97"/>
+          </a:solidFill>
+          <a:ln>
+            <a:noFill/>
+          </a:ln>
+          <a:effectLst/>
+        </p:spPr>
+        <p:style>
+          <a:lnRef idx="1">
+            <a:schemeClr val="accent1"/>
+          </a:lnRef>
+          <a:fillRef idx="3">
+            <a:schemeClr val="accent1"/>
+          </a:fillRef>
+          <a:effectRef idx="2">
+            <a:schemeClr val="accent1"/>
+          </a:effectRef>
+          <a:fontRef idx="minor">
+            <a:schemeClr val="lt1"/>
+          </a:fontRef>
+        </p:style>
+        <p:txBody>
+          <a:bodyPr rtlCol="0" anchor="ctr" lIns="0" rIns="0" tIns="0" bIns="0" wrap="none"/>
+          <a:lstStyle/>
+          <a:p>
+            <a:pPr algn="ctr"/>
+            <a:r>
+              <a:rPr sz="1000" b="1">
+                <a:solidFill>
+                  <a:srgbClr val="FFFFFF"/>
+                </a:solidFill>
+                <a:latin typeface="Calibri"/>
+              </a:rPr>
+              <a:t>item 2</a:t>
+            </a:r>
+          </a:p>
+        </p:txBody>
+      </p:sp>
+      <p:sp>
+        <p:nvSpPr>
+          <p:cNvPr id="28" name="Rounded Rectangle 27"/>
+          <p:cNvSpPr/>
+          <p:nvPr/>
+        </p:nvSpPr>
+        <p:spPr>
+          <a:xfrm>
+            <a:off x="6419088" y="5614416"/>
+            <a:ext cx="1554480" cy="384048"/>
+          </a:xfrm>
+          <a:prstGeom prst="roundRect">
+            <a:avLst>
+              <a:gd name="adj" fmla="val 18000"/>
+            </a:avLst>
+          </a:prstGeom>
+          <a:solidFill>
+            <a:srgbClr val="4A90E2"/>
+          </a:solidFill>
+          <a:ln>
+            <a:noFill/>
+          </a:ln>
+          <a:effectLst/>
+        </p:spPr>
+        <p:style>
+          <a:lnRef idx="1">
+            <a:schemeClr val="accent1"/>
+          </a:lnRef>
+          <a:fillRef idx="3">
+            <a:schemeClr val="accent1"/>
+          </a:fillRef>
+          <a:effectRef idx="2">
+            <a:schemeClr val="accent1"/>
+          </a:effectRef>
+          <a:fontRef idx="minor">
+            <a:schemeClr val="lt1"/>
+          </a:fontRef>
+        </p:style>
+        <p:txBody>
+          <a:bodyPr rtlCol="0" anchor="ctr" lIns="0" rIns="0" tIns="0" bIns="0" wrap="none"/>
+          <a:lstStyle/>
+          <a:p>
+            <a:pPr algn="ctr"/>
+            <a:r>
+              <a:rPr sz="1000" b="1">
+                <a:solidFill>
+                  <a:srgbClr val="FFFFFF"/>
+                </a:solidFill>
+                <a:latin typeface="Calibri"/>
+              </a:rPr>
+              <a:t>item 1</a:t>
+            </a:r>
           </a:p>
         </p:txBody>
       </p:sp>
@@ -14874,6 +15834,10 @@
           </a:solidFill>
           <a:ln/>
         </p:spPr>
+        <p:txBody>
+          <a:bodyPr/>
+          <a:p/>
+        </p:txBody>
       </p:sp>
       <p:sp>
         <p:nvSpPr>
@@ -14939,79 +15903,44 @@
       </p:sp>
       <p:sp>
         <p:nvSpPr>
-          <p:cNvPr id="6" name="Text 4"/>
+          <p:cNvPr id="8" name="cuinotes-footer-mark"/>
           <p:cNvSpPr txBox="1"/>
           <p:nvPr/>
         </p:nvSpPr>
         <p:spPr>
           <a:xfrm>
-            <a:off x="640080" y="6446520"/>
-            <a:ext cx="8686800" cy="292608"/>
+            <a:off x="9951720" y="6455664"/>
+            <a:ext cx="2011680" cy="292608"/>
           </a:xfrm>
           <a:prstGeom prst="rect">
             <a:avLst/>
           </a:prstGeom>
           <a:noFill/>
-          <a:ln/>
-        </p:spPr>
-        <p:txBody>
-          <a:bodyPr wrap="square" lIns="0" tIns="0" rIns="0" bIns="0" rtlCol="0" anchor="ctr"/>
-          <a:lstStyle/>
-          <a:p>
-            <a:pPr algn="l" indent="0" marL="0">
-              <a:buNone/>
-            </a:pPr>
-            <a:r>
-              <a:rPr lang="en-US" sz="900" dirty="0">
-                <a:solidFill>
-                  <a:srgbClr val="5D5D72"/>
-                </a:solidFill>
-                <a:latin typeface="Calibri" pitchFamily="34" charset="0"/>
-                <a:ea typeface="Calibri" pitchFamily="34" charset="-122"/>
-                <a:cs typeface="Calibri" pitchFamily="34" charset="-120"/>
-              </a:rPr>
-              <a:t>Usman Akram  •  COMSATS University Islamabad</a:t>
-            </a:r>
-            <a:endParaRPr lang="en-US" sz="900" dirty="0"/>
-          </a:p>
-        </p:txBody>
-      </p:sp>
-      <p:sp>
-        <p:nvSpPr>
-          <p:cNvPr id="7" name="Text 5"/>
-          <p:cNvSpPr txBox="1"/>
-          <p:nvPr/>
-        </p:nvSpPr>
-        <p:spPr>
-          <a:xfrm>
-            <a:off x="11155680" y="6446520"/>
-            <a:ext cx="457200" cy="292608"/>
-          </a:xfrm>
-          <a:prstGeom prst="rect">
-            <a:avLst/>
-          </a:prstGeom>
-          <a:noFill/>
-          <a:ln/>
-        </p:spPr>
-        <p:txBody>
-          <a:bodyPr wrap="square" lIns="0" tIns="0" rIns="0" bIns="0" rtlCol="0" anchor="ctr"/>
-          <a:lstStyle/>
-          <a:p>
-            <a:pPr algn="r" indent="0" marL="0">
-              <a:buNone/>
-            </a:pPr>
-            <a:r>
-              <a:rPr lang="en-US" sz="900" dirty="0">
-                <a:solidFill>
-                  <a:srgbClr val="5D5D72"/>
-                </a:solidFill>
-                <a:latin typeface="Calibri" pitchFamily="34" charset="0"/>
-                <a:ea typeface="Calibri" pitchFamily="34" charset="-122"/>
-                <a:cs typeface="Calibri" pitchFamily="34" charset="-120"/>
-              </a:rPr>
-              <a:t>8</a:t>
-            </a:r>
-            <a:endParaRPr lang="en-US" sz="900" dirty="0"/>
+        </p:spPr>
+        <p:txBody>
+          <a:bodyPr wrap="none" lIns="0" rIns="0" tIns="0" bIns="0">
+            <a:spAutoFit/>
+          </a:bodyPr>
+          <a:lstStyle/>
+          <a:p>
+            <a:pPr algn="r"/>
+            <a:r>
+              <a:rPr sz="1000">
+                <a:solidFill>
+                  <a:srgbClr val="8A939B"/>
+                </a:solidFill>
+                <a:hlinkClick r:id="rId3"/>
+              </a:rPr>
+              <a:t>cuinotes.com</a:t>
+            </a:r>
+            <a:r>
+              <a:rPr sz="1000">
+                <a:solidFill>
+                  <a:srgbClr val="8A939B"/>
+                </a:solidFill>
+              </a:rPr>
+              <a:t>  ·  8</a:t>
+            </a:r>
           </a:p>
         </p:txBody>
       </p:sp>
@@ -15158,106 +16087,1527 @@
             </a:outerShdw>
           </a:effectLst>
         </p:spPr>
-      </p:sp>
-      <p:pic>
-        <p:nvPicPr>
-          <p:cNvPr id="5" name="Image 0" descr="D:/GitHub/mern-web-book/docs/assets/img/lecture-09/justify-content-comparison.png">    </p:cNvPr>
-          <p:cNvPicPr>
-            <a:picLocks noChangeAspect="1"/>
-          </p:cNvPicPr>
-          <p:nvPr/>
-        </p:nvPicPr>
-        <p:blipFill>
-          <a:blip r:embed="rId1"/>
-          <a:stretch>
-            <a:fillRect/>
-          </a:stretch>
-        </p:blipFill>
-        <p:spPr>
-          <a:xfrm>
-            <a:off x="3678365" y="2057400"/>
-            <a:ext cx="4834965" cy="4114800"/>
-          </a:xfrm>
-          <a:prstGeom prst="rect">
-            <a:avLst/>
-          </a:prstGeom>
-        </p:spPr>
-      </p:pic>
-      <p:sp>
-        <p:nvSpPr>
-          <p:cNvPr id="6" name="Text 3"/>
+        <p:txBody>
+          <a:bodyPr/>
+          <a:p/>
+        </p:txBody>
+      </p:sp>
+      <p:sp>
+        <p:nvSpPr>
+          <p:cNvPr id="8" name="cuinotes-footer-mark"/>
           <p:cNvSpPr txBox="1"/>
           <p:nvPr/>
         </p:nvSpPr>
         <p:spPr>
           <a:xfrm>
-            <a:off x="640080" y="6446520"/>
-            <a:ext cx="8686800" cy="292608"/>
+            <a:off x="9951720" y="6455664"/>
+            <a:ext cx="2011680" cy="292608"/>
           </a:xfrm>
           <a:prstGeom prst="rect">
             <a:avLst/>
           </a:prstGeom>
           <a:noFill/>
-          <a:ln/>
-        </p:spPr>
-        <p:txBody>
-          <a:bodyPr wrap="square" lIns="0" tIns="0" rIns="0" bIns="0" rtlCol="0" anchor="ctr"/>
-          <a:lstStyle/>
-          <a:p>
-            <a:pPr algn="l" indent="0" marL="0">
-              <a:buNone/>
-            </a:pPr>
-            <a:r>
-              <a:rPr lang="en-US" sz="900" dirty="0">
-                <a:solidFill>
-                  <a:srgbClr val="5D5D72"/>
-                </a:solidFill>
-                <a:latin typeface="Calibri" pitchFamily="34" charset="0"/>
-                <a:ea typeface="Calibri" pitchFamily="34" charset="-122"/>
-                <a:cs typeface="Calibri" pitchFamily="34" charset="-120"/>
-              </a:rPr>
-              <a:t>Usman Akram  •  COMSATS University Islamabad</a:t>
-            </a:r>
-            <a:endParaRPr lang="en-US" sz="900" dirty="0"/>
-          </a:p>
-        </p:txBody>
-      </p:sp>
-      <p:sp>
-        <p:nvSpPr>
-          <p:cNvPr id="7" name="Text 4"/>
+        </p:spPr>
+        <p:txBody>
+          <a:bodyPr wrap="none" lIns="0" rIns="0" tIns="0" bIns="0">
+            <a:spAutoFit/>
+          </a:bodyPr>
+          <a:lstStyle/>
+          <a:p>
+            <a:pPr algn="r"/>
+            <a:r>
+              <a:rPr sz="1000">
+                <a:solidFill>
+                  <a:srgbClr val="8A939B"/>
+                </a:solidFill>
+                <a:hlinkClick r:id="rId4"/>
+              </a:rPr>
+              <a:t>cuinotes.com</a:t>
+            </a:r>
+            <a:r>
+              <a:rPr sz="1000">
+                <a:solidFill>
+                  <a:srgbClr val="8A939B"/>
+                </a:solidFill>
+              </a:rPr>
+              <a:t>  ·  9</a:t>
+            </a:r>
+          </a:p>
+        </p:txBody>
+      </p:sp>
+      <p:sp>
+        <p:nvSpPr>
+          <p:cNvPr id="9" name="TextBox 8"/>
           <p:cNvSpPr txBox="1"/>
           <p:nvPr/>
         </p:nvSpPr>
         <p:spPr>
           <a:xfrm>
-            <a:off x="11155680" y="6446520"/>
-            <a:ext cx="457200" cy="292608"/>
+            <a:off x="804672" y="2148840"/>
+            <a:ext cx="5152644" cy="237744"/>
           </a:xfrm>
           <a:prstGeom prst="rect">
             <a:avLst/>
           </a:prstGeom>
           <a:noFill/>
-          <a:ln/>
-        </p:spPr>
-        <p:txBody>
-          <a:bodyPr wrap="square" lIns="0" tIns="0" rIns="0" bIns="0" rtlCol="0" anchor="ctr"/>
-          <a:lstStyle/>
-          <a:p>
-            <a:pPr algn="r" indent="0" marL="0">
-              <a:buNone/>
-            </a:pPr>
-            <a:r>
-              <a:rPr lang="en-US" sz="900" dirty="0">
-                <a:solidFill>
-                  <a:srgbClr val="5D5D72"/>
-                </a:solidFill>
-                <a:latin typeface="Calibri" pitchFamily="34" charset="0"/>
-                <a:ea typeface="Calibri" pitchFamily="34" charset="-122"/>
-                <a:cs typeface="Calibri" pitchFamily="34" charset="-120"/>
-              </a:rPr>
-              <a:t>9</a:t>
-            </a:r>
-            <a:endParaRPr lang="en-US" sz="900" dirty="0"/>
+        </p:spPr>
+        <p:txBody>
+          <a:bodyPr wrap="none" lIns="0" tIns="0" bIns="0" rIns="0">
+            <a:spAutoFit/>
+          </a:bodyPr>
+          <a:lstStyle/>
+          <a:p>
+            <a:r>
+              <a:rPr sz="1050" b="1">
+                <a:solidFill>
+                  <a:srgbClr val="1F2429"/>
+                </a:solidFill>
+                <a:latin typeface="Calibri"/>
+              </a:rPr>
+              <a:t>justify-content: flex-start (default: packed at the start)</a:t>
+            </a:r>
+          </a:p>
+        </p:txBody>
+      </p:sp>
+      <p:sp>
+        <p:nvSpPr>
+          <p:cNvPr id="10" name="Rectangle 9"/>
+          <p:cNvSpPr/>
+          <p:nvPr/>
+        </p:nvSpPr>
+        <p:spPr>
+          <a:xfrm>
+            <a:off x="804672" y="2441448"/>
+            <a:ext cx="5152644" cy="883920"/>
+          </a:xfrm>
+          <a:prstGeom prst="rect">
+            <a:avLst/>
+          </a:prstGeom>
+          <a:solidFill>
+            <a:srgbClr val="F7F8F9"/>
+          </a:solidFill>
+          <a:ln w="12700">
+            <a:solidFill>
+              <a:srgbClr val="B8C0C8"/>
+            </a:solidFill>
+            <a:prstDash val="dash"/>
+          </a:ln>
+          <a:effectLst/>
+        </p:spPr>
+        <p:style>
+          <a:lnRef idx="1">
+            <a:schemeClr val="accent1"/>
+          </a:lnRef>
+          <a:fillRef idx="3">
+            <a:schemeClr val="accent1"/>
+          </a:fillRef>
+          <a:effectRef idx="2">
+            <a:schemeClr val="accent1"/>
+          </a:effectRef>
+          <a:fontRef idx="minor">
+            <a:schemeClr val="lt1"/>
+          </a:fontRef>
+        </p:style>
+        <p:txBody>
+          <a:bodyPr rtlCol="0" anchor="ctr"/>
+          <a:lstStyle/>
+          <a:p>
+            <a:pPr algn="ctr"/>
+          </a:p>
+        </p:txBody>
+      </p:sp>
+      <p:sp>
+        <p:nvSpPr>
+          <p:cNvPr id="11" name="Rounded Rectangle 10"/>
+          <p:cNvSpPr/>
+          <p:nvPr/>
+        </p:nvSpPr>
+        <p:spPr>
+          <a:xfrm>
+            <a:off x="941832" y="2691384"/>
+            <a:ext cx="960120" cy="384048"/>
+          </a:xfrm>
+          <a:prstGeom prst="roundRect">
+            <a:avLst>
+              <a:gd name="adj" fmla="val 18000"/>
+            </a:avLst>
+          </a:prstGeom>
+          <a:solidFill>
+            <a:srgbClr val="4A90E2"/>
+          </a:solidFill>
+          <a:ln>
+            <a:noFill/>
+          </a:ln>
+          <a:effectLst/>
+        </p:spPr>
+        <p:style>
+          <a:lnRef idx="1">
+            <a:schemeClr val="accent1"/>
+          </a:lnRef>
+          <a:fillRef idx="3">
+            <a:schemeClr val="accent1"/>
+          </a:fillRef>
+          <a:effectRef idx="2">
+            <a:schemeClr val="accent1"/>
+          </a:effectRef>
+          <a:fontRef idx="minor">
+            <a:schemeClr val="lt1"/>
+          </a:fontRef>
+        </p:style>
+        <p:txBody>
+          <a:bodyPr rtlCol="0" anchor="ctr" lIns="0" rIns="0" tIns="0" bIns="0" wrap="none"/>
+          <a:lstStyle/>
+          <a:p>
+            <a:pPr algn="ctr"/>
+            <a:r>
+              <a:rPr sz="900" b="1">
+                <a:solidFill>
+                  <a:srgbClr val="FFFFFF"/>
+                </a:solidFill>
+                <a:latin typeface="Calibri"/>
+              </a:rPr>
+              <a:t>item 1</a:t>
+            </a:r>
+          </a:p>
+        </p:txBody>
+      </p:sp>
+      <p:sp>
+        <p:nvSpPr>
+          <p:cNvPr id="12" name="Rounded Rectangle 11"/>
+          <p:cNvSpPr/>
+          <p:nvPr/>
+        </p:nvSpPr>
+        <p:spPr>
+          <a:xfrm>
+            <a:off x="2011680" y="2691384"/>
+            <a:ext cx="960120" cy="384048"/>
+          </a:xfrm>
+          <a:prstGeom prst="roundRect">
+            <a:avLst>
+              <a:gd name="adj" fmla="val 18000"/>
+            </a:avLst>
+          </a:prstGeom>
+          <a:solidFill>
+            <a:srgbClr val="6FCF97"/>
+          </a:solidFill>
+          <a:ln>
+            <a:noFill/>
+          </a:ln>
+          <a:effectLst/>
+        </p:spPr>
+        <p:style>
+          <a:lnRef idx="1">
+            <a:schemeClr val="accent1"/>
+          </a:lnRef>
+          <a:fillRef idx="3">
+            <a:schemeClr val="accent1"/>
+          </a:fillRef>
+          <a:effectRef idx="2">
+            <a:schemeClr val="accent1"/>
+          </a:effectRef>
+          <a:fontRef idx="minor">
+            <a:schemeClr val="lt1"/>
+          </a:fontRef>
+        </p:style>
+        <p:txBody>
+          <a:bodyPr rtlCol="0" anchor="ctr" lIns="0" rIns="0" tIns="0" bIns="0" wrap="none"/>
+          <a:lstStyle/>
+          <a:p>
+            <a:pPr algn="ctr"/>
+            <a:r>
+              <a:rPr sz="900" b="1">
+                <a:solidFill>
+                  <a:srgbClr val="FFFFFF"/>
+                </a:solidFill>
+                <a:latin typeface="Calibri"/>
+              </a:rPr>
+              <a:t>item 2</a:t>
+            </a:r>
+          </a:p>
+        </p:txBody>
+      </p:sp>
+      <p:sp>
+        <p:nvSpPr>
+          <p:cNvPr id="13" name="Rounded Rectangle 12"/>
+          <p:cNvSpPr/>
+          <p:nvPr/>
+        </p:nvSpPr>
+        <p:spPr>
+          <a:xfrm>
+            <a:off x="3081528" y="2691384"/>
+            <a:ext cx="960120" cy="384048"/>
+          </a:xfrm>
+          <a:prstGeom prst="roundRect">
+            <a:avLst>
+              <a:gd name="adj" fmla="val 18000"/>
+            </a:avLst>
+          </a:prstGeom>
+          <a:solidFill>
+            <a:srgbClr val="F2994A"/>
+          </a:solidFill>
+          <a:ln>
+            <a:noFill/>
+          </a:ln>
+          <a:effectLst/>
+        </p:spPr>
+        <p:style>
+          <a:lnRef idx="1">
+            <a:schemeClr val="accent1"/>
+          </a:lnRef>
+          <a:fillRef idx="3">
+            <a:schemeClr val="accent1"/>
+          </a:fillRef>
+          <a:effectRef idx="2">
+            <a:schemeClr val="accent1"/>
+          </a:effectRef>
+          <a:fontRef idx="minor">
+            <a:schemeClr val="lt1"/>
+          </a:fontRef>
+        </p:style>
+        <p:txBody>
+          <a:bodyPr rtlCol="0" anchor="ctr" lIns="0" rIns="0" tIns="0" bIns="0" wrap="none"/>
+          <a:lstStyle/>
+          <a:p>
+            <a:pPr algn="ctr"/>
+            <a:r>
+              <a:rPr sz="900" b="1">
+                <a:solidFill>
+                  <a:srgbClr val="FFFFFF"/>
+                </a:solidFill>
+                <a:latin typeface="Calibri"/>
+              </a:rPr>
+              <a:t>item 3</a:t>
+            </a:r>
+          </a:p>
+        </p:txBody>
+      </p:sp>
+      <p:sp>
+        <p:nvSpPr>
+          <p:cNvPr id="14" name="TextBox 13"/>
+          <p:cNvSpPr txBox="1"/>
+          <p:nvPr/>
+        </p:nvSpPr>
+        <p:spPr>
+          <a:xfrm>
+            <a:off x="6231636" y="2148840"/>
+            <a:ext cx="5152644" cy="237744"/>
+          </a:xfrm>
+          <a:prstGeom prst="rect">
+            <a:avLst/>
+          </a:prstGeom>
+          <a:noFill/>
+        </p:spPr>
+        <p:txBody>
+          <a:bodyPr wrap="none" lIns="0" tIns="0" bIns="0" rIns="0">
+            <a:spAutoFit/>
+          </a:bodyPr>
+          <a:lstStyle/>
+          <a:p>
+            <a:r>
+              <a:rPr sz="1050" b="1">
+                <a:solidFill>
+                  <a:srgbClr val="1F2429"/>
+                </a:solidFill>
+                <a:latin typeface="Calibri"/>
+              </a:rPr>
+              <a:t>justify-content: flex-end (packed at the end)</a:t>
+            </a:r>
+          </a:p>
+        </p:txBody>
+      </p:sp>
+      <p:sp>
+        <p:nvSpPr>
+          <p:cNvPr id="15" name="Rectangle 14"/>
+          <p:cNvSpPr/>
+          <p:nvPr/>
+        </p:nvSpPr>
+        <p:spPr>
+          <a:xfrm>
+            <a:off x="6231636" y="2441448"/>
+            <a:ext cx="5152644" cy="883920"/>
+          </a:xfrm>
+          <a:prstGeom prst="rect">
+            <a:avLst/>
+          </a:prstGeom>
+          <a:solidFill>
+            <a:srgbClr val="F7F8F9"/>
+          </a:solidFill>
+          <a:ln w="12700">
+            <a:solidFill>
+              <a:srgbClr val="B8C0C8"/>
+            </a:solidFill>
+            <a:prstDash val="dash"/>
+          </a:ln>
+          <a:effectLst/>
+        </p:spPr>
+        <p:style>
+          <a:lnRef idx="1">
+            <a:schemeClr val="accent1"/>
+          </a:lnRef>
+          <a:fillRef idx="3">
+            <a:schemeClr val="accent1"/>
+          </a:fillRef>
+          <a:effectRef idx="2">
+            <a:schemeClr val="accent1"/>
+          </a:effectRef>
+          <a:fontRef idx="minor">
+            <a:schemeClr val="lt1"/>
+          </a:fontRef>
+        </p:style>
+        <p:txBody>
+          <a:bodyPr rtlCol="0" anchor="ctr"/>
+          <a:lstStyle/>
+          <a:p>
+            <a:pPr algn="ctr"/>
+          </a:p>
+        </p:txBody>
+      </p:sp>
+      <p:sp>
+        <p:nvSpPr>
+          <p:cNvPr id="16" name="Rounded Rectangle 15"/>
+          <p:cNvSpPr/>
+          <p:nvPr/>
+        </p:nvSpPr>
+        <p:spPr>
+          <a:xfrm>
+            <a:off x="8147304" y="2691384"/>
+            <a:ext cx="960120" cy="384048"/>
+          </a:xfrm>
+          <a:prstGeom prst="roundRect">
+            <a:avLst>
+              <a:gd name="adj" fmla="val 18000"/>
+            </a:avLst>
+          </a:prstGeom>
+          <a:solidFill>
+            <a:srgbClr val="4A90E2"/>
+          </a:solidFill>
+          <a:ln>
+            <a:noFill/>
+          </a:ln>
+          <a:effectLst/>
+        </p:spPr>
+        <p:style>
+          <a:lnRef idx="1">
+            <a:schemeClr val="accent1"/>
+          </a:lnRef>
+          <a:fillRef idx="3">
+            <a:schemeClr val="accent1"/>
+          </a:fillRef>
+          <a:effectRef idx="2">
+            <a:schemeClr val="accent1"/>
+          </a:effectRef>
+          <a:fontRef idx="minor">
+            <a:schemeClr val="lt1"/>
+          </a:fontRef>
+        </p:style>
+        <p:txBody>
+          <a:bodyPr rtlCol="0" anchor="ctr" lIns="0" rIns="0" tIns="0" bIns="0" wrap="none"/>
+          <a:lstStyle/>
+          <a:p>
+            <a:pPr algn="ctr"/>
+            <a:r>
+              <a:rPr sz="900" b="1">
+                <a:solidFill>
+                  <a:srgbClr val="FFFFFF"/>
+                </a:solidFill>
+                <a:latin typeface="Calibri"/>
+              </a:rPr>
+              <a:t>item 1</a:t>
+            </a:r>
+          </a:p>
+        </p:txBody>
+      </p:sp>
+      <p:sp>
+        <p:nvSpPr>
+          <p:cNvPr id="17" name="Rounded Rectangle 16"/>
+          <p:cNvSpPr/>
+          <p:nvPr/>
+        </p:nvSpPr>
+        <p:spPr>
+          <a:xfrm>
+            <a:off x="9217152" y="2691384"/>
+            <a:ext cx="960120" cy="384048"/>
+          </a:xfrm>
+          <a:prstGeom prst="roundRect">
+            <a:avLst>
+              <a:gd name="adj" fmla="val 18000"/>
+            </a:avLst>
+          </a:prstGeom>
+          <a:solidFill>
+            <a:srgbClr val="6FCF97"/>
+          </a:solidFill>
+          <a:ln>
+            <a:noFill/>
+          </a:ln>
+          <a:effectLst/>
+        </p:spPr>
+        <p:style>
+          <a:lnRef idx="1">
+            <a:schemeClr val="accent1"/>
+          </a:lnRef>
+          <a:fillRef idx="3">
+            <a:schemeClr val="accent1"/>
+          </a:fillRef>
+          <a:effectRef idx="2">
+            <a:schemeClr val="accent1"/>
+          </a:effectRef>
+          <a:fontRef idx="minor">
+            <a:schemeClr val="lt1"/>
+          </a:fontRef>
+        </p:style>
+        <p:txBody>
+          <a:bodyPr rtlCol="0" anchor="ctr" lIns="0" rIns="0" tIns="0" bIns="0" wrap="none"/>
+          <a:lstStyle/>
+          <a:p>
+            <a:pPr algn="ctr"/>
+            <a:r>
+              <a:rPr sz="900" b="1">
+                <a:solidFill>
+                  <a:srgbClr val="FFFFFF"/>
+                </a:solidFill>
+                <a:latin typeface="Calibri"/>
+              </a:rPr>
+              <a:t>item 2</a:t>
+            </a:r>
+          </a:p>
+        </p:txBody>
+      </p:sp>
+      <p:sp>
+        <p:nvSpPr>
+          <p:cNvPr id="18" name="Rounded Rectangle 17"/>
+          <p:cNvSpPr/>
+          <p:nvPr/>
+        </p:nvSpPr>
+        <p:spPr>
+          <a:xfrm>
+            <a:off x="10287000" y="2691384"/>
+            <a:ext cx="960120" cy="384048"/>
+          </a:xfrm>
+          <a:prstGeom prst="roundRect">
+            <a:avLst>
+              <a:gd name="adj" fmla="val 18000"/>
+            </a:avLst>
+          </a:prstGeom>
+          <a:solidFill>
+            <a:srgbClr val="F2994A"/>
+          </a:solidFill>
+          <a:ln>
+            <a:noFill/>
+          </a:ln>
+          <a:effectLst/>
+        </p:spPr>
+        <p:style>
+          <a:lnRef idx="1">
+            <a:schemeClr val="accent1"/>
+          </a:lnRef>
+          <a:fillRef idx="3">
+            <a:schemeClr val="accent1"/>
+          </a:fillRef>
+          <a:effectRef idx="2">
+            <a:schemeClr val="accent1"/>
+          </a:effectRef>
+          <a:fontRef idx="minor">
+            <a:schemeClr val="lt1"/>
+          </a:fontRef>
+        </p:style>
+        <p:txBody>
+          <a:bodyPr rtlCol="0" anchor="ctr" lIns="0" rIns="0" tIns="0" bIns="0" wrap="none"/>
+          <a:lstStyle/>
+          <a:p>
+            <a:pPr algn="ctr"/>
+            <a:r>
+              <a:rPr sz="900" b="1">
+                <a:solidFill>
+                  <a:srgbClr val="FFFFFF"/>
+                </a:solidFill>
+                <a:latin typeface="Calibri"/>
+              </a:rPr>
+              <a:t>item 3</a:t>
+            </a:r>
+          </a:p>
+        </p:txBody>
+      </p:sp>
+      <p:sp>
+        <p:nvSpPr>
+          <p:cNvPr id="19" name="TextBox 18"/>
+          <p:cNvSpPr txBox="1"/>
+          <p:nvPr/>
+        </p:nvSpPr>
+        <p:spPr>
+          <a:xfrm>
+            <a:off x="804672" y="3526536"/>
+            <a:ext cx="5152644" cy="237744"/>
+          </a:xfrm>
+          <a:prstGeom prst="rect">
+            <a:avLst/>
+          </a:prstGeom>
+          <a:noFill/>
+        </p:spPr>
+        <p:txBody>
+          <a:bodyPr wrap="none" lIns="0" tIns="0" bIns="0" rIns="0">
+            <a:spAutoFit/>
+          </a:bodyPr>
+          <a:lstStyle/>
+          <a:p>
+            <a:r>
+              <a:rPr sz="1050" b="1">
+                <a:solidFill>
+                  <a:srgbClr val="1F2429"/>
+                </a:solidFill>
+                <a:latin typeface="Calibri"/>
+              </a:rPr>
+              <a:t>justify-content: center (packed in the center)</a:t>
+            </a:r>
+          </a:p>
+        </p:txBody>
+      </p:sp>
+      <p:sp>
+        <p:nvSpPr>
+          <p:cNvPr id="20" name="Rectangle 19"/>
+          <p:cNvSpPr/>
+          <p:nvPr/>
+        </p:nvSpPr>
+        <p:spPr>
+          <a:xfrm>
+            <a:off x="804672" y="3819144"/>
+            <a:ext cx="5152644" cy="883920"/>
+          </a:xfrm>
+          <a:prstGeom prst="rect">
+            <a:avLst/>
+          </a:prstGeom>
+          <a:solidFill>
+            <a:srgbClr val="F7F8F9"/>
+          </a:solidFill>
+          <a:ln w="12700">
+            <a:solidFill>
+              <a:srgbClr val="B8C0C8"/>
+            </a:solidFill>
+            <a:prstDash val="dash"/>
+          </a:ln>
+          <a:effectLst/>
+        </p:spPr>
+        <p:style>
+          <a:lnRef idx="1">
+            <a:schemeClr val="accent1"/>
+          </a:lnRef>
+          <a:fillRef idx="3">
+            <a:schemeClr val="accent1"/>
+          </a:fillRef>
+          <a:effectRef idx="2">
+            <a:schemeClr val="accent1"/>
+          </a:effectRef>
+          <a:fontRef idx="minor">
+            <a:schemeClr val="lt1"/>
+          </a:fontRef>
+        </p:style>
+        <p:txBody>
+          <a:bodyPr rtlCol="0" anchor="ctr"/>
+          <a:lstStyle/>
+          <a:p>
+            <a:pPr algn="ctr"/>
+          </a:p>
+        </p:txBody>
+      </p:sp>
+      <p:sp>
+        <p:nvSpPr>
+          <p:cNvPr id="21" name="Rounded Rectangle 20"/>
+          <p:cNvSpPr/>
+          <p:nvPr/>
+        </p:nvSpPr>
+        <p:spPr>
+          <a:xfrm>
+            <a:off x="1831086" y="4069080"/>
+            <a:ext cx="960120" cy="384048"/>
+          </a:xfrm>
+          <a:prstGeom prst="roundRect">
+            <a:avLst>
+              <a:gd name="adj" fmla="val 18000"/>
+            </a:avLst>
+          </a:prstGeom>
+          <a:solidFill>
+            <a:srgbClr val="4A90E2"/>
+          </a:solidFill>
+          <a:ln>
+            <a:noFill/>
+          </a:ln>
+          <a:effectLst/>
+        </p:spPr>
+        <p:style>
+          <a:lnRef idx="1">
+            <a:schemeClr val="accent1"/>
+          </a:lnRef>
+          <a:fillRef idx="3">
+            <a:schemeClr val="accent1"/>
+          </a:fillRef>
+          <a:effectRef idx="2">
+            <a:schemeClr val="accent1"/>
+          </a:effectRef>
+          <a:fontRef idx="minor">
+            <a:schemeClr val="lt1"/>
+          </a:fontRef>
+        </p:style>
+        <p:txBody>
+          <a:bodyPr rtlCol="0" anchor="ctr" lIns="0" rIns="0" tIns="0" bIns="0" wrap="none"/>
+          <a:lstStyle/>
+          <a:p>
+            <a:pPr algn="ctr"/>
+            <a:r>
+              <a:rPr sz="900" b="1">
+                <a:solidFill>
+                  <a:srgbClr val="FFFFFF"/>
+                </a:solidFill>
+                <a:latin typeface="Calibri"/>
+              </a:rPr>
+              <a:t>item 1</a:t>
+            </a:r>
+          </a:p>
+        </p:txBody>
+      </p:sp>
+      <p:sp>
+        <p:nvSpPr>
+          <p:cNvPr id="22" name="Rounded Rectangle 21"/>
+          <p:cNvSpPr/>
+          <p:nvPr/>
+        </p:nvSpPr>
+        <p:spPr>
+          <a:xfrm>
+            <a:off x="2900934" y="4069080"/>
+            <a:ext cx="960120" cy="384048"/>
+          </a:xfrm>
+          <a:prstGeom prst="roundRect">
+            <a:avLst>
+              <a:gd name="adj" fmla="val 18000"/>
+            </a:avLst>
+          </a:prstGeom>
+          <a:solidFill>
+            <a:srgbClr val="6FCF97"/>
+          </a:solidFill>
+          <a:ln>
+            <a:noFill/>
+          </a:ln>
+          <a:effectLst/>
+        </p:spPr>
+        <p:style>
+          <a:lnRef idx="1">
+            <a:schemeClr val="accent1"/>
+          </a:lnRef>
+          <a:fillRef idx="3">
+            <a:schemeClr val="accent1"/>
+          </a:fillRef>
+          <a:effectRef idx="2">
+            <a:schemeClr val="accent1"/>
+          </a:effectRef>
+          <a:fontRef idx="minor">
+            <a:schemeClr val="lt1"/>
+          </a:fontRef>
+        </p:style>
+        <p:txBody>
+          <a:bodyPr rtlCol="0" anchor="ctr" lIns="0" rIns="0" tIns="0" bIns="0" wrap="none"/>
+          <a:lstStyle/>
+          <a:p>
+            <a:pPr algn="ctr"/>
+            <a:r>
+              <a:rPr sz="900" b="1">
+                <a:solidFill>
+                  <a:srgbClr val="FFFFFF"/>
+                </a:solidFill>
+                <a:latin typeface="Calibri"/>
+              </a:rPr>
+              <a:t>item 2</a:t>
+            </a:r>
+          </a:p>
+        </p:txBody>
+      </p:sp>
+      <p:sp>
+        <p:nvSpPr>
+          <p:cNvPr id="23" name="Rounded Rectangle 22"/>
+          <p:cNvSpPr/>
+          <p:nvPr/>
+        </p:nvSpPr>
+        <p:spPr>
+          <a:xfrm>
+            <a:off x="3970782" y="4069080"/>
+            <a:ext cx="960120" cy="384048"/>
+          </a:xfrm>
+          <a:prstGeom prst="roundRect">
+            <a:avLst>
+              <a:gd name="adj" fmla="val 18000"/>
+            </a:avLst>
+          </a:prstGeom>
+          <a:solidFill>
+            <a:srgbClr val="F2994A"/>
+          </a:solidFill>
+          <a:ln>
+            <a:noFill/>
+          </a:ln>
+          <a:effectLst/>
+        </p:spPr>
+        <p:style>
+          <a:lnRef idx="1">
+            <a:schemeClr val="accent1"/>
+          </a:lnRef>
+          <a:fillRef idx="3">
+            <a:schemeClr val="accent1"/>
+          </a:fillRef>
+          <a:effectRef idx="2">
+            <a:schemeClr val="accent1"/>
+          </a:effectRef>
+          <a:fontRef idx="minor">
+            <a:schemeClr val="lt1"/>
+          </a:fontRef>
+        </p:style>
+        <p:txBody>
+          <a:bodyPr rtlCol="0" anchor="ctr" lIns="0" rIns="0" tIns="0" bIns="0" wrap="none"/>
+          <a:lstStyle/>
+          <a:p>
+            <a:pPr algn="ctr"/>
+            <a:r>
+              <a:rPr sz="900" b="1">
+                <a:solidFill>
+                  <a:srgbClr val="FFFFFF"/>
+                </a:solidFill>
+                <a:latin typeface="Calibri"/>
+              </a:rPr>
+              <a:t>item 3</a:t>
+            </a:r>
+          </a:p>
+        </p:txBody>
+      </p:sp>
+      <p:sp>
+        <p:nvSpPr>
+          <p:cNvPr id="24" name="TextBox 23"/>
+          <p:cNvSpPr txBox="1"/>
+          <p:nvPr/>
+        </p:nvSpPr>
+        <p:spPr>
+          <a:xfrm>
+            <a:off x="6231636" y="3526536"/>
+            <a:ext cx="5152644" cy="237744"/>
+          </a:xfrm>
+          <a:prstGeom prst="rect">
+            <a:avLst/>
+          </a:prstGeom>
+          <a:noFill/>
+        </p:spPr>
+        <p:txBody>
+          <a:bodyPr wrap="none" lIns="0" tIns="0" bIns="0" rIns="0">
+            <a:spAutoFit/>
+          </a:bodyPr>
+          <a:lstStyle/>
+          <a:p>
+            <a:r>
+              <a:rPr sz="1050" b="1">
+                <a:solidFill>
+                  <a:srgbClr val="1F2429"/>
+                </a:solidFill>
+                <a:latin typeface="Calibri"/>
+              </a:rPr>
+              <a:t>justify-content: space-between (equal gaps between items)</a:t>
+            </a:r>
+          </a:p>
+        </p:txBody>
+      </p:sp>
+      <p:sp>
+        <p:nvSpPr>
+          <p:cNvPr id="25" name="Rectangle 24"/>
+          <p:cNvSpPr/>
+          <p:nvPr/>
+        </p:nvSpPr>
+        <p:spPr>
+          <a:xfrm>
+            <a:off x="6231636" y="3819144"/>
+            <a:ext cx="5152644" cy="883920"/>
+          </a:xfrm>
+          <a:prstGeom prst="rect">
+            <a:avLst/>
+          </a:prstGeom>
+          <a:solidFill>
+            <a:srgbClr val="F7F8F9"/>
+          </a:solidFill>
+          <a:ln w="12700">
+            <a:solidFill>
+              <a:srgbClr val="B8C0C8"/>
+            </a:solidFill>
+            <a:prstDash val="dash"/>
+          </a:ln>
+          <a:effectLst/>
+        </p:spPr>
+        <p:style>
+          <a:lnRef idx="1">
+            <a:schemeClr val="accent1"/>
+          </a:lnRef>
+          <a:fillRef idx="3">
+            <a:schemeClr val="accent1"/>
+          </a:fillRef>
+          <a:effectRef idx="2">
+            <a:schemeClr val="accent1"/>
+          </a:effectRef>
+          <a:fontRef idx="minor">
+            <a:schemeClr val="lt1"/>
+          </a:fontRef>
+        </p:style>
+        <p:txBody>
+          <a:bodyPr rtlCol="0" anchor="ctr"/>
+          <a:lstStyle/>
+          <a:p>
+            <a:pPr algn="ctr"/>
+          </a:p>
+        </p:txBody>
+      </p:sp>
+      <p:sp>
+        <p:nvSpPr>
+          <p:cNvPr id="26" name="Rounded Rectangle 25"/>
+          <p:cNvSpPr/>
+          <p:nvPr/>
+        </p:nvSpPr>
+        <p:spPr>
+          <a:xfrm>
+            <a:off x="6368796" y="4069080"/>
+            <a:ext cx="960120" cy="384048"/>
+          </a:xfrm>
+          <a:prstGeom prst="roundRect">
+            <a:avLst>
+              <a:gd name="adj" fmla="val 18000"/>
+            </a:avLst>
+          </a:prstGeom>
+          <a:solidFill>
+            <a:srgbClr val="4A90E2"/>
+          </a:solidFill>
+          <a:ln>
+            <a:noFill/>
+          </a:ln>
+          <a:effectLst/>
+        </p:spPr>
+        <p:style>
+          <a:lnRef idx="1">
+            <a:schemeClr val="accent1"/>
+          </a:lnRef>
+          <a:fillRef idx="3">
+            <a:schemeClr val="accent1"/>
+          </a:fillRef>
+          <a:effectRef idx="2">
+            <a:schemeClr val="accent1"/>
+          </a:effectRef>
+          <a:fontRef idx="minor">
+            <a:schemeClr val="lt1"/>
+          </a:fontRef>
+        </p:style>
+        <p:txBody>
+          <a:bodyPr rtlCol="0" anchor="ctr" lIns="0" rIns="0" tIns="0" bIns="0" wrap="none"/>
+          <a:lstStyle/>
+          <a:p>
+            <a:pPr algn="ctr"/>
+            <a:r>
+              <a:rPr sz="900" b="1">
+                <a:solidFill>
+                  <a:srgbClr val="FFFFFF"/>
+                </a:solidFill>
+                <a:latin typeface="Calibri"/>
+              </a:rPr>
+              <a:t>item 1</a:t>
+            </a:r>
+          </a:p>
+        </p:txBody>
+      </p:sp>
+      <p:sp>
+        <p:nvSpPr>
+          <p:cNvPr id="27" name="Rounded Rectangle 26"/>
+          <p:cNvSpPr/>
+          <p:nvPr/>
+        </p:nvSpPr>
+        <p:spPr>
+          <a:xfrm>
+            <a:off x="8327898" y="4069080"/>
+            <a:ext cx="960120" cy="384048"/>
+          </a:xfrm>
+          <a:prstGeom prst="roundRect">
+            <a:avLst>
+              <a:gd name="adj" fmla="val 18000"/>
+            </a:avLst>
+          </a:prstGeom>
+          <a:solidFill>
+            <a:srgbClr val="6FCF97"/>
+          </a:solidFill>
+          <a:ln>
+            <a:noFill/>
+          </a:ln>
+          <a:effectLst/>
+        </p:spPr>
+        <p:style>
+          <a:lnRef idx="1">
+            <a:schemeClr val="accent1"/>
+          </a:lnRef>
+          <a:fillRef idx="3">
+            <a:schemeClr val="accent1"/>
+          </a:fillRef>
+          <a:effectRef idx="2">
+            <a:schemeClr val="accent1"/>
+          </a:effectRef>
+          <a:fontRef idx="minor">
+            <a:schemeClr val="lt1"/>
+          </a:fontRef>
+        </p:style>
+        <p:txBody>
+          <a:bodyPr rtlCol="0" anchor="ctr" lIns="0" rIns="0" tIns="0" bIns="0" wrap="none"/>
+          <a:lstStyle/>
+          <a:p>
+            <a:pPr algn="ctr"/>
+            <a:r>
+              <a:rPr sz="900" b="1">
+                <a:solidFill>
+                  <a:srgbClr val="FFFFFF"/>
+                </a:solidFill>
+                <a:latin typeface="Calibri"/>
+              </a:rPr>
+              <a:t>item 2</a:t>
+            </a:r>
+          </a:p>
+        </p:txBody>
+      </p:sp>
+      <p:sp>
+        <p:nvSpPr>
+          <p:cNvPr id="28" name="Rounded Rectangle 27"/>
+          <p:cNvSpPr/>
+          <p:nvPr/>
+        </p:nvSpPr>
+        <p:spPr>
+          <a:xfrm>
+            <a:off x="10287000" y="4069080"/>
+            <a:ext cx="960120" cy="384048"/>
+          </a:xfrm>
+          <a:prstGeom prst="roundRect">
+            <a:avLst>
+              <a:gd name="adj" fmla="val 18000"/>
+            </a:avLst>
+          </a:prstGeom>
+          <a:solidFill>
+            <a:srgbClr val="F2994A"/>
+          </a:solidFill>
+          <a:ln>
+            <a:noFill/>
+          </a:ln>
+          <a:effectLst/>
+        </p:spPr>
+        <p:style>
+          <a:lnRef idx="1">
+            <a:schemeClr val="accent1"/>
+          </a:lnRef>
+          <a:fillRef idx="3">
+            <a:schemeClr val="accent1"/>
+          </a:fillRef>
+          <a:effectRef idx="2">
+            <a:schemeClr val="accent1"/>
+          </a:effectRef>
+          <a:fontRef idx="minor">
+            <a:schemeClr val="lt1"/>
+          </a:fontRef>
+        </p:style>
+        <p:txBody>
+          <a:bodyPr rtlCol="0" anchor="ctr" lIns="0" rIns="0" tIns="0" bIns="0" wrap="none"/>
+          <a:lstStyle/>
+          <a:p>
+            <a:pPr algn="ctr"/>
+            <a:r>
+              <a:rPr sz="900" b="1">
+                <a:solidFill>
+                  <a:srgbClr val="FFFFFF"/>
+                </a:solidFill>
+                <a:latin typeface="Calibri"/>
+              </a:rPr>
+              <a:t>item 3</a:t>
+            </a:r>
+          </a:p>
+        </p:txBody>
+      </p:sp>
+      <p:sp>
+        <p:nvSpPr>
+          <p:cNvPr id="29" name="TextBox 28"/>
+          <p:cNvSpPr txBox="1"/>
+          <p:nvPr/>
+        </p:nvSpPr>
+        <p:spPr>
+          <a:xfrm>
+            <a:off x="804672" y="4904232"/>
+            <a:ext cx="5152644" cy="237744"/>
+          </a:xfrm>
+          <a:prstGeom prst="rect">
+            <a:avLst/>
+          </a:prstGeom>
+          <a:noFill/>
+        </p:spPr>
+        <p:txBody>
+          <a:bodyPr wrap="none" lIns="0" tIns="0" bIns="0" rIns="0">
+            <a:spAutoFit/>
+          </a:bodyPr>
+          <a:lstStyle/>
+          <a:p>
+            <a:r>
+              <a:rPr sz="1050" b="1">
+                <a:solidFill>
+                  <a:srgbClr val="1F2429"/>
+                </a:solidFill>
+                <a:latin typeface="Calibri"/>
+              </a:rPr>
+              <a:t>justify-content: space-around (equal space around each item)</a:t>
+            </a:r>
+          </a:p>
+        </p:txBody>
+      </p:sp>
+      <p:sp>
+        <p:nvSpPr>
+          <p:cNvPr id="30" name="Rectangle 29"/>
+          <p:cNvSpPr/>
+          <p:nvPr/>
+        </p:nvSpPr>
+        <p:spPr>
+          <a:xfrm>
+            <a:off x="804672" y="5196840"/>
+            <a:ext cx="5152644" cy="883920"/>
+          </a:xfrm>
+          <a:prstGeom prst="rect">
+            <a:avLst/>
+          </a:prstGeom>
+          <a:solidFill>
+            <a:srgbClr val="F7F8F9"/>
+          </a:solidFill>
+          <a:ln w="12700">
+            <a:solidFill>
+              <a:srgbClr val="B8C0C8"/>
+            </a:solidFill>
+            <a:prstDash val="dash"/>
+          </a:ln>
+          <a:effectLst/>
+        </p:spPr>
+        <p:style>
+          <a:lnRef idx="1">
+            <a:schemeClr val="accent1"/>
+          </a:lnRef>
+          <a:fillRef idx="3">
+            <a:schemeClr val="accent1"/>
+          </a:fillRef>
+          <a:effectRef idx="2">
+            <a:schemeClr val="accent1"/>
+          </a:effectRef>
+          <a:fontRef idx="minor">
+            <a:schemeClr val="lt1"/>
+          </a:fontRef>
+        </p:style>
+        <p:txBody>
+          <a:bodyPr rtlCol="0" anchor="ctr"/>
+          <a:lstStyle/>
+          <a:p>
+            <a:pPr algn="ctr"/>
+          </a:p>
+        </p:txBody>
+      </p:sp>
+      <p:sp>
+        <p:nvSpPr>
+          <p:cNvPr id="31" name="Rounded Rectangle 30"/>
+          <p:cNvSpPr/>
+          <p:nvPr/>
+        </p:nvSpPr>
+        <p:spPr>
+          <a:xfrm>
+            <a:off x="1274826" y="5446776"/>
+            <a:ext cx="960120" cy="384048"/>
+          </a:xfrm>
+          <a:prstGeom prst="roundRect">
+            <a:avLst>
+              <a:gd name="adj" fmla="val 18000"/>
+            </a:avLst>
+          </a:prstGeom>
+          <a:solidFill>
+            <a:srgbClr val="4A90E2"/>
+          </a:solidFill>
+          <a:ln>
+            <a:noFill/>
+          </a:ln>
+          <a:effectLst/>
+        </p:spPr>
+        <p:style>
+          <a:lnRef idx="1">
+            <a:schemeClr val="accent1"/>
+          </a:lnRef>
+          <a:fillRef idx="3">
+            <a:schemeClr val="accent1"/>
+          </a:fillRef>
+          <a:effectRef idx="2">
+            <a:schemeClr val="accent1"/>
+          </a:effectRef>
+          <a:fontRef idx="minor">
+            <a:schemeClr val="lt1"/>
+          </a:fontRef>
+        </p:style>
+        <p:txBody>
+          <a:bodyPr rtlCol="0" anchor="ctr" lIns="0" rIns="0" tIns="0" bIns="0" wrap="none"/>
+          <a:lstStyle/>
+          <a:p>
+            <a:pPr algn="ctr"/>
+            <a:r>
+              <a:rPr sz="900" b="1">
+                <a:solidFill>
+                  <a:srgbClr val="FFFFFF"/>
+                </a:solidFill>
+                <a:latin typeface="Calibri"/>
+              </a:rPr>
+              <a:t>item 1</a:t>
+            </a:r>
+          </a:p>
+        </p:txBody>
+      </p:sp>
+      <p:sp>
+        <p:nvSpPr>
+          <p:cNvPr id="32" name="Rounded Rectangle 31"/>
+          <p:cNvSpPr/>
+          <p:nvPr/>
+        </p:nvSpPr>
+        <p:spPr>
+          <a:xfrm>
+            <a:off x="2900934" y="5446776"/>
+            <a:ext cx="960120" cy="384048"/>
+          </a:xfrm>
+          <a:prstGeom prst="roundRect">
+            <a:avLst>
+              <a:gd name="adj" fmla="val 18000"/>
+            </a:avLst>
+          </a:prstGeom>
+          <a:solidFill>
+            <a:srgbClr val="6FCF97"/>
+          </a:solidFill>
+          <a:ln>
+            <a:noFill/>
+          </a:ln>
+          <a:effectLst/>
+        </p:spPr>
+        <p:style>
+          <a:lnRef idx="1">
+            <a:schemeClr val="accent1"/>
+          </a:lnRef>
+          <a:fillRef idx="3">
+            <a:schemeClr val="accent1"/>
+          </a:fillRef>
+          <a:effectRef idx="2">
+            <a:schemeClr val="accent1"/>
+          </a:effectRef>
+          <a:fontRef idx="minor">
+            <a:schemeClr val="lt1"/>
+          </a:fontRef>
+        </p:style>
+        <p:txBody>
+          <a:bodyPr rtlCol="0" anchor="ctr" lIns="0" rIns="0" tIns="0" bIns="0" wrap="none"/>
+          <a:lstStyle/>
+          <a:p>
+            <a:pPr algn="ctr"/>
+            <a:r>
+              <a:rPr sz="900" b="1">
+                <a:solidFill>
+                  <a:srgbClr val="FFFFFF"/>
+                </a:solidFill>
+                <a:latin typeface="Calibri"/>
+              </a:rPr>
+              <a:t>item 2</a:t>
+            </a:r>
+          </a:p>
+        </p:txBody>
+      </p:sp>
+      <p:sp>
+        <p:nvSpPr>
+          <p:cNvPr id="33" name="Rounded Rectangle 32"/>
+          <p:cNvSpPr/>
+          <p:nvPr/>
+        </p:nvSpPr>
+        <p:spPr>
+          <a:xfrm>
+            <a:off x="4527042" y="5446776"/>
+            <a:ext cx="960120" cy="384048"/>
+          </a:xfrm>
+          <a:prstGeom prst="roundRect">
+            <a:avLst>
+              <a:gd name="adj" fmla="val 18000"/>
+            </a:avLst>
+          </a:prstGeom>
+          <a:solidFill>
+            <a:srgbClr val="F2994A"/>
+          </a:solidFill>
+          <a:ln>
+            <a:noFill/>
+          </a:ln>
+          <a:effectLst/>
+        </p:spPr>
+        <p:style>
+          <a:lnRef idx="1">
+            <a:schemeClr val="accent1"/>
+          </a:lnRef>
+          <a:fillRef idx="3">
+            <a:schemeClr val="accent1"/>
+          </a:fillRef>
+          <a:effectRef idx="2">
+            <a:schemeClr val="accent1"/>
+          </a:effectRef>
+          <a:fontRef idx="minor">
+            <a:schemeClr val="lt1"/>
+          </a:fontRef>
+        </p:style>
+        <p:txBody>
+          <a:bodyPr rtlCol="0" anchor="ctr" lIns="0" rIns="0" tIns="0" bIns="0" wrap="none"/>
+          <a:lstStyle/>
+          <a:p>
+            <a:pPr algn="ctr"/>
+            <a:r>
+              <a:rPr sz="900" b="1">
+                <a:solidFill>
+                  <a:srgbClr val="FFFFFF"/>
+                </a:solidFill>
+                <a:latin typeface="Calibri"/>
+              </a:rPr>
+              <a:t>item 3</a:t>
+            </a:r>
+          </a:p>
+        </p:txBody>
+      </p:sp>
+      <p:sp>
+        <p:nvSpPr>
+          <p:cNvPr id="34" name="TextBox 33"/>
+          <p:cNvSpPr txBox="1"/>
+          <p:nvPr/>
+        </p:nvSpPr>
+        <p:spPr>
+          <a:xfrm>
+            <a:off x="6231636" y="4904232"/>
+            <a:ext cx="5152644" cy="237744"/>
+          </a:xfrm>
+          <a:prstGeom prst="rect">
+            <a:avLst/>
+          </a:prstGeom>
+          <a:noFill/>
+        </p:spPr>
+        <p:txBody>
+          <a:bodyPr wrap="none" lIns="0" tIns="0" bIns="0" rIns="0">
+            <a:spAutoFit/>
+          </a:bodyPr>
+          <a:lstStyle/>
+          <a:p>
+            <a:r>
+              <a:rPr sz="1050" b="1">
+                <a:solidFill>
+                  <a:srgbClr val="1F2429"/>
+                </a:solidFill>
+                <a:latin typeface="Calibri"/>
+              </a:rPr>
+              <a:t>justify-content: space-evenly (perfectly equal gaps)</a:t>
+            </a:r>
+          </a:p>
+        </p:txBody>
+      </p:sp>
+      <p:sp>
+        <p:nvSpPr>
+          <p:cNvPr id="35" name="Rectangle 34"/>
+          <p:cNvSpPr/>
+          <p:nvPr/>
+        </p:nvSpPr>
+        <p:spPr>
+          <a:xfrm>
+            <a:off x="6231636" y="5196840"/>
+            <a:ext cx="5152644" cy="883920"/>
+          </a:xfrm>
+          <a:prstGeom prst="rect">
+            <a:avLst/>
+          </a:prstGeom>
+          <a:solidFill>
+            <a:srgbClr val="F7F8F9"/>
+          </a:solidFill>
+          <a:ln w="12700">
+            <a:solidFill>
+              <a:srgbClr val="B8C0C8"/>
+            </a:solidFill>
+            <a:prstDash val="dash"/>
+          </a:ln>
+          <a:effectLst/>
+        </p:spPr>
+        <p:style>
+          <a:lnRef idx="1">
+            <a:schemeClr val="accent1"/>
+          </a:lnRef>
+          <a:fillRef idx="3">
+            <a:schemeClr val="accent1"/>
+          </a:fillRef>
+          <a:effectRef idx="2">
+            <a:schemeClr val="accent1"/>
+          </a:effectRef>
+          <a:fontRef idx="minor">
+            <a:schemeClr val="lt1"/>
+          </a:fontRef>
+        </p:style>
+        <p:txBody>
+          <a:bodyPr rtlCol="0" anchor="ctr"/>
+          <a:lstStyle/>
+          <a:p>
+            <a:pPr algn="ctr"/>
+          </a:p>
+        </p:txBody>
+      </p:sp>
+      <p:sp>
+        <p:nvSpPr>
+          <p:cNvPr id="36" name="Rounded Rectangle 35"/>
+          <p:cNvSpPr/>
+          <p:nvPr/>
+        </p:nvSpPr>
+        <p:spPr>
+          <a:xfrm>
+            <a:off x="6868287" y="5446776"/>
+            <a:ext cx="960120" cy="384048"/>
+          </a:xfrm>
+          <a:prstGeom prst="roundRect">
+            <a:avLst>
+              <a:gd name="adj" fmla="val 18000"/>
+            </a:avLst>
+          </a:prstGeom>
+          <a:solidFill>
+            <a:srgbClr val="4A90E2"/>
+          </a:solidFill>
+          <a:ln>
+            <a:noFill/>
+          </a:ln>
+          <a:effectLst/>
+        </p:spPr>
+        <p:style>
+          <a:lnRef idx="1">
+            <a:schemeClr val="accent1"/>
+          </a:lnRef>
+          <a:fillRef idx="3">
+            <a:schemeClr val="accent1"/>
+          </a:fillRef>
+          <a:effectRef idx="2">
+            <a:schemeClr val="accent1"/>
+          </a:effectRef>
+          <a:fontRef idx="minor">
+            <a:schemeClr val="lt1"/>
+          </a:fontRef>
+        </p:style>
+        <p:txBody>
+          <a:bodyPr rtlCol="0" anchor="ctr" lIns="0" rIns="0" tIns="0" bIns="0" wrap="none"/>
+          <a:lstStyle/>
+          <a:p>
+            <a:pPr algn="ctr"/>
+            <a:r>
+              <a:rPr sz="900" b="1">
+                <a:solidFill>
+                  <a:srgbClr val="FFFFFF"/>
+                </a:solidFill>
+                <a:latin typeface="Calibri"/>
+              </a:rPr>
+              <a:t>item 1</a:t>
+            </a:r>
+          </a:p>
+        </p:txBody>
+      </p:sp>
+      <p:sp>
+        <p:nvSpPr>
+          <p:cNvPr id="37" name="Rounded Rectangle 36"/>
+          <p:cNvSpPr/>
+          <p:nvPr/>
+        </p:nvSpPr>
+        <p:spPr>
+          <a:xfrm>
+            <a:off x="8327898" y="5446776"/>
+            <a:ext cx="960120" cy="384048"/>
+          </a:xfrm>
+          <a:prstGeom prst="roundRect">
+            <a:avLst>
+              <a:gd name="adj" fmla="val 18000"/>
+            </a:avLst>
+          </a:prstGeom>
+          <a:solidFill>
+            <a:srgbClr val="6FCF97"/>
+          </a:solidFill>
+          <a:ln>
+            <a:noFill/>
+          </a:ln>
+          <a:effectLst/>
+        </p:spPr>
+        <p:style>
+          <a:lnRef idx="1">
+            <a:schemeClr val="accent1"/>
+          </a:lnRef>
+          <a:fillRef idx="3">
+            <a:schemeClr val="accent1"/>
+          </a:fillRef>
+          <a:effectRef idx="2">
+            <a:schemeClr val="accent1"/>
+          </a:effectRef>
+          <a:fontRef idx="minor">
+            <a:schemeClr val="lt1"/>
+          </a:fontRef>
+        </p:style>
+        <p:txBody>
+          <a:bodyPr rtlCol="0" anchor="ctr" lIns="0" rIns="0" tIns="0" bIns="0" wrap="none"/>
+          <a:lstStyle/>
+          <a:p>
+            <a:pPr algn="ctr"/>
+            <a:r>
+              <a:rPr sz="900" b="1">
+                <a:solidFill>
+                  <a:srgbClr val="FFFFFF"/>
+                </a:solidFill>
+                <a:latin typeface="Calibri"/>
+              </a:rPr>
+              <a:t>item 2</a:t>
+            </a:r>
+          </a:p>
+        </p:txBody>
+      </p:sp>
+      <p:sp>
+        <p:nvSpPr>
+          <p:cNvPr id="38" name="Rounded Rectangle 37"/>
+          <p:cNvSpPr/>
+          <p:nvPr/>
+        </p:nvSpPr>
+        <p:spPr>
+          <a:xfrm>
+            <a:off x="9787509" y="5446776"/>
+            <a:ext cx="960120" cy="384048"/>
+          </a:xfrm>
+          <a:prstGeom prst="roundRect">
+            <a:avLst>
+              <a:gd name="adj" fmla="val 18000"/>
+            </a:avLst>
+          </a:prstGeom>
+          <a:solidFill>
+            <a:srgbClr val="F2994A"/>
+          </a:solidFill>
+          <a:ln>
+            <a:noFill/>
+          </a:ln>
+          <a:effectLst/>
+        </p:spPr>
+        <p:style>
+          <a:lnRef idx="1">
+            <a:schemeClr val="accent1"/>
+          </a:lnRef>
+          <a:fillRef idx="3">
+            <a:schemeClr val="accent1"/>
+          </a:fillRef>
+          <a:effectRef idx="2">
+            <a:schemeClr val="accent1"/>
+          </a:effectRef>
+          <a:fontRef idx="minor">
+            <a:schemeClr val="lt1"/>
+          </a:fontRef>
+        </p:style>
+        <p:txBody>
+          <a:bodyPr rtlCol="0" anchor="ctr" lIns="0" rIns="0" tIns="0" bIns="0" wrap="none"/>
+          <a:lstStyle/>
+          <a:p>
+            <a:pPr algn="ctr"/>
+            <a:r>
+              <a:rPr sz="900" b="1">
+                <a:solidFill>
+                  <a:srgbClr val="FFFFFF"/>
+                </a:solidFill>
+                <a:latin typeface="Calibri"/>
+              </a:rPr>
+              <a:t>item 3</a:t>
+            </a:r>
           </a:p>
         </p:txBody>
       </p:sp>

--- a/slides/CSC336-Lecture-09-Flexbox-and-Grid-Layout.pptx
+++ b/slides/CSC336-Lecture-09-Flexbox-and-Grid-Layout.pptx
@@ -4161,9 +4161,13 @@
             </a:avLst>
           </a:prstGeom>
           <a:solidFill>
-            <a:srgbClr val="1E1E4C"/>
+            <a:srgbClr val="F7F8F9"/>
           </a:solidFill>
-          <a:ln/>
+          <a:ln w="9525">
+            <a:solidFill>
+              <a:srgbClr val="D0D5DD"/>
+            </a:solidFill>
+          </a:ln>
         </p:spPr>
         <p:txBody>
           <a:bodyPr/>
@@ -4200,7 +4204,7 @@
             <a:r>
               <a:rPr lang="en-US" sz="1400" dirty="0">
                 <a:solidFill>
-                  <a:srgbClr val="C9D3F5"/>
+                  <a:srgbClr val="1F2429"/>
                 </a:solidFill>
                 <a:latin typeface="Courier New" pitchFamily="34" charset="0"/>
                 <a:ea typeface="Courier New" pitchFamily="34" charset="-122"/>
@@ -5557,9 +5561,13 @@
             </a:avLst>
           </a:prstGeom>
           <a:solidFill>
-            <a:srgbClr val="1E1E4C"/>
+            <a:srgbClr val="F7F8F9"/>
           </a:solidFill>
-          <a:ln/>
+          <a:ln w="9525">
+            <a:solidFill>
+              <a:srgbClr val="D0D5DD"/>
+            </a:solidFill>
+          </a:ln>
         </p:spPr>
         <p:txBody>
           <a:bodyPr/>
@@ -5596,7 +5604,7 @@
             <a:r>
               <a:rPr lang="en-US" sz="1400" dirty="0">
                 <a:solidFill>
-                  <a:srgbClr val="C9D3F5"/>
+                  <a:srgbClr val="1F2429"/>
                 </a:solidFill>
                 <a:latin typeface="Courier New" pitchFamily="34" charset="0"/>
                 <a:ea typeface="Courier New" pitchFamily="34" charset="-122"/>
@@ -5616,7 +5624,7 @@
             <a:r>
               <a:rPr lang="en-US" sz="1400" dirty="0">
                 <a:solidFill>
-                  <a:srgbClr val="C9D3F5"/>
+                  <a:srgbClr val="1F2429"/>
                 </a:solidFill>
                 <a:latin typeface="Courier New" pitchFamily="34" charset="0"/>
                 <a:ea typeface="Courier New" pitchFamily="34" charset="-122"/>
@@ -5636,7 +5644,7 @@
             <a:r>
               <a:rPr lang="en-US" sz="1400" dirty="0">
                 <a:solidFill>
-                  <a:srgbClr val="C9D3F5"/>
+                  <a:srgbClr val="1F2429"/>
                 </a:solidFill>
                 <a:latin typeface="Courier New" pitchFamily="34" charset="0"/>
                 <a:ea typeface="Courier New" pitchFamily="34" charset="-122"/>
@@ -5656,7 +5664,7 @@
             <a:r>
               <a:rPr lang="en-US" sz="1400" dirty="0">
                 <a:solidFill>
-                  <a:srgbClr val="C9D3F5"/>
+                  <a:srgbClr val="1F2429"/>
                 </a:solidFill>
                 <a:latin typeface="Courier New" pitchFamily="34" charset="0"/>
                 <a:ea typeface="Courier New" pitchFamily="34" charset="-122"/>
@@ -5676,7 +5684,7 @@
             <a:r>
               <a:rPr lang="en-US" sz="1400" dirty="0">
                 <a:solidFill>
-                  <a:srgbClr val="C9D3F5"/>
+                  <a:srgbClr val="1F2429"/>
                 </a:solidFill>
                 <a:latin typeface="Courier New" pitchFamily="34" charset="0"/>
                 <a:ea typeface="Courier New" pitchFamily="34" charset="-122"/>
@@ -6112,9 +6120,13 @@
             </a:avLst>
           </a:prstGeom>
           <a:solidFill>
-            <a:srgbClr val="1E1E4C"/>
+            <a:srgbClr val="F7F8F9"/>
           </a:solidFill>
-          <a:ln/>
+          <a:ln w="9525">
+            <a:solidFill>
+              <a:srgbClr val="D0D5DD"/>
+            </a:solidFill>
+          </a:ln>
         </p:spPr>
         <p:txBody>
           <a:bodyPr/>
@@ -6151,7 +6163,7 @@
             <a:r>
               <a:rPr lang="en-US" sz="1400" dirty="0">
                 <a:solidFill>
-                  <a:srgbClr val="C9D3F5"/>
+                  <a:srgbClr val="1F2429"/>
                 </a:solidFill>
                 <a:latin typeface="Courier New" pitchFamily="34" charset="0"/>
                 <a:ea typeface="Courier New" pitchFamily="34" charset="-122"/>
@@ -6587,9 +6599,13 @@
             </a:avLst>
           </a:prstGeom>
           <a:solidFill>
-            <a:srgbClr val="1E1E4C"/>
+            <a:srgbClr val="F7F8F9"/>
           </a:solidFill>
-          <a:ln/>
+          <a:ln w="9525">
+            <a:solidFill>
+              <a:srgbClr val="D0D5DD"/>
+            </a:solidFill>
+          </a:ln>
         </p:spPr>
         <p:txBody>
           <a:bodyPr/>
@@ -6626,7 +6642,7 @@
             <a:r>
               <a:rPr lang="en-US" sz="1400" dirty="0">
                 <a:solidFill>
-                  <a:srgbClr val="C9D3F5"/>
+                  <a:srgbClr val="1F2429"/>
                 </a:solidFill>
                 <a:latin typeface="Courier New" pitchFamily="34" charset="0"/>
                 <a:ea typeface="Courier New" pitchFamily="34" charset="-122"/>
@@ -6646,7 +6662,7 @@
             <a:r>
               <a:rPr lang="en-US" sz="1400" dirty="0">
                 <a:solidFill>
-                  <a:srgbClr val="C9D3F5"/>
+                  <a:srgbClr val="1F2429"/>
                 </a:solidFill>
                 <a:latin typeface="Courier New" pitchFamily="34" charset="0"/>
                 <a:ea typeface="Courier New" pitchFamily="34" charset="-122"/>
@@ -6666,7 +6682,7 @@
             <a:r>
               <a:rPr lang="en-US" sz="1400" dirty="0">
                 <a:solidFill>
-                  <a:srgbClr val="C9D3F5"/>
+                  <a:srgbClr val="1F2429"/>
                 </a:solidFill>
                 <a:latin typeface="Courier New" pitchFamily="34" charset="0"/>
                 <a:ea typeface="Courier New" pitchFamily="34" charset="-122"/>
@@ -7063,9 +7079,13 @@
             </a:avLst>
           </a:prstGeom>
           <a:solidFill>
-            <a:srgbClr val="1E1E4C"/>
+            <a:srgbClr val="F7F8F9"/>
           </a:solidFill>
-          <a:ln/>
+          <a:ln w="9525">
+            <a:solidFill>
+              <a:srgbClr val="D0D5DD"/>
+            </a:solidFill>
+          </a:ln>
         </p:spPr>
         <p:txBody>
           <a:bodyPr/>
@@ -7102,7 +7122,7 @@
             <a:r>
               <a:rPr lang="en-US" sz="1400" dirty="0">
                 <a:solidFill>
-                  <a:srgbClr val="C9D3F5"/>
+                  <a:srgbClr val="1F2429"/>
                 </a:solidFill>
                 <a:latin typeface="Courier New" pitchFamily="34" charset="0"/>
                 <a:ea typeface="Courier New" pitchFamily="34" charset="-122"/>
@@ -7122,7 +7142,7 @@
             <a:r>
               <a:rPr lang="en-US" sz="1400" dirty="0">
                 <a:solidFill>
-                  <a:srgbClr val="C9D3F5"/>
+                  <a:srgbClr val="1F2429"/>
                 </a:solidFill>
                 <a:latin typeface="Courier New" pitchFamily="34" charset="0"/>
                 <a:ea typeface="Courier New" pitchFamily="34" charset="-122"/>
@@ -7142,7 +7162,7 @@
             <a:r>
               <a:rPr lang="en-US" sz="1400" dirty="0">
                 <a:solidFill>
-                  <a:srgbClr val="C9D3F5"/>
+                  <a:srgbClr val="1F2429"/>
                 </a:solidFill>
                 <a:latin typeface="Courier New" pitchFamily="34" charset="0"/>
                 <a:ea typeface="Courier New" pitchFamily="34" charset="-122"/>
@@ -7162,7 +7182,7 @@
             <a:r>
               <a:rPr lang="en-US" sz="1400" dirty="0">
                 <a:solidFill>
-                  <a:srgbClr val="C9D3F5"/>
+                  <a:srgbClr val="1F2429"/>
                 </a:solidFill>
                 <a:latin typeface="Courier New" pitchFamily="34" charset="0"/>
                 <a:ea typeface="Courier New" pitchFamily="34" charset="-122"/>
@@ -7182,7 +7202,7 @@
             <a:r>
               <a:rPr lang="en-US" sz="1400" dirty="0">
                 <a:solidFill>
-                  <a:srgbClr val="C9D3F5"/>
+                  <a:srgbClr val="1F2429"/>
                 </a:solidFill>
                 <a:latin typeface="Courier New" pitchFamily="34" charset="0"/>
                 <a:ea typeface="Courier New" pitchFamily="34" charset="-122"/>
@@ -7202,7 +7222,7 @@
             <a:r>
               <a:rPr lang="en-US" sz="1400" dirty="0">
                 <a:solidFill>
-                  <a:srgbClr val="C9D3F5"/>
+                  <a:srgbClr val="1F2429"/>
                 </a:solidFill>
                 <a:latin typeface="Courier New" pitchFamily="34" charset="0"/>
                 <a:ea typeface="Courier New" pitchFamily="34" charset="-122"/>
@@ -8262,9 +8282,13 @@
             </a:avLst>
           </a:prstGeom>
           <a:solidFill>
-            <a:srgbClr val="1E1E4C"/>
+            <a:srgbClr val="F7F8F9"/>
           </a:solidFill>
-          <a:ln/>
+          <a:ln w="9525">
+            <a:solidFill>
+              <a:srgbClr val="D0D5DD"/>
+            </a:solidFill>
+          </a:ln>
         </p:spPr>
         <p:txBody>
           <a:bodyPr/>
@@ -8301,7 +8325,7 @@
             <a:r>
               <a:rPr lang="en-US" sz="1400" dirty="0">
                 <a:solidFill>
-                  <a:srgbClr val="C9D3F5"/>
+                  <a:srgbClr val="1F2429"/>
                 </a:solidFill>
                 <a:latin typeface="Courier New" pitchFamily="34" charset="0"/>
                 <a:ea typeface="Courier New" pitchFamily="34" charset="-122"/>
@@ -8321,7 +8345,7 @@
             <a:r>
               <a:rPr lang="en-US" sz="1400" dirty="0">
                 <a:solidFill>
-                  <a:srgbClr val="C9D3F5"/>
+                  <a:srgbClr val="1F2429"/>
                 </a:solidFill>
                 <a:latin typeface="Courier New" pitchFamily="34" charset="0"/>
                 <a:ea typeface="Courier New" pitchFamily="34" charset="-122"/>
@@ -8341,7 +8365,7 @@
             <a:r>
               <a:rPr lang="en-US" sz="1400" dirty="0">
                 <a:solidFill>
-                  <a:srgbClr val="C9D3F5"/>
+                  <a:srgbClr val="1F2429"/>
                 </a:solidFill>
                 <a:latin typeface="Courier New" pitchFamily="34" charset="0"/>
                 <a:ea typeface="Courier New" pitchFamily="34" charset="-122"/>
@@ -8777,9 +8801,13 @@
             </a:avLst>
           </a:prstGeom>
           <a:solidFill>
-            <a:srgbClr val="1E1E4C"/>
+            <a:srgbClr val="F7F8F9"/>
           </a:solidFill>
-          <a:ln/>
+          <a:ln w="9525">
+            <a:solidFill>
+              <a:srgbClr val="D0D5DD"/>
+            </a:solidFill>
+          </a:ln>
         </p:spPr>
         <p:txBody>
           <a:bodyPr/>
@@ -8816,7 +8844,7 @@
             <a:r>
               <a:rPr lang="en-US" sz="1400" dirty="0">
                 <a:solidFill>
-                  <a:srgbClr val="C9D3F5"/>
+                  <a:srgbClr val="1F2429"/>
                 </a:solidFill>
                 <a:latin typeface="Courier New" pitchFamily="34" charset="0"/>
                 <a:ea typeface="Courier New" pitchFamily="34" charset="-122"/>
@@ -8836,7 +8864,7 @@
             <a:r>
               <a:rPr lang="en-US" sz="1400" dirty="0">
                 <a:solidFill>
-                  <a:srgbClr val="C9D3F5"/>
+                  <a:srgbClr val="1F2429"/>
                 </a:solidFill>
                 <a:latin typeface="Courier New" pitchFamily="34" charset="0"/>
                 <a:ea typeface="Courier New" pitchFamily="34" charset="-122"/>
@@ -8856,7 +8884,7 @@
             <a:r>
               <a:rPr lang="en-US" sz="1400" dirty="0">
                 <a:solidFill>
-                  <a:srgbClr val="C9D3F5"/>
+                  <a:srgbClr val="1F2429"/>
                 </a:solidFill>
                 <a:latin typeface="Courier New" pitchFamily="34" charset="0"/>
                 <a:ea typeface="Courier New" pitchFamily="34" charset="-122"/>
@@ -8876,7 +8904,7 @@
             <a:r>
               <a:rPr lang="en-US" sz="1400" dirty="0">
                 <a:solidFill>
-                  <a:srgbClr val="C9D3F5"/>
+                  <a:srgbClr val="1F2429"/>
                 </a:solidFill>
                 <a:latin typeface="Courier New" pitchFamily="34" charset="0"/>
                 <a:ea typeface="Courier New" pitchFamily="34" charset="-122"/>
@@ -8896,7 +8924,7 @@
             <a:r>
               <a:rPr lang="en-US" sz="1400" dirty="0">
                 <a:solidFill>
-                  <a:srgbClr val="C9D3F5"/>
+                  <a:srgbClr val="1F2429"/>
                 </a:solidFill>
                 <a:latin typeface="Courier New" pitchFamily="34" charset="0"/>
                 <a:ea typeface="Courier New" pitchFamily="34" charset="-122"/>
@@ -9332,9 +9360,13 @@
             </a:avLst>
           </a:prstGeom>
           <a:solidFill>
-            <a:srgbClr val="1E1E4C"/>
+            <a:srgbClr val="F7F8F9"/>
           </a:solidFill>
-          <a:ln/>
+          <a:ln w="9525">
+            <a:solidFill>
+              <a:srgbClr val="D0D5DD"/>
+            </a:solidFill>
+          </a:ln>
         </p:spPr>
         <p:txBody>
           <a:bodyPr/>
@@ -9371,7 +9403,7 @@
             <a:r>
               <a:rPr lang="en-US" sz="1400" dirty="0">
                 <a:solidFill>
-                  <a:srgbClr val="C9D3F5"/>
+                  <a:srgbClr val="1F2429"/>
                 </a:solidFill>
                 <a:latin typeface="Courier New" pitchFamily="34" charset="0"/>
                 <a:ea typeface="Courier New" pitchFamily="34" charset="-122"/>
@@ -9391,7 +9423,7 @@
             <a:r>
               <a:rPr lang="en-US" sz="1400" dirty="0">
                 <a:solidFill>
-                  <a:srgbClr val="C9D3F5"/>
+                  <a:srgbClr val="1F2429"/>
                 </a:solidFill>
                 <a:latin typeface="Courier New" pitchFamily="34" charset="0"/>
                 <a:ea typeface="Courier New" pitchFamily="34" charset="-122"/>
@@ -9827,9 +9859,13 @@
             </a:avLst>
           </a:prstGeom>
           <a:solidFill>
-            <a:srgbClr val="1E1E4C"/>
+            <a:srgbClr val="F7F8F9"/>
           </a:solidFill>
-          <a:ln/>
+          <a:ln w="9525">
+            <a:solidFill>
+              <a:srgbClr val="D0D5DD"/>
+            </a:solidFill>
+          </a:ln>
         </p:spPr>
         <p:txBody>
           <a:bodyPr/>
@@ -9866,7 +9902,7 @@
             <a:r>
               <a:rPr lang="en-US" sz="1400" dirty="0">
                 <a:solidFill>
-                  <a:srgbClr val="C9D3F5"/>
+                  <a:srgbClr val="1F2429"/>
                 </a:solidFill>
                 <a:latin typeface="Courier New" pitchFamily="34" charset="0"/>
                 <a:ea typeface="Courier New" pitchFamily="34" charset="-122"/>
@@ -9886,7 +9922,7 @@
             <a:r>
               <a:rPr lang="en-US" sz="1400" dirty="0">
                 <a:solidFill>
-                  <a:srgbClr val="C9D3F5"/>
+                  <a:srgbClr val="1F2429"/>
                 </a:solidFill>
                 <a:latin typeface="Courier New" pitchFamily="34" charset="0"/>
                 <a:ea typeface="Courier New" pitchFamily="34" charset="-122"/>
@@ -9906,7 +9942,7 @@
             <a:r>
               <a:rPr lang="en-US" sz="1400" dirty="0">
                 <a:solidFill>
-                  <a:srgbClr val="C9D3F5"/>
+                  <a:srgbClr val="1F2429"/>
                 </a:solidFill>
                 <a:latin typeface="Courier New" pitchFamily="34" charset="0"/>
                 <a:ea typeface="Courier New" pitchFamily="34" charset="-122"/>
@@ -9926,7 +9962,7 @@
             <a:r>
               <a:rPr lang="en-US" sz="1400" dirty="0">
                 <a:solidFill>
-                  <a:srgbClr val="C9D3F5"/>
+                  <a:srgbClr val="1F2429"/>
                 </a:solidFill>
                 <a:latin typeface="Courier New" pitchFamily="34" charset="0"/>
                 <a:ea typeface="Courier New" pitchFamily="34" charset="-122"/>
@@ -10362,9 +10398,13 @@
             </a:avLst>
           </a:prstGeom>
           <a:solidFill>
-            <a:srgbClr val="1E1E4C"/>
+            <a:srgbClr val="F7F8F9"/>
           </a:solidFill>
-          <a:ln/>
+          <a:ln w="9525">
+            <a:solidFill>
+              <a:srgbClr val="D0D5DD"/>
+            </a:solidFill>
+          </a:ln>
         </p:spPr>
         <p:txBody>
           <a:bodyPr/>
@@ -10401,7 +10441,7 @@
             <a:r>
               <a:rPr lang="en-US" sz="1400" dirty="0">
                 <a:solidFill>
-                  <a:srgbClr val="C9D3F5"/>
+                  <a:srgbClr val="1F2429"/>
                 </a:solidFill>
                 <a:latin typeface="Courier New" pitchFamily="34" charset="0"/>
                 <a:ea typeface="Courier New" pitchFamily="34" charset="-122"/>
@@ -10421,7 +10461,7 @@
             <a:r>
               <a:rPr lang="en-US" sz="1400" dirty="0">
                 <a:solidFill>
-                  <a:srgbClr val="C9D3F5"/>
+                  <a:srgbClr val="1F2429"/>
                 </a:solidFill>
                 <a:latin typeface="Courier New" pitchFamily="34" charset="0"/>
                 <a:ea typeface="Courier New" pitchFamily="34" charset="-122"/>
@@ -10441,7 +10481,7 @@
             <a:r>
               <a:rPr lang="en-US" sz="1400" dirty="0">
                 <a:solidFill>
-                  <a:srgbClr val="C9D3F5"/>
+                  <a:srgbClr val="1F2429"/>
                 </a:solidFill>
                 <a:latin typeface="Courier New" pitchFamily="34" charset="0"/>
                 <a:ea typeface="Courier New" pitchFamily="34" charset="-122"/>
@@ -10461,7 +10501,7 @@
             <a:r>
               <a:rPr lang="en-US" sz="1400" dirty="0">
                 <a:solidFill>
-                  <a:srgbClr val="C9D3F5"/>
+                  <a:srgbClr val="1F2429"/>
                 </a:solidFill>
                 <a:latin typeface="Courier New" pitchFamily="34" charset="0"/>
                 <a:ea typeface="Courier New" pitchFamily="34" charset="-122"/>
@@ -10481,7 +10521,7 @@
             <a:r>
               <a:rPr lang="en-US" sz="1400" dirty="0">
                 <a:solidFill>
-                  <a:srgbClr val="C9D3F5"/>
+                  <a:srgbClr val="1F2429"/>
                 </a:solidFill>
                 <a:latin typeface="Courier New" pitchFamily="34" charset="0"/>
                 <a:ea typeface="Courier New" pitchFamily="34" charset="-122"/>
@@ -10501,7 +10541,7 @@
             <a:r>
               <a:rPr lang="en-US" sz="1400" dirty="0">
                 <a:solidFill>
-                  <a:srgbClr val="C9D3F5"/>
+                  <a:srgbClr val="1F2429"/>
                 </a:solidFill>
                 <a:latin typeface="Courier New" pitchFamily="34" charset="0"/>
                 <a:ea typeface="Courier New" pitchFamily="34" charset="-122"/>
@@ -10521,7 +10561,7 @@
             <a:r>
               <a:rPr lang="en-US" sz="1400" dirty="0">
                 <a:solidFill>
-                  <a:srgbClr val="C9D3F5"/>
+                  <a:srgbClr val="1F2429"/>
                 </a:solidFill>
                 <a:latin typeface="Courier New" pitchFamily="34" charset="0"/>
                 <a:ea typeface="Courier New" pitchFamily="34" charset="-122"/>
@@ -10957,9 +10997,13 @@
             </a:avLst>
           </a:prstGeom>
           <a:solidFill>
-            <a:srgbClr val="1E1E4C"/>
+            <a:srgbClr val="F7F8F9"/>
           </a:solidFill>
-          <a:ln/>
+          <a:ln w="9525">
+            <a:solidFill>
+              <a:srgbClr val="D0D5DD"/>
+            </a:solidFill>
+          </a:ln>
         </p:spPr>
         <p:txBody>
           <a:bodyPr/>
@@ -10996,7 +11040,7 @@
             <a:r>
               <a:rPr lang="en-US" sz="1400" dirty="0">
                 <a:solidFill>
-                  <a:srgbClr val="C9D3F5"/>
+                  <a:srgbClr val="1F2429"/>
                 </a:solidFill>
                 <a:latin typeface="Courier New" pitchFamily="34" charset="0"/>
                 <a:ea typeface="Courier New" pitchFamily="34" charset="-122"/>
@@ -12206,7 +12250,7 @@
         <p:spPr>
           <a:xfrm>
             <a:off x="640080" y="1965960"/>
-            <a:ext cx="10911535" cy="1737360"/>
+            <a:ext cx="10911535" cy="3657600"/>
           </a:xfrm>
           <a:prstGeom prst="roundRect">
             <a:avLst>
@@ -12237,7 +12281,7 @@
         <p:spPr>
           <a:xfrm>
             <a:off x="868680" y="2103120"/>
-            <a:ext cx="10454335" cy="274320"/>
+            <a:ext cx="10454335" cy="400000"/>
           </a:xfrm>
           <a:prstGeom prst="rect">
             <a:avLst/>
@@ -12253,7 +12297,7 @@
               <a:buNone/>
             </a:pPr>
             <a:r>
-              <a:rPr lang="en-US" sz="1000" b="1" spc="200" kern="0" dirty="0">
+              <a:rPr lang="en-US" sz="1800" b="1" spc="200" kern="0" dirty="0">
                 <a:solidFill>
                   <a:srgbClr val="1F7A46"/>
                 </a:solidFill>
@@ -12263,7 +12307,7 @@
               </a:rPr>
               <a:t>TIP</a:t>
             </a:r>
-            <a:endParaRPr lang="en-US" sz="1000" dirty="0"/>
+            <a:endParaRPr lang="en-US" sz="1800" dirty="0"/>
           </a:p>
         </p:txBody>
       </p:sp>
@@ -12275,8 +12319,8 @@
         </p:nvSpPr>
         <p:spPr>
           <a:xfrm>
-            <a:off x="868680" y="2404872"/>
-            <a:ext cx="10454335" cy="1143000"/>
+            <a:off x="868680" y="2795960"/>
+            <a:ext cx="10454335" cy="2500000"/>
           </a:xfrm>
           <a:prstGeom prst="rect">
             <a:avLst/>
@@ -12285,14 +12329,14 @@
           <a:ln/>
         </p:spPr>
         <p:txBody>
-          <a:bodyPr wrap="square" lIns="0" tIns="0" rIns="0" bIns="0" rtlCol="0" anchor="t"/>
+          <a:bodyPr wrap="square" lIns="0" tIns="0" rIns="0" bIns="0" rtlCol="0" anchor="ctr"/>
           <a:lstStyle/>
           <a:p>
             <a:pPr indent="0" marL="0">
               <a:buNone/>
             </a:pPr>
             <a:r>
-              <a:rPr lang="en-US" sz="1250" dirty="0">
+              <a:rPr lang="en-US" sz="2800" dirty="0">
                 <a:solidFill>
                   <a:srgbClr val="26262F"/>
                 </a:solidFill>
@@ -12302,7 +12346,7 @@
               </a:rPr>
               <a:t>Arranging things in ONE direction (a row of buttons, a horizontal menu)? Reach for Flexbox. Need to control rows AND columns together (an overall page layout, a gallery)? Reach for Grid. In real projects you'll use both together constantly.</a:t>
             </a:r>
-            <a:endParaRPr lang="en-US" sz="1250" dirty="0"/>
+            <a:endParaRPr lang="en-US" sz="2800" dirty="0"/>
           </a:p>
         </p:txBody>
       </p:sp>
@@ -12476,9 +12520,13 @@
             </a:avLst>
           </a:prstGeom>
           <a:solidFill>
-            <a:srgbClr val="1E1E4C"/>
+            <a:srgbClr val="F7F8F9"/>
           </a:solidFill>
-          <a:ln/>
+          <a:ln w="9525">
+            <a:solidFill>
+              <a:srgbClr val="D0D5DD"/>
+            </a:solidFill>
+          </a:ln>
         </p:spPr>
         <p:txBody>
           <a:bodyPr/>
@@ -12515,7 +12563,7 @@
             <a:r>
               <a:rPr lang="en-US" sz="1400" dirty="0">
                 <a:solidFill>
-                  <a:srgbClr val="C9D3F5"/>
+                  <a:srgbClr val="1F2429"/>
                 </a:solidFill>
                 <a:latin typeface="Courier New" pitchFamily="34" charset="0"/>
                 <a:ea typeface="Courier New" pitchFamily="34" charset="-122"/>
@@ -12535,7 +12583,7 @@
             <a:r>
               <a:rPr lang="en-US" sz="1400" dirty="0">
                 <a:solidFill>
-                  <a:srgbClr val="C9D3F5"/>
+                  <a:srgbClr val="1F2429"/>
                 </a:solidFill>
                 <a:latin typeface="Courier New" pitchFamily="34" charset="0"/>
                 <a:ea typeface="Courier New" pitchFamily="34" charset="-122"/>
@@ -12555,7 +12603,7 @@
             <a:r>
               <a:rPr lang="en-US" sz="1400" dirty="0">
                 <a:solidFill>
-                  <a:srgbClr val="C9D3F5"/>
+                  <a:srgbClr val="1F2429"/>
                 </a:solidFill>
                 <a:latin typeface="Courier New" pitchFamily="34" charset="0"/>
                 <a:ea typeface="Courier New" pitchFamily="34" charset="-122"/>
@@ -12575,7 +12623,7 @@
             <a:r>
               <a:rPr lang="en-US" sz="1400" dirty="0">
                 <a:solidFill>
-                  <a:srgbClr val="C9D3F5"/>
+                  <a:srgbClr val="1F2429"/>
                 </a:solidFill>
                 <a:latin typeface="Courier New" pitchFamily="34" charset="0"/>
                 <a:ea typeface="Courier New" pitchFamily="34" charset="-122"/>
@@ -12595,7 +12643,7 @@
             <a:r>
               <a:rPr lang="en-US" sz="1400" dirty="0">
                 <a:solidFill>
-                  <a:srgbClr val="C9D3F5"/>
+                  <a:srgbClr val="1F2429"/>
                 </a:solidFill>
                 <a:latin typeface="Courier New" pitchFamily="34" charset="0"/>
                 <a:ea typeface="Courier New" pitchFamily="34" charset="-122"/>
@@ -12615,7 +12663,7 @@
             <a:r>
               <a:rPr lang="en-US" sz="1400" dirty="0">
                 <a:solidFill>
-                  <a:srgbClr val="C9D3F5"/>
+                  <a:srgbClr val="1F2429"/>
                 </a:solidFill>
                 <a:latin typeface="Courier New" pitchFamily="34" charset="0"/>
                 <a:ea typeface="Courier New" pitchFamily="34" charset="-122"/>
@@ -12635,7 +12683,7 @@
             <a:r>
               <a:rPr lang="en-US" sz="1400" dirty="0">
                 <a:solidFill>
-                  <a:srgbClr val="C9D3F5"/>
+                  <a:srgbClr val="1F2429"/>
                 </a:solidFill>
                 <a:latin typeface="Courier New" pitchFamily="34" charset="0"/>
                 <a:ea typeface="Courier New" pitchFamily="34" charset="-122"/>
@@ -12655,7 +12703,7 @@
             <a:r>
               <a:rPr lang="en-US" sz="1400" dirty="0">
                 <a:solidFill>
-                  <a:srgbClr val="C9D3F5"/>
+                  <a:srgbClr val="1F2429"/>
                 </a:solidFill>
                 <a:latin typeface="Courier New" pitchFamily="34" charset="0"/>
                 <a:ea typeface="Courier New" pitchFamily="34" charset="-122"/>
@@ -12675,7 +12723,7 @@
             <a:r>
               <a:rPr lang="en-US" sz="1400" dirty="0">
                 <a:solidFill>
-                  <a:srgbClr val="C9D3F5"/>
+                  <a:srgbClr val="1F2429"/>
                 </a:solidFill>
                 <a:latin typeface="Courier New" pitchFamily="34" charset="0"/>
                 <a:ea typeface="Courier New" pitchFamily="34" charset="-122"/>
@@ -12695,7 +12743,7 @@
             <a:r>
               <a:rPr lang="en-US" sz="1400" dirty="0">
                 <a:solidFill>
-                  <a:srgbClr val="C9D3F5"/>
+                  <a:srgbClr val="1F2429"/>
                 </a:solidFill>
                 <a:latin typeface="Courier New" pitchFamily="34" charset="0"/>
                 <a:ea typeface="Courier New" pitchFamily="34" charset="-122"/>
@@ -14111,9 +14159,13 @@
             </a:avLst>
           </a:prstGeom>
           <a:solidFill>
-            <a:srgbClr val="1E1E4C"/>
+            <a:srgbClr val="F7F8F9"/>
           </a:solidFill>
-          <a:ln/>
+          <a:ln w="9525">
+            <a:solidFill>
+              <a:srgbClr val="D0D5DD"/>
+            </a:solidFill>
+          </a:ln>
         </p:spPr>
         <p:txBody>
           <a:bodyPr/>
@@ -14150,7 +14202,7 @@
             <a:r>
               <a:rPr lang="en-US" sz="1250" dirty="0">
                 <a:solidFill>
-                  <a:srgbClr val="C9D3F5"/>
+                  <a:srgbClr val="1F2429"/>
                 </a:solidFill>
                 <a:latin typeface="Courier New" pitchFamily="34" charset="0"/>
                 <a:ea typeface="Courier New" pitchFamily="34" charset="-122"/>
@@ -14170,7 +14222,7 @@
             <a:r>
               <a:rPr lang="en-US" sz="1250" dirty="0">
                 <a:solidFill>
-                  <a:srgbClr val="C9D3F5"/>
+                  <a:srgbClr val="1F2429"/>
                 </a:solidFill>
                 <a:latin typeface="Courier New" pitchFamily="34" charset="0"/>
                 <a:ea typeface="Courier New" pitchFamily="34" charset="-122"/>
@@ -14190,7 +14242,7 @@
             <a:r>
               <a:rPr lang="en-US" sz="1250" dirty="0">
                 <a:solidFill>
-                  <a:srgbClr val="C9D3F5"/>
+                  <a:srgbClr val="1F2429"/>
                 </a:solidFill>
                 <a:latin typeface="Courier New" pitchFamily="34" charset="0"/>
                 <a:ea typeface="Courier New" pitchFamily="34" charset="-122"/>
@@ -14434,9 +14486,13 @@
             </a:avLst>
           </a:prstGeom>
           <a:solidFill>
-            <a:srgbClr val="1E1E4C"/>
+            <a:srgbClr val="F7F8F9"/>
           </a:solidFill>
-          <a:ln/>
+          <a:ln w="9525">
+            <a:solidFill>
+              <a:srgbClr val="D0D5DD"/>
+            </a:solidFill>
+          </a:ln>
         </p:spPr>
         <p:txBody>
           <a:bodyPr/>
@@ -14473,7 +14529,7 @@
             <a:r>
               <a:rPr lang="en-US" sz="1400" dirty="0">
                 <a:solidFill>
-                  <a:srgbClr val="C9D3F5"/>
+                  <a:srgbClr val="1F2429"/>
                 </a:solidFill>
                 <a:latin typeface="Courier New" pitchFamily="34" charset="0"/>
                 <a:ea typeface="Courier New" pitchFamily="34" charset="-122"/>
@@ -15830,9 +15886,13 @@
             </a:avLst>
           </a:prstGeom>
           <a:solidFill>
-            <a:srgbClr val="1E1E4C"/>
+            <a:srgbClr val="F7F8F9"/>
           </a:solidFill>
-          <a:ln/>
+          <a:ln w="9525">
+            <a:solidFill>
+              <a:srgbClr val="D0D5DD"/>
+            </a:solidFill>
+          </a:ln>
         </p:spPr>
         <p:txBody>
           <a:bodyPr/>
@@ -15869,7 +15929,7 @@
             <a:r>
               <a:rPr lang="en-US" sz="1400" dirty="0">
                 <a:solidFill>
-                  <a:srgbClr val="C9D3F5"/>
+                  <a:srgbClr val="1F2429"/>
                 </a:solidFill>
                 <a:latin typeface="Courier New" pitchFamily="34" charset="0"/>
                 <a:ea typeface="Courier New" pitchFamily="34" charset="-122"/>
@@ -15889,7 +15949,7 @@
             <a:r>
               <a:rPr lang="en-US" sz="1400" dirty="0">
                 <a:solidFill>
-                  <a:srgbClr val="C9D3F5"/>
+                  <a:srgbClr val="1F2429"/>
                 </a:solidFill>
                 <a:latin typeface="Courier New" pitchFamily="34" charset="0"/>
                 <a:ea typeface="Courier New" pitchFamily="34" charset="-122"/>
